--- a/privacypal-enterprise-deck.pptx
+++ b/privacypal-enterprise-deck.pptx
@@ -4,6 +4,9 @@
   <p:sldMasterIdLst>
     <p:sldMasterId id="2147483648" r:id="rId1"/>
   </p:sldMasterIdLst>
+  <p:notesMasterIdLst>
+    <p:notesMasterId r:id="rId13"/>
+  </p:notesMasterIdLst>
   <p:sldIdLst>
     <p:sldId id="256" r:id="rId2"/>
     <p:sldId id="257" r:id="rId3"/>
@@ -17,11 +20,8 @@
     <p:sldId id="265" r:id="rId11"/>
     <p:sldId id="266" r:id="rId12"/>
   </p:sldIdLst>
-  <p:notesMasterIdLst>
-    <p:notesMasterId r:id="rId13"/>
-  </p:notesMasterIdLst>
-  <p:sldSz cx="12191695" cy="6858000"/>
-  <p:notesSz cx="6858000" cy="12191695"/>
+  <p:sldSz cx="12192000" cy="6858000"/>
+  <p:notesSz cx="6858000" cy="12192000"/>
   <p:defaultTextStyle>
     <a:lvl1pPr marL="0" algn="l" defTabSz="914400" rtl="0" eaLnBrk="1" latinLnBrk="0" hangingPunct="1">
       <a:defRPr sz="1800" kern="1200">
@@ -114,6 +114,11 @@
       </a:defRPr>
     </a:lvl9pPr>
   </p:defaultTextStyle>
+  <p:extLst>
+    <p:ext uri="{EFAFB233-063F-42B5-8137-9DF3F51BA10A}">
+      <p15:sldGuideLst xmlns:p15="http://schemas.microsoft.com/office/powerpoint/2012/main"/>
+    </p:ext>
+  </p:extLst>
 </p:presentation>
 </file>
 
@@ -139,234 +144,10 @@
           <a:chExt cx="0" cy="0"/>
         </a:xfrm>
       </p:grpSpPr>
-      <p:sp>
-        <p:nvSpPr>
-          <p:cNvPr id="2" name="Header Placeholder 1"/>
-          <p:cNvSpPr>
-            <a:spLocks noGrp="1"/>
-          </p:cNvSpPr>
-          <p:nvPr>
-            <p:ph type="hdr" sz="quarter"/>
-          </p:nvPr>
-        </p:nvSpPr>
-        <p:spPr>
-          <a:xfrm>
-            <a:off x="0" y="0"/>
-            <a:ext cx="2971800" cy="458788"/>
-          </a:xfrm>
-          <a:prstGeom prst="rect">
-            <a:avLst/>
-          </a:prstGeom>
-        </p:spPr>
-        <p:txBody>
-          <a:bodyPr vert="horz" lIns="91440" tIns="45720" rIns="91440" bIns="45720" rtlCol="0"/>
-          <a:lstStyle>
-            <a:lvl1pPr algn="l">
-              <a:defRPr sz="1200"/>
-            </a:lvl1pPr>
-          </a:lstStyle>
-          <a:p>
-            <a:endParaRPr lang="en-US"/>
-          </a:p>
-        </p:txBody>
-      </p:sp>
-      <p:sp>
-        <p:nvSpPr>
-          <p:cNvPr id="3" name="Date Placeholder 2"/>
-          <p:cNvSpPr>
-            <a:spLocks noGrp="1"/>
-          </p:cNvSpPr>
-          <p:nvPr>
-            <p:ph type="dt" idx="1"/>
-          </p:nvPr>
-        </p:nvSpPr>
-        <p:spPr>
-          <a:xfrm>
-            <a:off x="3884613" y="0"/>
-            <a:ext cx="2971800" cy="458788"/>
-          </a:xfrm>
-          <a:prstGeom prst="rect">
-            <a:avLst/>
-          </a:prstGeom>
-        </p:spPr>
-        <p:txBody>
-          <a:bodyPr vert="horz" lIns="91440" tIns="45720" rIns="91440" bIns="45720" rtlCol="0"/>
-          <a:lstStyle>
-            <a:lvl1pPr algn="r">
-              <a:defRPr sz="1200"/>
-            </a:lvl1pPr>
-          </a:lstStyle>
-          <a:p>
-            <a:fld id="{5282F153-3F37-0F45-9E97-73ACFA13230C}" type="datetimeFigureOut">
-              <a:rPr lang="en-US"/>
-              <a:t>7/23/19</a:t>
-            </a:fld>
-            <a:endParaRPr lang="en-US"/>
-          </a:p>
-        </p:txBody>
-      </p:sp>
-      <p:sp>
-        <p:nvSpPr>
-          <p:cNvPr id="4" name="Slide Image Placeholder 3"/>
-          <p:cNvSpPr>
-            <a:spLocks noGrp="1" noRot="1" noChangeAspect="1"/>
-          </p:cNvSpPr>
-          <p:nvPr>
-            <p:ph type="sldImg" idx="2"/>
-          </p:nvPr>
-        </p:nvSpPr>
-        <p:spPr>
-          <a:xfrm>
-            <a:off x="685800" y="1143000"/>
-            <a:ext cx="5486400" cy="3086100"/>
-          </a:xfrm>
-          <a:prstGeom prst="rect">
-            <a:avLst/>
-          </a:prstGeom>
-          <a:noFill/>
-          <a:ln w="12700">
-            <a:solidFill>
-              <a:prstClr val="black"/>
-            </a:solidFill>
-          </a:ln>
-        </p:spPr>
-        <p:txBody>
-          <a:bodyPr vert="horz" lIns="91440" tIns="45720" rIns="91440" bIns="45720" rtlCol="0" anchor="ctr"/>
-          <a:lstStyle/>
-          <a:p>
-            <a:endParaRPr lang="en-US"/>
-          </a:p>
-        </p:txBody>
-      </p:sp>
-      <p:sp>
-        <p:nvSpPr>
-          <p:cNvPr id="5" name="Notes Placeholder 4"/>
-          <p:cNvSpPr>
-            <a:spLocks noGrp="1"/>
-          </p:cNvSpPr>
-          <p:nvPr>
-            <p:ph type="body" sz="quarter" idx="3"/>
-          </p:nvPr>
-        </p:nvSpPr>
-        <p:spPr>
-          <a:xfrm>
-            <a:off x="685800" y="4400550"/>
-            <a:ext cx="5486400" cy="3600450"/>
-          </a:xfrm>
-          <a:prstGeom prst="rect">
-            <a:avLst/>
-          </a:prstGeom>
-        </p:spPr>
-        <p:txBody>
-          <a:bodyPr vert="horz" lIns="91440" tIns="45720" rIns="91440" bIns="45720" rtlCol="0"/>
-          <a:lstStyle/>
-          <a:p>
-            <a:pPr lvl="0"/>
-            <a:r>
-              <a:rPr lang="en-US"/>
-              <a:t>Click to edit Master text styles</a:t>
-            </a:r>
-          </a:p>
-          <a:p>
-            <a:pPr lvl="1"/>
-            <a:r>
-              <a:rPr lang="en-US"/>
-              <a:t>Second level</a:t>
-            </a:r>
-          </a:p>
-          <a:p>
-            <a:pPr lvl="2"/>
-            <a:r>
-              <a:rPr lang="en-US"/>
-              <a:t>Third level</a:t>
-            </a:r>
-          </a:p>
-          <a:p>
-            <a:pPr lvl="3"/>
-            <a:r>
-              <a:rPr lang="en-US"/>
-              <a:t>Fourth level</a:t>
-            </a:r>
-          </a:p>
-          <a:p>
-            <a:pPr lvl="4"/>
-            <a:r>
-              <a:rPr lang="en-US"/>
-              <a:t>Fifth level</a:t>
-            </a:r>
-          </a:p>
-        </p:txBody>
-      </p:sp>
-      <p:sp>
-        <p:nvSpPr>
-          <p:cNvPr id="6" name="Footer Placeholder 5"/>
-          <p:cNvSpPr>
-            <a:spLocks noGrp="1"/>
-          </p:cNvSpPr>
-          <p:nvPr>
-            <p:ph type="ftr" sz="quarter" idx="4"/>
-          </p:nvPr>
-        </p:nvSpPr>
-        <p:spPr>
-          <a:xfrm>
-            <a:off x="0" y="8685213"/>
-            <a:ext cx="2971800" cy="458787"/>
-          </a:xfrm>
-          <a:prstGeom prst="rect">
-            <a:avLst/>
-          </a:prstGeom>
-        </p:spPr>
-        <p:txBody>
-          <a:bodyPr vert="horz" lIns="91440" tIns="45720" rIns="91440" bIns="45720" rtlCol="0" anchor="b"/>
-          <a:lstStyle>
-            <a:lvl1pPr algn="l">
-              <a:defRPr sz="1200"/>
-            </a:lvl1pPr>
-          </a:lstStyle>
-          <a:p>
-            <a:endParaRPr lang="en-US"/>
-          </a:p>
-        </p:txBody>
-      </p:sp>
-      <p:sp>
-        <p:nvSpPr>
-          <p:cNvPr id="7" name="Slide Number Placeholder 6"/>
-          <p:cNvSpPr>
-            <a:spLocks noGrp="1"/>
-          </p:cNvSpPr>
-          <p:nvPr>
-            <p:ph type="sldNum" sz="quarter" idx="5"/>
-          </p:nvPr>
-        </p:nvSpPr>
-        <p:spPr>
-          <a:xfrm>
-            <a:off x="3884613" y="8685213"/>
-            <a:ext cx="2971800" cy="458787"/>
-          </a:xfrm>
-          <a:prstGeom prst="rect">
-            <a:avLst/>
-          </a:prstGeom>
-        </p:spPr>
-        <p:txBody>
-          <a:bodyPr vert="horz" lIns="91440" tIns="45720" rIns="91440" bIns="45720" rtlCol="0" anchor="b"/>
-          <a:lstStyle>
-            <a:lvl1pPr algn="r">
-              <a:defRPr sz="1200"/>
-            </a:lvl1pPr>
-          </a:lstStyle>
-          <a:p>
-            <a:fld id="{CE5E9CC1-C706-0F49-92D6-E571CC5EEA8F}" type="slidenum">
-              <a:rPr lang="en-US"/>
-              <a:t>‹#›</a:t>
-            </a:fld>
-            <a:endParaRPr lang="en-US"/>
-          </a:p>
-        </p:txBody>
-      </p:sp>
     </p:spTree>
     <p:extLst>
       <p:ext uri="{BB962C8B-B14F-4D97-AF65-F5344CB8AC3E}">
-        <p14:creationId xmlns:p14="http://schemas.microsoft.com/office/powerpoint/2010/main" val="1024086991"/>
+        <p14:creationId xmlns:p14="http://schemas.microsoft.com/office/powerpoint/2010/main" val="1197479414"/>
       </p:ext>
     </p:extLst>
   </p:cSld>
@@ -510,10 +291,6 @@
           <a:bodyPr/>
           <a:lstStyle/>
           <a:p>
-            <a:r>
-              <a:rPr lang="en-US" dirty="0"/>
-              <a:t/>
-            </a:r>
             <a:endParaRPr lang="en-US" dirty="0"/>
           </a:p>
         </p:txBody>
@@ -598,10 +375,6 @@
           <a:bodyPr/>
           <a:lstStyle/>
           <a:p>
-            <a:r>
-              <a:rPr lang="en-US" dirty="0"/>
-              <a:t/>
-            </a:r>
             <a:endParaRPr lang="en-US" dirty="0"/>
           </a:p>
         </p:txBody>
@@ -686,10 +459,6 @@
           <a:bodyPr/>
           <a:lstStyle/>
           <a:p>
-            <a:r>
-              <a:rPr lang="en-US" dirty="0"/>
-              <a:t/>
-            </a:r>
             <a:endParaRPr lang="en-US" dirty="0"/>
           </a:p>
         </p:txBody>
@@ -774,10 +543,6 @@
           <a:bodyPr/>
           <a:lstStyle/>
           <a:p>
-            <a:r>
-              <a:rPr lang="en-US" dirty="0"/>
-              <a:t/>
-            </a:r>
             <a:endParaRPr lang="en-US" dirty="0"/>
           </a:p>
         </p:txBody>
@@ -862,10 +627,6 @@
           <a:bodyPr/>
           <a:lstStyle/>
           <a:p>
-            <a:r>
-              <a:rPr lang="en-US" dirty="0"/>
-              <a:t/>
-            </a:r>
             <a:endParaRPr lang="en-US" dirty="0"/>
           </a:p>
         </p:txBody>
@@ -950,10 +711,6 @@
           <a:bodyPr/>
           <a:lstStyle/>
           <a:p>
-            <a:r>
-              <a:rPr lang="en-US" dirty="0"/>
-              <a:t/>
-            </a:r>
             <a:endParaRPr lang="en-US" dirty="0"/>
           </a:p>
         </p:txBody>
@@ -1038,10 +795,6 @@
           <a:bodyPr/>
           <a:lstStyle/>
           <a:p>
-            <a:r>
-              <a:rPr lang="en-US" dirty="0"/>
-              <a:t/>
-            </a:r>
             <a:endParaRPr lang="en-US" dirty="0"/>
           </a:p>
         </p:txBody>
@@ -1126,10 +879,6 @@
           <a:bodyPr/>
           <a:lstStyle/>
           <a:p>
-            <a:r>
-              <a:rPr lang="en-US" dirty="0"/>
-              <a:t/>
-            </a:r>
             <a:endParaRPr lang="en-US" dirty="0"/>
           </a:p>
         </p:txBody>
@@ -1214,10 +963,6 @@
           <a:bodyPr/>
           <a:lstStyle/>
           <a:p>
-            <a:r>
-              <a:rPr lang="en-US" dirty="0"/>
-              <a:t/>
-            </a:r>
             <a:endParaRPr lang="en-US" dirty="0"/>
           </a:p>
         </p:txBody>
@@ -1302,10 +1047,6 @@
           <a:bodyPr/>
           <a:lstStyle/>
           <a:p>
-            <a:r>
-              <a:rPr lang="en-US" dirty="0"/>
-              <a:t/>
-            </a:r>
             <a:endParaRPr lang="en-US" dirty="0"/>
           </a:p>
         </p:txBody>
@@ -1390,10 +1131,6 @@
           <a:bodyPr/>
           <a:lstStyle/>
           <a:p>
-            <a:r>
-              <a:rPr lang="en-US" dirty="0"/>
-              <a:t/>
-            </a:r>
             <a:endParaRPr lang="en-US" dirty="0"/>
           </a:p>
         </p:txBody>
@@ -1467,6 +1204,11 @@
 <file path=ppt/slideMasters/slideMaster1.xml><?xml version="1.0" encoding="utf-8"?>
 <p:sldMaster xmlns:a="http://schemas.openxmlformats.org/drawingml/2006/main" xmlns:r="http://schemas.openxmlformats.org/officeDocument/2006/relationships" xmlns:p="http://schemas.openxmlformats.org/presentationml/2006/main">
   <p:cSld>
+    <p:bg>
+      <p:bgRef idx="1001">
+        <a:schemeClr val="bg1"/>
+      </p:bgRef>
+    </p:bg>
     <p:spTree>
       <p:nvGrpSpPr>
         <p:cNvPr id="1" name=""/>
@@ -1749,6 +1491,7 @@
         <a:solidFill>
           <a:srgbClr val="01204E"/>
         </a:solidFill>
+        <a:effectLst/>
       </p:bgPr>
     </p:bg>
     <p:spTree>
@@ -1786,17 +1529,24 @@
           </a:solidFill>
           <a:ln/>
         </p:spPr>
+        <p:txBody>
+          <a:bodyPr/>
+          <a:lstStyle/>
+          <a:p>
+            <a:endParaRPr lang="en-US"/>
+          </a:p>
+        </p:txBody>
       </p:sp>
       <p:pic>
         <p:nvPicPr>
-          <p:cNvPr id="3" name="Image 0" descr="assets/pp-logo-light.png">    </p:cNvPr>
+          <p:cNvPr id="3" name="Image 0" descr="assets/pp-logo-light.png"/>
           <p:cNvPicPr>
             <a:picLocks noChangeAspect="1"/>
           </p:cNvPicPr>
           <p:nvPr/>
         </p:nvPicPr>
         <p:blipFill>
-          <a:blip r:embed="rId1"/>
+          <a:blip r:embed="rId3"/>
           <a:stretch>
             <a:fillRect/>
           </a:stretch>
@@ -1830,6 +1580,13 @@
           </a:solidFill>
           <a:ln/>
         </p:spPr>
+        <p:txBody>
+          <a:bodyPr/>
+          <a:lstStyle/>
+          <a:p>
+            <a:endParaRPr lang="en-US"/>
+          </a:p>
+        </p:txBody>
       </p:sp>
       <p:sp>
         <p:nvSpPr>
@@ -1852,11 +1609,11 @@
           <a:bodyPr wrap="square" lIns="0" tIns="0" rIns="0" bIns="0" rtlCol="0" anchor="ctr"/>
           <a:lstStyle/>
           <a:p>
-            <a:pPr algn="l" indent="0" marL="0">
-              <a:buNone/>
-            </a:pPr>
-            <a:r>
-              <a:rPr lang="en-US" sz="1250" b="1" spc="300" kern="0" dirty="0">
+            <a:pPr marL="0" indent="0" algn="l">
+              <a:buNone/>
+            </a:pPr>
+            <a:r>
+              <a:rPr lang="en-US" sz="1250" b="1" kern="0" spc="300" dirty="0">
                 <a:solidFill>
                   <a:srgbClr val="12A7B5"/>
                 </a:solidFill>
@@ -1891,7 +1648,7 @@
           <a:bodyPr wrap="square" lIns="0" tIns="0" rIns="0" bIns="0" rtlCol="0" anchor="ctr"/>
           <a:lstStyle/>
           <a:p>
-            <a:pPr indent="0" marL="0">
+            <a:pPr marL="0" indent="0">
               <a:lnSpc>
                 <a:spcPct val="100000"/>
               </a:lnSpc>
@@ -1910,60 +1667,6 @@
             </a:r>
             <a:endParaRPr lang="en-US" sz="4800" dirty="0"/>
           </a:p>
-          <a:p>
-            <a:pPr indent="0" marL="0">
-              <a:lnSpc>
-                <a:spcPct val="100000"/>
-              </a:lnSpc>
-              <a:buNone/>
-            </a:pPr>
-            <a:r>
-              <a:rPr lang="en-US" sz="4800" b="1" dirty="0">
-                <a:solidFill>
-                  <a:srgbClr val="FFFFFF"/>
-                </a:solidFill>
-                <a:latin typeface="Space Grotesk" pitchFamily="34" charset="0"/>
-                <a:ea typeface="Space Grotesk" pitchFamily="34" charset="-122"/>
-                <a:cs typeface="Space Grotesk" pitchFamily="34" charset="-120"/>
-              </a:rPr>
-              <a:t>Without blocking a </a:t>
-            </a:r>
-            <a:pPr indent="0" marL="0">
-              <a:lnSpc>
-                <a:spcPct val="100000"/>
-              </a:lnSpc>
-              <a:buNone/>
-            </a:pPr>
-            <a:r>
-              <a:rPr lang="en-US" sz="4800" b="1" dirty="0">
-                <a:solidFill>
-                  <a:srgbClr val="12A7B5"/>
-                </a:solidFill>
-                <a:latin typeface="Space Grotesk" pitchFamily="34" charset="0"/>
-                <a:ea typeface="Space Grotesk" pitchFamily="34" charset="-122"/>
-                <a:cs typeface="Space Grotesk" pitchFamily="34" charset="-120"/>
-              </a:rPr>
-              <a:t>single user</a:t>
-            </a:r>
-            <a:pPr indent="0" marL="0">
-              <a:lnSpc>
-                <a:spcPct val="100000"/>
-              </a:lnSpc>
-              <a:buNone/>
-            </a:pPr>
-            <a:r>
-              <a:rPr lang="en-US" sz="4800" b="1" dirty="0">
-                <a:solidFill>
-                  <a:srgbClr val="FFFFFF"/>
-                </a:solidFill>
-                <a:latin typeface="Space Grotesk" pitchFamily="34" charset="0"/>
-                <a:ea typeface="Space Grotesk" pitchFamily="34" charset="-122"/>
-                <a:cs typeface="Space Grotesk" pitchFamily="34" charset="-120"/>
-              </a:rPr>
-              <a:t>.</a:t>
-            </a:r>
-            <a:endParaRPr lang="en-US" sz="4800" dirty="0"/>
-          </a:p>
         </p:txBody>
       </p:sp>
       <p:sp>
@@ -1974,7 +1677,7 @@
         </p:nvSpPr>
         <p:spPr>
           <a:xfrm>
-            <a:off x="777240" y="4160520"/>
+            <a:off x="777240" y="3968014"/>
             <a:ext cx="6035040" cy="1280160"/>
           </a:xfrm>
           <a:prstGeom prst="rect">
@@ -1987,7 +1690,7 @@
           <a:bodyPr wrap="square" lIns="0" tIns="0" rIns="0" bIns="0" rtlCol="0" anchor="ctr"/>
           <a:lstStyle/>
           <a:p>
-            <a:pPr indent="0" marL="0">
+            <a:pPr marL="0" indent="0">
               <a:lnSpc>
                 <a:spcPct val="145000"/>
               </a:lnSpc>
@@ -2029,6 +1732,13 @@
           </a:solidFill>
           <a:ln/>
         </p:spPr>
+        <p:txBody>
+          <a:bodyPr/>
+          <a:lstStyle/>
+          <a:p>
+            <a:endParaRPr lang="en-US"/>
+          </a:p>
+        </p:txBody>
       </p:sp>
       <p:sp>
         <p:nvSpPr>
@@ -2051,7 +1761,7 @@
           <a:bodyPr wrap="square" lIns="0" tIns="0" rIns="0" bIns="0" rtlCol="0" anchor="ctr"/>
           <a:lstStyle/>
           <a:p>
-            <a:pPr algn="ctr" indent="0" marL="0">
+            <a:pPr marL="0" indent="0" algn="ctr">
               <a:buNone/>
             </a:pPr>
             <a:r>
@@ -2094,6 +1804,13 @@
             <a:prstDash val="solid"/>
           </a:ln>
         </p:spPr>
+        <p:txBody>
+          <a:bodyPr/>
+          <a:lstStyle/>
+          <a:p>
+            <a:endParaRPr lang="en-US"/>
+          </a:p>
+        </p:txBody>
       </p:sp>
       <p:sp>
         <p:nvSpPr>
@@ -2116,7 +1833,7 @@
           <a:bodyPr wrap="square" lIns="0" tIns="0" rIns="0" bIns="0" rtlCol="0" anchor="ctr"/>
           <a:lstStyle/>
           <a:p>
-            <a:pPr algn="ctr" indent="0" marL="0">
+            <a:pPr marL="0" indent="0" algn="ctr">
               <a:buNone/>
             </a:pPr>
             <a:r>
@@ -2131,318 +1848,6 @@
               <a:t>Watch the product intro</a:t>
             </a:r>
             <a:endParaRPr lang="en-US" sz="1300" dirty="0"/>
-          </a:p>
-        </p:txBody>
-      </p:sp>
-      <p:sp>
-        <p:nvSpPr>
-          <p:cNvPr id="12" name="Shape 9"/>
-          <p:cNvSpPr/>
-          <p:nvPr/>
-        </p:nvSpPr>
-        <p:spPr>
-          <a:xfrm>
-            <a:off x="7406640" y="1371600"/>
-            <a:ext cx="4023360" cy="4297680"/>
-          </a:xfrm>
-          <a:prstGeom prst="roundRect">
-            <a:avLst>
-              <a:gd name="adj" fmla="val 3182"/>
-            </a:avLst>
-          </a:prstGeom>
-          <a:solidFill>
-            <a:srgbClr val="01142F"/>
-          </a:solidFill>
-          <a:ln w="12700">
-            <a:solidFill>
-              <a:srgbClr val="12A7B5">
-                <a:alpha val="40000"/>
-              </a:srgbClr>
-            </a:solidFill>
-            <a:prstDash val="solid"/>
-          </a:ln>
-          <a:effectLst>
-            <a:outerShdw sx="100000" sy="100000" kx="0" ky="0" algn="bl" rotWithShape="0" blurRad="228600" dist="76200" dir="5400000">
-              <a:srgbClr val="000000">
-                <a:alpha val="50000"/>
-              </a:srgbClr>
-            </a:outerShdw>
-          </a:effectLst>
-        </p:spPr>
-      </p:sp>
-      <p:sp>
-        <p:nvSpPr>
-          <p:cNvPr id="13" name="Text 10"/>
-          <p:cNvSpPr/>
-          <p:nvPr/>
-        </p:nvSpPr>
-        <p:spPr>
-          <a:xfrm>
-            <a:off x="7726680" y="1691640"/>
-            <a:ext cx="3383280" cy="3657600"/>
-          </a:xfrm>
-          <a:prstGeom prst="rect">
-            <a:avLst/>
-          </a:prstGeom>
-          <a:noFill/>
-          <a:ln/>
-        </p:spPr>
-        <p:txBody>
-          <a:bodyPr wrap="square" lIns="0" tIns="0" rIns="0" bIns="0" rtlCol="0" anchor="t"/>
-          <a:lstStyle/>
-          <a:p>
-            <a:pPr indent="0" marL="0">
-              <a:lnSpc>
-                <a:spcPct val="145000"/>
-              </a:lnSpc>
-              <a:buNone/>
-            </a:pPr>
-            <a:r>
-              <a:rPr lang="en-US" sz="1200" dirty="0">
-                <a:solidFill>
-                  <a:srgbClr val="9DB0C9"/>
-                </a:solidFill>
-                <a:latin typeface="JetBrains Mono" pitchFamily="34" charset="0"/>
-                <a:ea typeface="JetBrains Mono" pitchFamily="34" charset="-122"/>
-                <a:cs typeface="JetBrains Mono" pitchFamily="34" charset="-120"/>
-              </a:rPr>
-              <a:t># Install on any desktop or server</a:t>
-            </a:r>
-            <a:endParaRPr lang="en-US" sz="1200" dirty="0"/>
-          </a:p>
-          <a:p>
-            <a:pPr indent="0" marL="0">
-              <a:lnSpc>
-                <a:spcPct val="145000"/>
-              </a:lnSpc>
-              <a:buNone/>
-            </a:pPr>
-            <a:r>
-              <a:rPr lang="en-US" sz="1200" dirty="0">
-                <a:solidFill>
-                  <a:srgbClr val="12A7B5"/>
-                </a:solidFill>
-                <a:latin typeface="JetBrains Mono" pitchFamily="34" charset="0"/>
-                <a:ea typeface="JetBrains Mono" pitchFamily="34" charset="-122"/>
-                <a:cs typeface="JetBrains Mono" pitchFamily="34" charset="-120"/>
-              </a:rPr>
-              <a:t>$ </a:t>
-            </a:r>
-            <a:pPr indent="0" marL="0">
-              <a:lnSpc>
-                <a:spcPct val="145000"/>
-              </a:lnSpc>
-              <a:buNone/>
-            </a:pPr>
-            <a:r>
-              <a:rPr lang="en-US" sz="1200" dirty="0">
-                <a:solidFill>
-                  <a:srgbClr val="FFFFFF"/>
-                </a:solidFill>
-                <a:latin typeface="JetBrains Mono" pitchFamily="34" charset="0"/>
-                <a:ea typeface="JetBrains Mono" pitchFamily="34" charset="-122"/>
-                <a:cs typeface="JetBrains Mono" pitchFamily="34" charset="-120"/>
-              </a:rPr>
-              <a:t>curl -sSL https://get.privacypal.ai | sh</a:t>
-            </a:r>
-            <a:endParaRPr lang="en-US" sz="1200" dirty="0"/>
-          </a:p>
-          <a:p>
-            <a:pPr indent="0" marL="0">
-              <a:lnSpc>
-                <a:spcPct val="145000"/>
-              </a:lnSpc>
-              <a:buNone/>
-            </a:pPr>
-            <a:r>
-              <a:rPr lang="en-US" sz="1200" dirty="0">
-                <a:solidFill>
-                  <a:srgbClr val="9DB0C9"/>
-                </a:solidFill>
-                <a:latin typeface="JetBrains Mono" pitchFamily="34" charset="0"/>
-                <a:ea typeface="JetBrains Mono" pitchFamily="34" charset="-122"/>
-                <a:cs typeface="JetBrains Mono" pitchFamily="34" charset="-120"/>
-              </a:rPr>
-              <a:t> </a:t>
-            </a:r>
-            <a:endParaRPr lang="en-US" sz="1200" dirty="0"/>
-          </a:p>
-          <a:p>
-            <a:pPr indent="0" marL="0">
-              <a:lnSpc>
-                <a:spcPct val="145000"/>
-              </a:lnSpc>
-              <a:buNone/>
-            </a:pPr>
-            <a:r>
-              <a:rPr lang="en-US" sz="1200" dirty="0">
-                <a:solidFill>
-                  <a:srgbClr val="9DB0C9"/>
-                </a:solidFill>
-                <a:latin typeface="JetBrains Mono" pitchFamily="34" charset="0"/>
-                <a:ea typeface="JetBrains Mono" pitchFamily="34" charset="-122"/>
-                <a:cs typeface="JetBrains Mono" pitchFamily="34" charset="-120"/>
-              </a:rPr>
-              <a:t># Every AI agent on this machine is</a:t>
-            </a:r>
-            <a:endParaRPr lang="en-US" sz="1200" dirty="0"/>
-          </a:p>
-          <a:p>
-            <a:pPr indent="0" marL="0">
-              <a:lnSpc>
-                <a:spcPct val="145000"/>
-              </a:lnSpc>
-              <a:buNone/>
-            </a:pPr>
-            <a:r>
-              <a:rPr lang="en-US" sz="1200" dirty="0">
-                <a:solidFill>
-                  <a:srgbClr val="9DB0C9"/>
-                </a:solidFill>
-                <a:latin typeface="JetBrains Mono" pitchFamily="34" charset="0"/>
-                <a:ea typeface="JetBrains Mono" pitchFamily="34" charset="-122"/>
-                <a:cs typeface="JetBrains Mono" pitchFamily="34" charset="-120"/>
-              </a:rPr>
-              <a:t># now protected by PrivacyPal Cloud.</a:t>
-            </a:r>
-            <a:endParaRPr lang="en-US" sz="1200" dirty="0"/>
-          </a:p>
-          <a:p>
-            <a:pPr indent="0" marL="0">
-              <a:lnSpc>
-                <a:spcPct val="145000"/>
-              </a:lnSpc>
-              <a:buNone/>
-            </a:pPr>
-            <a:r>
-              <a:rPr lang="en-US" sz="1200" dirty="0">
-                <a:solidFill>
-                  <a:srgbClr val="9DB0C9"/>
-                </a:solidFill>
-                <a:latin typeface="JetBrains Mono" pitchFamily="34" charset="0"/>
-                <a:ea typeface="JetBrains Mono" pitchFamily="34" charset="-122"/>
-                <a:cs typeface="JetBrains Mono" pitchFamily="34" charset="-120"/>
-              </a:rPr>
-              <a:t> </a:t>
-            </a:r>
-            <a:endParaRPr lang="en-US" sz="1200" dirty="0"/>
-          </a:p>
-          <a:p>
-            <a:pPr indent="0" marL="0">
-              <a:lnSpc>
-                <a:spcPct val="145000"/>
-              </a:lnSpc>
-              <a:buNone/>
-            </a:pPr>
-            <a:r>
-              <a:rPr lang="en-US" sz="1200" dirty="0">
-                <a:solidFill>
-                  <a:srgbClr val="12A7B5"/>
-                </a:solidFill>
-                <a:latin typeface="JetBrains Mono" pitchFamily="34" charset="0"/>
-                <a:ea typeface="JetBrains Mono" pitchFamily="34" charset="-122"/>
-                <a:cs typeface="JetBrains Mono" pitchFamily="34" charset="-120"/>
-              </a:rPr>
-              <a:t>$ </a:t>
-            </a:r>
-            <a:pPr indent="0" marL="0">
-              <a:lnSpc>
-                <a:spcPct val="145000"/>
-              </a:lnSpc>
-              <a:buNone/>
-            </a:pPr>
-            <a:r>
-              <a:rPr lang="en-US" sz="1200" dirty="0">
-                <a:solidFill>
-                  <a:srgbClr val="FFFFFF"/>
-                </a:solidFill>
-                <a:latin typeface="JetBrains Mono" pitchFamily="34" charset="0"/>
-                <a:ea typeface="JetBrains Mono" pitchFamily="34" charset="-122"/>
-                <a:cs typeface="JetBrains Mono" pitchFamily="34" charset="-120"/>
-              </a:rPr>
-              <a:t>privacypal status</a:t>
-            </a:r>
-            <a:endParaRPr lang="en-US" sz="1200" dirty="0"/>
-          </a:p>
-          <a:p>
-            <a:pPr indent="0" marL="0">
-              <a:lnSpc>
-                <a:spcPct val="145000"/>
-              </a:lnSpc>
-              <a:buNone/>
-            </a:pPr>
-            <a:r>
-              <a:rPr lang="en-US" sz="1200" dirty="0">
-                <a:solidFill>
-                  <a:srgbClr val="4DA394"/>
-                </a:solidFill>
-                <a:latin typeface="JetBrains Mono" pitchFamily="34" charset="0"/>
-                <a:ea typeface="JetBrains Mono" pitchFamily="34" charset="-122"/>
-                <a:cs typeface="JetBrains Mono" pitchFamily="34" charset="-120"/>
-              </a:rPr>
-              <a:t>✓ Gateway running on 127.0.0.1:7878</a:t>
-            </a:r>
-            <a:endParaRPr lang="en-US" sz="1200" dirty="0"/>
-          </a:p>
-          <a:p>
-            <a:pPr indent="0" marL="0">
-              <a:lnSpc>
-                <a:spcPct val="145000"/>
-              </a:lnSpc>
-              <a:buNone/>
-            </a:pPr>
-            <a:r>
-              <a:rPr lang="en-US" sz="1200" dirty="0">
-                <a:solidFill>
-                  <a:srgbClr val="4DA394"/>
-                </a:solidFill>
-                <a:latin typeface="JetBrains Mono" pitchFamily="34" charset="0"/>
-                <a:ea typeface="JetBrains Mono" pitchFamily="34" charset="-122"/>
-                <a:cs typeface="JetBrains Mono" pitchFamily="34" charset="-120"/>
-              </a:rPr>
-              <a:t>✓ Watching 4 local AI processes</a:t>
-            </a:r>
-            <a:endParaRPr lang="en-US" sz="1200" dirty="0"/>
-          </a:p>
-          <a:p>
-            <a:pPr indent="0" marL="0">
-              <a:lnSpc>
-                <a:spcPct val="145000"/>
-              </a:lnSpc>
-              <a:buNone/>
-            </a:pPr>
-            <a:r>
-              <a:rPr lang="en-US" sz="1200" dirty="0">
-                <a:solidFill>
-                  <a:srgbClr val="4DA394"/>
-                </a:solidFill>
-                <a:latin typeface="JetBrains Mono" pitchFamily="34" charset="0"/>
-                <a:ea typeface="JetBrains Mono" pitchFamily="34" charset="-122"/>
-                <a:cs typeface="JetBrains Mono" pitchFamily="34" charset="-120"/>
-              </a:rPr>
-              <a:t>✓ Routing via privacypal.yourco.internal</a:t>
-            </a:r>
-            <a:endParaRPr lang="en-US" sz="1200" dirty="0"/>
-          </a:p>
-          <a:p>
-            <a:pPr indent="0" marL="0">
-              <a:lnSpc>
-                <a:spcPct val="145000"/>
-              </a:lnSpc>
-              <a:buNone/>
-            </a:pPr>
-            <a:r>
-              <a:rPr lang="en-US" sz="1200" dirty="0">
-                <a:solidFill>
-                  <a:srgbClr val="4DA394"/>
-                </a:solidFill>
-                <a:latin typeface="JetBrains Mono" pitchFamily="34" charset="0"/>
-                <a:ea typeface="JetBrains Mono" pitchFamily="34" charset="-122"/>
-                <a:cs typeface="JetBrains Mono" pitchFamily="34" charset="-120"/>
-              </a:rPr>
-              <a:t>✓ 0 prompts left this network</a:t>
-            </a:r>
-            <a:endParaRPr lang="en-US" sz="1200" dirty="0"/>
           </a:p>
         </p:txBody>
       </p:sp>
@@ -2462,6 +1867,7 @@
         <a:solidFill>
           <a:srgbClr val="01204E"/>
         </a:solidFill>
+        <a:effectLst/>
       </p:bgPr>
     </p:bg>
     <p:spTree>
@@ -2480,15 +1886,15 @@
       </p:grpSpPr>
       <p:pic>
         <p:nvPicPr>
-          <p:cNvPr id="2" name="Image 0" descr="assets/bg/bg-clinician.jpg">    </p:cNvPr>
+          <p:cNvPr id="2" name="Image 0" descr="assets/bg/bg-clinician.jpg"/>
           <p:cNvPicPr>
             <a:picLocks noChangeAspect="1"/>
           </p:cNvPicPr>
           <p:nvPr/>
         </p:nvPicPr>
         <p:blipFill>
-          <a:blip r:embed="rId1"/>
-          <a:srcRect l="0" r="0" t="0" b="0"/>
+          <a:blip r:embed="rId3"/>
+          <a:srcRect/>
           <a:stretch/>
         </p:blipFill>
         <p:spPr>
@@ -2522,6 +1928,13 @@
           </a:solidFill>
           <a:ln/>
         </p:spPr>
+        <p:txBody>
+          <a:bodyPr/>
+          <a:lstStyle/>
+          <a:p>
+            <a:endParaRPr lang="en-US"/>
+          </a:p>
+        </p:txBody>
       </p:sp>
       <p:sp>
         <p:nvSpPr>
@@ -2544,6 +1957,13 @@
           </a:solidFill>
           <a:ln/>
         </p:spPr>
+        <p:txBody>
+          <a:bodyPr/>
+          <a:lstStyle/>
+          <a:p>
+            <a:endParaRPr lang="en-US"/>
+          </a:p>
+        </p:txBody>
       </p:sp>
       <p:sp>
         <p:nvSpPr>
@@ -2564,6 +1984,13 @@
           </a:solidFill>
           <a:ln/>
         </p:spPr>
+        <p:txBody>
+          <a:bodyPr/>
+          <a:lstStyle/>
+          <a:p>
+            <a:endParaRPr lang="en-US"/>
+          </a:p>
+        </p:txBody>
       </p:sp>
       <p:sp>
         <p:nvSpPr>
@@ -2586,11 +2013,11 @@
           <a:bodyPr wrap="square" lIns="0" tIns="0" rIns="0" bIns="0" rtlCol="0" anchor="ctr"/>
           <a:lstStyle/>
           <a:p>
-            <a:pPr algn="l" indent="0" marL="0">
-              <a:buNone/>
-            </a:pPr>
-            <a:r>
-              <a:rPr lang="en-US" sz="1250" b="1" spc="300" kern="0" dirty="0">
+            <a:pPr marL="0" indent="0" algn="l">
+              <a:buNone/>
+            </a:pPr>
+            <a:r>
+              <a:rPr lang="en-US" sz="1250" b="1" kern="0" spc="300" dirty="0">
                 <a:solidFill>
                   <a:srgbClr val="12A7B5"/>
                 </a:solidFill>
@@ -2625,7 +2052,7 @@
           <a:bodyPr wrap="square" lIns="0" tIns="0" rIns="0" bIns="0" rtlCol="0" anchor="ctr"/>
           <a:lstStyle/>
           <a:p>
-            <a:pPr indent="0" marL="0">
+            <a:pPr marL="0" indent="0">
               <a:buNone/>
             </a:pPr>
             <a:r>
@@ -2664,7 +2091,7 @@
           <a:bodyPr wrap="square" lIns="0" tIns="0" rIns="0" bIns="0" rtlCol="0" anchor="ctr"/>
           <a:lstStyle/>
           <a:p>
-            <a:pPr indent="0" marL="0">
+            <a:pPr marL="0" indent="0">
               <a:lnSpc>
                 <a:spcPct val="115000"/>
               </a:lnSpc>
@@ -2706,7 +2133,7 @@
           <a:bodyPr wrap="square" lIns="0" tIns="0" rIns="0" bIns="0" rtlCol="0" anchor="ctr"/>
           <a:lstStyle/>
           <a:p>
-            <a:pPr indent="0" marL="0">
+            <a:pPr marL="0" indent="0">
               <a:buNone/>
             </a:pPr>
             <a:r>
@@ -2748,6 +2175,13 @@
             <a:prstDash val="solid"/>
           </a:ln>
         </p:spPr>
+        <p:txBody>
+          <a:bodyPr/>
+          <a:lstStyle/>
+          <a:p>
+            <a:endParaRPr lang="en-US"/>
+          </a:p>
+        </p:txBody>
       </p:sp>
       <p:sp>
         <p:nvSpPr>
@@ -2770,7 +2204,7 @@
           <a:bodyPr wrap="square" lIns="0" tIns="0" rIns="0" bIns="0" rtlCol="0" anchor="ctr"/>
           <a:lstStyle/>
           <a:p>
-            <a:pPr indent="0" marL="0">
+            <a:pPr marL="0" indent="0">
               <a:buNone/>
             </a:pPr>
             <a:r>
@@ -2809,11 +2243,11 @@
           <a:bodyPr wrap="square" lIns="0" tIns="0" rIns="0" bIns="0" rtlCol="0" anchor="ctr"/>
           <a:lstStyle/>
           <a:p>
-            <a:pPr indent="0" marL="0">
-              <a:buNone/>
-            </a:pPr>
-            <a:r>
-              <a:rPr lang="en-US" sz="950" spc="100" kern="0" dirty="0">
+            <a:pPr marL="0" indent="0">
+              <a:buNone/>
+            </a:pPr>
+            <a:r>
+              <a:rPr lang="en-US" sz="950" kern="0" spc="100" dirty="0">
                 <a:solidFill>
                   <a:srgbClr val="9DB0C9"/>
                 </a:solidFill>
@@ -2848,7 +2282,7 @@
           <a:bodyPr wrap="square" lIns="0" tIns="0" rIns="0" bIns="0" rtlCol="0" anchor="ctr"/>
           <a:lstStyle/>
           <a:p>
-            <a:pPr indent="0" marL="0">
+            <a:pPr marL="0" indent="0">
               <a:buNone/>
             </a:pPr>
             <a:r>
@@ -2887,11 +2321,11 @@
           <a:bodyPr wrap="square" lIns="0" tIns="0" rIns="0" bIns="0" rtlCol="0" anchor="ctr"/>
           <a:lstStyle/>
           <a:p>
-            <a:pPr indent="0" marL="0">
-              <a:buNone/>
-            </a:pPr>
-            <a:r>
-              <a:rPr lang="en-US" sz="950" spc="100" kern="0" dirty="0">
+            <a:pPr marL="0" indent="0">
+              <a:buNone/>
+            </a:pPr>
+            <a:r>
+              <a:rPr lang="en-US" sz="950" kern="0" spc="100" dirty="0">
                 <a:solidFill>
                   <a:srgbClr val="9DB0C9"/>
                 </a:solidFill>
@@ -2926,18 +2360,25 @@
           </a:solidFill>
           <a:ln/>
         </p:spPr>
+        <p:txBody>
+          <a:bodyPr/>
+          <a:lstStyle/>
+          <a:p>
+            <a:endParaRPr lang="en-US"/>
+          </a:p>
+        </p:txBody>
       </p:sp>
       <p:pic>
         <p:nvPicPr>
-          <p:cNvPr id="16" name="Image 1" descr="preencoded.png">    </p:cNvPr>
+          <p:cNvPr id="16" name="Image 1" descr="preencoded.png"/>
           <p:cNvPicPr>
             <a:picLocks noChangeAspect="1"/>
           </p:cNvPicPr>
           <p:nvPr/>
         </p:nvPicPr>
         <p:blipFill>
-          <a:blip r:embed="rId2"/>
-          <a:srcRect l="0" r="0" t="0" b="0"/>
+          <a:blip r:embed="rId4"/>
+          <a:srcRect/>
           <a:stretch/>
         </p:blipFill>
         <p:spPr>
@@ -2971,18 +2412,25 @@
           </a:solidFill>
           <a:ln/>
         </p:spPr>
+        <p:txBody>
+          <a:bodyPr/>
+          <a:lstStyle/>
+          <a:p>
+            <a:endParaRPr lang="en-US"/>
+          </a:p>
+        </p:txBody>
       </p:sp>
       <p:pic>
         <p:nvPicPr>
-          <p:cNvPr id="18" name="Image 2" descr="preencoded.png">    </p:cNvPr>
+          <p:cNvPr id="18" name="Image 2" descr="preencoded.png"/>
           <p:cNvPicPr>
             <a:picLocks noChangeAspect="1"/>
           </p:cNvPicPr>
           <p:nvPr/>
         </p:nvPicPr>
         <p:blipFill>
-          <a:blip r:embed="rId3"/>
-          <a:srcRect l="0" r="0" t="0" b="0"/>
+          <a:blip r:embed="rId5"/>
+          <a:srcRect/>
           <a:stretch/>
         </p:blipFill>
         <p:spPr>
@@ -3016,18 +2464,25 @@
           </a:solidFill>
           <a:ln/>
         </p:spPr>
+        <p:txBody>
+          <a:bodyPr/>
+          <a:lstStyle/>
+          <a:p>
+            <a:endParaRPr lang="en-US"/>
+          </a:p>
+        </p:txBody>
       </p:sp>
       <p:pic>
         <p:nvPicPr>
-          <p:cNvPr id="20" name="Image 3" descr="preencoded.png">    </p:cNvPr>
+          <p:cNvPr id="20" name="Image 3" descr="preencoded.png"/>
           <p:cNvPicPr>
             <a:picLocks noChangeAspect="1"/>
           </p:cNvPicPr>
           <p:nvPr/>
         </p:nvPicPr>
         <p:blipFill>
-          <a:blip r:embed="rId4"/>
-          <a:srcRect l="0" r="0" t="0" b="0"/>
+          <a:blip r:embed="rId6"/>
+          <a:srcRect/>
           <a:stretch/>
         </p:blipFill>
         <p:spPr>
@@ -3042,14 +2497,14 @@
       </p:pic>
       <p:pic>
         <p:nvPicPr>
-          <p:cNvPr id="21" name="Image 4" descr="assets/pp-logo-light.png">    </p:cNvPr>
+          <p:cNvPr id="21" name="Image 4" descr="assets/pp-logo-light.png"/>
           <p:cNvPicPr>
             <a:picLocks noChangeAspect="1"/>
           </p:cNvPicPr>
           <p:nvPr/>
         </p:nvPicPr>
         <p:blipFill>
-          <a:blip r:embed="rId5"/>
+          <a:blip r:embed="rId7"/>
           <a:stretch>
             <a:fillRect/>
           </a:stretch>
@@ -3085,11 +2540,11 @@
           <a:bodyPr wrap="square" lIns="0" tIns="0" rIns="0" bIns="0" rtlCol="0" anchor="ctr"/>
           <a:lstStyle/>
           <a:p>
-            <a:pPr algn="r" indent="0" marL="0">
-              <a:buNone/>
-            </a:pPr>
-            <a:r>
-              <a:rPr lang="en-US" sz="1000" spc="200" kern="0" dirty="0">
+            <a:pPr marL="0" indent="0" algn="r">
+              <a:buNone/>
+            </a:pPr>
+            <a:r>
+              <a:rPr lang="en-US" sz="1000" kern="0" spc="200" dirty="0">
                 <a:solidFill>
                   <a:srgbClr val="9DB0C9"/>
                 </a:solidFill>
@@ -3119,6 +2574,7 @@
         <a:solidFill>
           <a:srgbClr val="01204E"/>
         </a:solidFill>
+        <a:effectLst/>
       </p:bgPr>
     </p:bg>
     <p:spTree>
@@ -3137,15 +2593,15 @@
       </p:grpSpPr>
       <p:pic>
         <p:nvPicPr>
-          <p:cNvPr id="2" name="Image 0" descr="assets/bg/bg-skyline.jpg">    </p:cNvPr>
+          <p:cNvPr id="2" name="Image 0" descr="assets/bg/bg-skyline.jpg"/>
           <p:cNvPicPr>
             <a:picLocks noChangeAspect="1"/>
           </p:cNvPicPr>
           <p:nvPr/>
         </p:nvPicPr>
         <p:blipFill>
-          <a:blip r:embed="rId1"/>
-          <a:srcRect l="0" r="0" t="0" b="0"/>
+          <a:blip r:embed="rId3"/>
+          <a:srcRect/>
           <a:stretch/>
         </p:blipFill>
         <p:spPr>
@@ -3179,6 +2635,13 @@
           </a:solidFill>
           <a:ln/>
         </p:spPr>
+        <p:txBody>
+          <a:bodyPr/>
+          <a:lstStyle/>
+          <a:p>
+            <a:endParaRPr lang="en-US"/>
+          </a:p>
+        </p:txBody>
       </p:sp>
       <p:sp>
         <p:nvSpPr>
@@ -3201,11 +2664,11 @@
           <a:bodyPr wrap="square" lIns="0" tIns="0" rIns="0" bIns="0" rtlCol="0" anchor="ctr"/>
           <a:lstStyle/>
           <a:p>
-            <a:pPr algn="ctr" indent="0" marL="0">
-              <a:buNone/>
-            </a:pPr>
-            <a:r>
-              <a:rPr lang="en-US" sz="1300" b="1" spc="300" kern="0" dirty="0">
+            <a:pPr marL="0" indent="0" algn="ctr">
+              <a:buNone/>
+            </a:pPr>
+            <a:r>
+              <a:rPr lang="en-US" sz="1300" b="1" kern="0" spc="300" dirty="0">
                 <a:solidFill>
                   <a:srgbClr val="12A7B5"/>
                 </a:solidFill>
@@ -3240,7 +2703,7 @@
           <a:bodyPr wrap="square" lIns="0" tIns="0" rIns="0" bIns="0" rtlCol="0" anchor="ctr"/>
           <a:lstStyle/>
           <a:p>
-            <a:pPr algn="ctr" indent="0" marL="0">
+            <a:pPr marL="0" indent="0" algn="ctr">
               <a:lnSpc>
                 <a:spcPct val="98000"/>
               </a:lnSpc>
@@ -3260,7 +2723,7 @@
             <a:endParaRPr lang="en-US" sz="7200" dirty="0"/>
           </a:p>
           <a:p>
-            <a:pPr algn="ctr" indent="0" marL="0">
+            <a:pPr marL="0" indent="0" algn="ctr">
               <a:lnSpc>
                 <a:spcPct val="98000"/>
               </a:lnSpc>
@@ -3302,7 +2765,7 @@
           <a:bodyPr wrap="square" lIns="0" tIns="0" rIns="0" bIns="0" rtlCol="0" anchor="ctr"/>
           <a:lstStyle/>
           <a:p>
-            <a:pPr algn="ctr" indent="0" marL="0">
+            <a:pPr marL="0" indent="0" algn="ctr">
               <a:buNone/>
             </a:pPr>
             <a:r>
@@ -3341,6 +2804,13 @@
           </a:solidFill>
           <a:ln/>
         </p:spPr>
+        <p:txBody>
+          <a:bodyPr/>
+          <a:lstStyle/>
+          <a:p>
+            <a:endParaRPr lang="en-US"/>
+          </a:p>
+        </p:txBody>
       </p:sp>
       <p:sp>
         <p:nvSpPr>
@@ -3363,7 +2833,7 @@
           <a:bodyPr wrap="square" lIns="0" tIns="0" rIns="0" bIns="0" rtlCol="0" anchor="ctr"/>
           <a:lstStyle/>
           <a:p>
-            <a:pPr algn="ctr" indent="0" marL="0">
+            <a:pPr marL="0" indent="0" algn="ctr">
               <a:buNone/>
             </a:pPr>
             <a:r>
@@ -3406,6 +2876,13 @@
             <a:prstDash val="solid"/>
           </a:ln>
         </p:spPr>
+        <p:txBody>
+          <a:bodyPr/>
+          <a:lstStyle/>
+          <a:p>
+            <a:endParaRPr lang="en-US"/>
+          </a:p>
+        </p:txBody>
       </p:sp>
       <p:sp>
         <p:nvSpPr>
@@ -3428,7 +2905,7 @@
           <a:bodyPr wrap="square" lIns="0" tIns="0" rIns="0" bIns="0" rtlCol="0" anchor="ctr"/>
           <a:lstStyle/>
           <a:p>
-            <a:pPr algn="ctr" indent="0" marL="0">
+            <a:pPr marL="0" indent="0" algn="ctr">
               <a:buNone/>
             </a:pPr>
             <a:r>
@@ -3467,11 +2944,11 @@
           <a:bodyPr wrap="square" lIns="0" tIns="0" rIns="0" bIns="0" rtlCol="0" anchor="ctr"/>
           <a:lstStyle/>
           <a:p>
-            <a:pPr algn="ctr" indent="0" marL="0">
-              <a:buNone/>
-            </a:pPr>
-            <a:r>
-              <a:rPr lang="en-US" sz="1200" spc="100" kern="0" dirty="0">
+            <a:pPr marL="0" indent="0" algn="ctr">
+              <a:buNone/>
+            </a:pPr>
+            <a:r>
+              <a:rPr lang="en-US" sz="1200" kern="0" spc="100" dirty="0">
                 <a:solidFill>
                   <a:srgbClr val="9DB0C9"/>
                 </a:solidFill>
@@ -3501,6 +2978,7 @@
         <a:solidFill>
           <a:srgbClr val="01204E"/>
         </a:solidFill>
+        <a:effectLst/>
       </p:bgPr>
     </p:bg>
     <p:spTree>
@@ -3519,15 +2997,15 @@
       </p:grpSpPr>
       <p:pic>
         <p:nvPicPr>
-          <p:cNvPr id="2" name="Image 0" descr="assets/bg/bg-server.jpg">    </p:cNvPr>
+          <p:cNvPr id="2" name="Image 0" descr="assets/bg/bg-server.jpg"/>
           <p:cNvPicPr>
             <a:picLocks noChangeAspect="1"/>
           </p:cNvPicPr>
           <p:nvPr/>
         </p:nvPicPr>
         <p:blipFill>
-          <a:blip r:embed="rId1"/>
-          <a:srcRect l="0" r="0" t="0" b="0"/>
+          <a:blip r:embed="rId3"/>
+          <a:srcRect/>
           <a:stretch/>
         </p:blipFill>
         <p:spPr>
@@ -3561,6 +3039,13 @@
           </a:solidFill>
           <a:ln/>
         </p:spPr>
+        <p:txBody>
+          <a:bodyPr/>
+          <a:lstStyle/>
+          <a:p>
+            <a:endParaRPr lang="en-US"/>
+          </a:p>
+        </p:txBody>
       </p:sp>
       <p:sp>
         <p:nvSpPr>
@@ -3583,6 +3068,13 @@
           </a:solidFill>
           <a:ln/>
         </p:spPr>
+        <p:txBody>
+          <a:bodyPr/>
+          <a:lstStyle/>
+          <a:p>
+            <a:endParaRPr lang="en-US"/>
+          </a:p>
+        </p:txBody>
       </p:sp>
       <p:sp>
         <p:nvSpPr>
@@ -3603,6 +3095,13 @@
           </a:solidFill>
           <a:ln/>
         </p:spPr>
+        <p:txBody>
+          <a:bodyPr/>
+          <a:lstStyle/>
+          <a:p>
+            <a:endParaRPr lang="en-US"/>
+          </a:p>
+        </p:txBody>
       </p:sp>
       <p:sp>
         <p:nvSpPr>
@@ -3625,11 +3124,11 @@
           <a:bodyPr wrap="square" lIns="0" tIns="0" rIns="0" bIns="0" rtlCol="0" anchor="ctr"/>
           <a:lstStyle/>
           <a:p>
-            <a:pPr algn="l" indent="0" marL="0">
-              <a:buNone/>
-            </a:pPr>
-            <a:r>
-              <a:rPr lang="en-US" sz="1250" b="1" spc="300" kern="0" dirty="0">
+            <a:pPr marL="0" indent="0" algn="l">
+              <a:buNone/>
+            </a:pPr>
+            <a:r>
+              <a:rPr lang="en-US" sz="1250" b="1" kern="0" spc="300" dirty="0">
                 <a:solidFill>
                   <a:srgbClr val="12A7B5"/>
                 </a:solidFill>
@@ -3664,7 +3163,7 @@
           <a:bodyPr wrap="square" lIns="0" tIns="0" rIns="0" bIns="0" rtlCol="0" anchor="ctr"/>
           <a:lstStyle/>
           <a:p>
-            <a:pPr indent="0" marL="0">
+            <a:pPr marL="0" indent="0">
               <a:lnSpc>
                 <a:spcPct val="100000"/>
               </a:lnSpc>
@@ -3684,7 +3183,7 @@
             <a:endParaRPr lang="en-US" sz="4000" dirty="0"/>
           </a:p>
           <a:p>
-            <a:pPr indent="0" marL="0">
+            <a:pPr marL="0" indent="0">
               <a:lnSpc>
                 <a:spcPct val="100000"/>
               </a:lnSpc>
@@ -3701,12 +3200,6 @@
               </a:rPr>
               <a:t>Your governance </a:t>
             </a:r>
-            <a:pPr indent="0" marL="0">
-              <a:lnSpc>
-                <a:spcPct val="100000"/>
-              </a:lnSpc>
-              <a:buNone/>
-            </a:pPr>
             <a:r>
               <a:rPr lang="en-US" sz="4000" b="1" dirty="0">
                 <a:solidFill>
@@ -3718,12 +3211,6 @@
               </a:rPr>
               <a:t>isn't</a:t>
             </a:r>
-            <a:pPr indent="0" marL="0">
-              <a:lnSpc>
-                <a:spcPct val="100000"/>
-              </a:lnSpc>
-              <a:buNone/>
-            </a:pPr>
             <a:r>
               <a:rPr lang="en-US" sz="4000" b="1" dirty="0">
                 <a:solidFill>
@@ -3760,7 +3247,7 @@
           <a:bodyPr wrap="square" lIns="0" tIns="0" rIns="0" bIns="0" rtlCol="0" anchor="ctr"/>
           <a:lstStyle/>
           <a:p>
-            <a:pPr indent="0" marL="0">
+            <a:pPr marL="0" indent="0">
               <a:buNone/>
             </a:pPr>
             <a:r>
@@ -3799,7 +3286,7 @@
           <a:bodyPr wrap="square" lIns="0" tIns="0" rIns="0" bIns="0" rtlCol="0" anchor="ctr"/>
           <a:lstStyle/>
           <a:p>
-            <a:pPr indent="0" marL="0">
+            <a:pPr marL="0" indent="0">
               <a:buNone/>
             </a:pPr>
             <a:r>
@@ -3838,7 +3325,7 @@
           <a:bodyPr wrap="square" lIns="0" tIns="0" rIns="0" bIns="0" rtlCol="0" anchor="ctr"/>
           <a:lstStyle/>
           <a:p>
-            <a:pPr indent="0" marL="0">
+            <a:pPr marL="0" indent="0">
               <a:lnSpc>
                 <a:spcPct val="125000"/>
               </a:lnSpc>
@@ -3880,7 +3367,7 @@
           <a:bodyPr wrap="square" lIns="0" tIns="0" rIns="0" bIns="0" rtlCol="0" anchor="ctr"/>
           <a:lstStyle/>
           <a:p>
-            <a:pPr indent="0" marL="0">
+            <a:pPr marL="0" indent="0">
               <a:buNone/>
             </a:pPr>
             <a:r>
@@ -3919,7 +3406,7 @@
           <a:bodyPr wrap="square" lIns="0" tIns="0" rIns="0" bIns="0" rtlCol="0" anchor="ctr"/>
           <a:lstStyle/>
           <a:p>
-            <a:pPr indent="0" marL="0">
+            <a:pPr marL="0" indent="0">
               <a:buNone/>
             </a:pPr>
             <a:r>
@@ -3958,7 +3445,7 @@
           <a:bodyPr wrap="square" lIns="0" tIns="0" rIns="0" bIns="0" rtlCol="0" anchor="ctr"/>
           <a:lstStyle/>
           <a:p>
-            <a:pPr indent="0" marL="0">
+            <a:pPr marL="0" indent="0">
               <a:lnSpc>
                 <a:spcPct val="125000"/>
               </a:lnSpc>
@@ -4000,7 +3487,7 @@
           <a:bodyPr wrap="square" lIns="0" tIns="0" rIns="0" bIns="0" rtlCol="0" anchor="ctr"/>
           <a:lstStyle/>
           <a:p>
-            <a:pPr indent="0" marL="0">
+            <a:pPr marL="0" indent="0">
               <a:buNone/>
             </a:pPr>
             <a:r>
@@ -4039,7 +3526,7 @@
           <a:bodyPr wrap="square" lIns="0" tIns="0" rIns="0" bIns="0" rtlCol="0" anchor="ctr"/>
           <a:lstStyle/>
           <a:p>
-            <a:pPr indent="0" marL="0">
+            <a:pPr marL="0" indent="0">
               <a:buNone/>
             </a:pPr>
             <a:r>
@@ -4078,7 +3565,7 @@
           <a:bodyPr wrap="square" lIns="0" tIns="0" rIns="0" bIns="0" rtlCol="0" anchor="ctr"/>
           <a:lstStyle/>
           <a:p>
-            <a:pPr indent="0" marL="0">
+            <a:pPr marL="0" indent="0">
               <a:lnSpc>
                 <a:spcPct val="125000"/>
               </a:lnSpc>
@@ -4120,7 +3607,7 @@
           <a:bodyPr wrap="square" lIns="0" tIns="0" rIns="0" bIns="0" rtlCol="0" anchor="ctr"/>
           <a:lstStyle/>
           <a:p>
-            <a:pPr indent="0" marL="0">
+            <a:pPr marL="0" indent="0">
               <a:buNone/>
             </a:pPr>
             <a:r>
@@ -4134,9 +3621,6 @@
               </a:rPr>
               <a:t>Stop blocking AI. </a:t>
             </a:r>
-            <a:pPr indent="0" marL="0">
-              <a:buNone/>
-            </a:pPr>
             <a:r>
               <a:rPr lang="en-US" sz="2600" b="1" dirty="0">
                 <a:solidFill>
@@ -4154,14 +3638,14 @@
       </p:sp>
       <p:pic>
         <p:nvPicPr>
-          <p:cNvPr id="18" name="Image 1" descr="assets/pp-logo-light.png">    </p:cNvPr>
+          <p:cNvPr id="18" name="Image 1" descr="assets/pp-logo-light.png"/>
           <p:cNvPicPr>
             <a:picLocks noChangeAspect="1"/>
           </p:cNvPicPr>
           <p:nvPr/>
         </p:nvPicPr>
         <p:blipFill>
-          <a:blip r:embed="rId2"/>
+          <a:blip r:embed="rId4"/>
           <a:stretch>
             <a:fillRect/>
           </a:stretch>
@@ -4197,11 +3681,11 @@
           <a:bodyPr wrap="square" lIns="0" tIns="0" rIns="0" bIns="0" rtlCol="0" anchor="ctr"/>
           <a:lstStyle/>
           <a:p>
-            <a:pPr algn="r" indent="0" marL="0">
-              <a:buNone/>
-            </a:pPr>
-            <a:r>
-              <a:rPr lang="en-US" sz="1000" spc="200" kern="0" dirty="0">
+            <a:pPr marL="0" indent="0" algn="r">
+              <a:buNone/>
+            </a:pPr>
+            <a:r>
+              <a:rPr lang="en-US" sz="1000" kern="0" spc="200" dirty="0">
                 <a:solidFill>
                   <a:srgbClr val="9DB0C9"/>
                 </a:solidFill>
@@ -4231,6 +3715,7 @@
         <a:solidFill>
           <a:srgbClr val="01204E"/>
         </a:solidFill>
+        <a:effectLst/>
       </p:bgPr>
     </p:bg>
     <p:spTree>
@@ -4266,6 +3751,13 @@
           </a:solidFill>
           <a:ln/>
         </p:spPr>
+        <p:txBody>
+          <a:bodyPr/>
+          <a:lstStyle/>
+          <a:p>
+            <a:endParaRPr lang="en-US"/>
+          </a:p>
+        </p:txBody>
       </p:sp>
       <p:sp>
         <p:nvSpPr>
@@ -4288,11 +3780,11 @@
           <a:bodyPr wrap="square" lIns="0" tIns="0" rIns="0" bIns="0" rtlCol="0" anchor="ctr"/>
           <a:lstStyle/>
           <a:p>
-            <a:pPr algn="l" indent="0" marL="0">
-              <a:buNone/>
-            </a:pPr>
-            <a:r>
-              <a:rPr lang="en-US" sz="1250" b="1" spc="300" kern="0" dirty="0">
+            <a:pPr marL="0" indent="0" algn="l">
+              <a:buNone/>
+            </a:pPr>
+            <a:r>
+              <a:rPr lang="en-US" sz="1250" b="1" kern="0" spc="300" dirty="0">
                 <a:solidFill>
                   <a:srgbClr val="12A7B5"/>
                 </a:solidFill>
@@ -4327,7 +3819,7 @@
           <a:bodyPr wrap="square" lIns="0" tIns="0" rIns="0" bIns="0" rtlCol="0" anchor="ctr"/>
           <a:lstStyle/>
           <a:p>
-            <a:pPr indent="0" marL="0">
+            <a:pPr marL="0" indent="0">
               <a:lnSpc>
                 <a:spcPct val="100000"/>
               </a:lnSpc>
@@ -4350,483 +3842,272 @@
       </p:sp>
       <p:sp>
         <p:nvSpPr>
-          <p:cNvPr id="5" name="Shape 3"/>
-          <p:cNvSpPr/>
-          <p:nvPr/>
-        </p:nvSpPr>
-        <p:spPr>
-          <a:xfrm>
-            <a:off x="777240" y="2606040"/>
-            <a:ext cx="5120640" cy="2834640"/>
+          <p:cNvPr id="15" name="Text 13"/>
+          <p:cNvSpPr/>
+          <p:nvPr/>
+        </p:nvSpPr>
+        <p:spPr>
+          <a:xfrm>
+            <a:off x="762000" y="3004529"/>
+            <a:ext cx="5232534" cy="457200"/>
+          </a:xfrm>
+          <a:prstGeom prst="rect">
+            <a:avLst/>
+          </a:prstGeom>
+          <a:noFill/>
+          <a:ln/>
+        </p:spPr>
+        <p:txBody>
+          <a:bodyPr wrap="square" lIns="0" tIns="0" rIns="0" bIns="0" rtlCol="0" anchor="ctr"/>
+          <a:lstStyle/>
+          <a:p>
+            <a:pPr marL="0" indent="0">
+              <a:buNone/>
+            </a:pPr>
+            <a:r>
+              <a:rPr lang="en-US" sz="2000" b="1" dirty="0">
+                <a:solidFill>
+                  <a:srgbClr val="FFFFFF"/>
+                </a:solidFill>
+                <a:latin typeface="Space Grotesk" pitchFamily="34" charset="0"/>
+                <a:ea typeface="Space Grotesk" pitchFamily="34" charset="-122"/>
+                <a:cs typeface="Space Grotesk" pitchFamily="34" charset="-120"/>
+              </a:rPr>
+              <a:t>One layer. Every AI, every endpoint, every data store — </a:t>
+            </a:r>
+            <a:r>
+              <a:rPr lang="en-US" sz="2000" b="1" dirty="0">
+                <a:solidFill>
+                  <a:srgbClr val="12A7B5"/>
+                </a:solidFill>
+                <a:latin typeface="Space Grotesk" pitchFamily="34" charset="0"/>
+                <a:ea typeface="Space Grotesk" pitchFamily="34" charset="-122"/>
+                <a:cs typeface="Space Grotesk" pitchFamily="34" charset="-120"/>
+              </a:rPr>
+              <a:t>governed and enabled.</a:t>
+            </a:r>
+            <a:endParaRPr lang="en-US" sz="2000" dirty="0"/>
+          </a:p>
+        </p:txBody>
+      </p:sp>
+      <p:pic>
+        <p:nvPicPr>
+          <p:cNvPr id="16" name="Image 0" descr="assets/pp-logo-light.png"/>
+          <p:cNvPicPr>
+            <a:picLocks noChangeAspect="1"/>
+          </p:cNvPicPr>
+          <p:nvPr/>
+        </p:nvPicPr>
+        <p:blipFill>
+          <a:blip r:embed="rId3"/>
+          <a:stretch>
+            <a:fillRect/>
+          </a:stretch>
+        </p:blipFill>
+        <p:spPr>
+          <a:xfrm>
+            <a:off x="777240" y="6419088"/>
+            <a:ext cx="841248" cy="233026"/>
+          </a:xfrm>
+          <a:prstGeom prst="rect">
+            <a:avLst/>
+          </a:prstGeom>
+        </p:spPr>
+      </p:pic>
+      <p:sp>
+        <p:nvSpPr>
+          <p:cNvPr id="17" name="Text 14"/>
+          <p:cNvSpPr/>
+          <p:nvPr/>
+        </p:nvSpPr>
+        <p:spPr>
+          <a:xfrm>
+            <a:off x="10317175" y="6382512"/>
+            <a:ext cx="1097280" cy="274320"/>
+          </a:xfrm>
+          <a:prstGeom prst="rect">
+            <a:avLst/>
+          </a:prstGeom>
+          <a:noFill/>
+          <a:ln/>
+        </p:spPr>
+        <p:txBody>
+          <a:bodyPr wrap="square" lIns="0" tIns="0" rIns="0" bIns="0" rtlCol="0" anchor="ctr"/>
+          <a:lstStyle/>
+          <a:p>
+            <a:pPr marL="0" indent="0" algn="r">
+              <a:buNone/>
+            </a:pPr>
+            <a:r>
+              <a:rPr lang="en-US" sz="1000" kern="0" spc="200" dirty="0">
+                <a:solidFill>
+                  <a:srgbClr val="9DB0C9"/>
+                </a:solidFill>
+                <a:latin typeface="JetBrains Mono" pitchFamily="34" charset="0"/>
+                <a:ea typeface="JetBrains Mono" pitchFamily="34" charset="-122"/>
+                <a:cs typeface="JetBrains Mono" pitchFamily="34" charset="-120"/>
+              </a:rPr>
+              <a:t>03 / 11</a:t>
+            </a:r>
+            <a:endParaRPr lang="en-US" sz="1000" dirty="0"/>
+          </a:p>
+        </p:txBody>
+      </p:sp>
+      <p:sp>
+        <p:nvSpPr>
+          <p:cNvPr id="18" name="Shape 9">
+            <a:extLst>
+              <a:ext uri="{FF2B5EF4-FFF2-40B4-BE49-F238E27FC236}">
+                <a16:creationId xmlns:a16="http://schemas.microsoft.com/office/drawing/2014/main" id="{3F55C2CE-D8EF-5BE6-FDE4-CE9504DC3B0B}"/>
+              </a:ext>
+            </a:extLst>
+          </p:cNvPr>
+          <p:cNvSpPr/>
+          <p:nvPr/>
+        </p:nvSpPr>
+        <p:spPr>
+          <a:xfrm>
+            <a:off x="6486224" y="1920240"/>
+            <a:ext cx="4023360" cy="4297680"/>
           </a:xfrm>
           <a:prstGeom prst="roundRect">
             <a:avLst>
-              <a:gd name="adj" fmla="val 4516"/>
+              <a:gd name="adj" fmla="val 3182"/>
             </a:avLst>
           </a:prstGeom>
           <a:solidFill>
-            <a:srgbClr val="0A2C5E"/>
+            <a:srgbClr val="01142F"/>
           </a:solidFill>
           <a:ln w="12700">
             <a:solidFill>
-              <a:srgbClr val="FFFFFF">
-                <a:alpha val="14000"/>
+              <a:srgbClr val="12A7B5">
+                <a:alpha val="40000"/>
               </a:srgbClr>
             </a:solidFill>
             <a:prstDash val="solid"/>
           </a:ln>
-        </p:spPr>
-      </p:sp>
-      <p:sp>
-        <p:nvSpPr>
-          <p:cNvPr id="6" name="Text 4"/>
-          <p:cNvSpPr/>
-          <p:nvPr/>
-        </p:nvSpPr>
-        <p:spPr>
-          <a:xfrm>
-            <a:off x="1097280" y="2898648"/>
-            <a:ext cx="4480560" cy="274320"/>
-          </a:xfrm>
-          <a:prstGeom prst="rect">
-            <a:avLst/>
-          </a:prstGeom>
-          <a:noFill/>
-          <a:ln/>
-        </p:spPr>
-        <p:txBody>
-          <a:bodyPr wrap="square" lIns="0" tIns="0" rIns="0" bIns="0" rtlCol="0" anchor="ctr"/>
-          <a:lstStyle/>
-          <a:p>
-            <a:pPr indent="0" marL="0">
-              <a:buNone/>
-            </a:pPr>
-            <a:r>
-              <a:rPr lang="en-US" sz="1100" b="1" spc="150" kern="0" dirty="0">
-                <a:solidFill>
-                  <a:srgbClr val="12A7B5"/>
+          <a:effectLst>
+            <a:outerShdw blurRad="228600" dist="76200" dir="5400000" algn="bl" rotWithShape="0">
+              <a:srgbClr val="000000">
+                <a:alpha val="50000"/>
+              </a:srgbClr>
+            </a:outerShdw>
+          </a:effectLst>
+        </p:spPr>
+        <p:txBody>
+          <a:bodyPr/>
+          <a:lstStyle/>
+          <a:p>
+            <a:endParaRPr lang="en-US"/>
+          </a:p>
+        </p:txBody>
+      </p:sp>
+      <p:sp>
+        <p:nvSpPr>
+          <p:cNvPr id="19" name="Text 10">
+            <a:extLst>
+              <a:ext uri="{FF2B5EF4-FFF2-40B4-BE49-F238E27FC236}">
+                <a16:creationId xmlns:a16="http://schemas.microsoft.com/office/drawing/2014/main" id="{7C883B50-681D-840C-195B-FAD68C0F057B}"/>
+              </a:ext>
+            </a:extLst>
+          </p:cNvPr>
+          <p:cNvSpPr/>
+          <p:nvPr/>
+        </p:nvSpPr>
+        <p:spPr>
+          <a:xfrm>
+            <a:off x="6806264" y="2240280"/>
+            <a:ext cx="3383280" cy="3657600"/>
+          </a:xfrm>
+          <a:prstGeom prst="rect">
+            <a:avLst/>
+          </a:prstGeom>
+          <a:noFill/>
+          <a:ln/>
+        </p:spPr>
+        <p:txBody>
+          <a:bodyPr wrap="square" lIns="0" tIns="0" rIns="0" bIns="0" rtlCol="0" anchor="t"/>
+          <a:lstStyle/>
+          <a:p>
+            <a:pPr marL="0" indent="0">
+              <a:lnSpc>
+                <a:spcPct val="145000"/>
+              </a:lnSpc>
+              <a:buNone/>
+            </a:pPr>
+            <a:r>
+              <a:rPr lang="en-US" sz="1200" dirty="0">
+                <a:solidFill>
+                  <a:srgbClr val="9DB0C9"/>
                 </a:solidFill>
                 <a:latin typeface="JetBrains Mono" pitchFamily="34" charset="0"/>
                 <a:ea typeface="JetBrains Mono" pitchFamily="34" charset="-122"/>
                 <a:cs typeface="JetBrains Mono" pitchFamily="34" charset="-120"/>
               </a:rPr>
-              <a:t>DATA IN MOTION · GATEWAY</a:t>
-            </a:r>
-            <a:endParaRPr lang="en-US" sz="1100" dirty="0"/>
-          </a:p>
-        </p:txBody>
-      </p:sp>
-      <p:sp>
-        <p:nvSpPr>
-          <p:cNvPr id="7" name="Text 5"/>
-          <p:cNvSpPr/>
-          <p:nvPr/>
-        </p:nvSpPr>
-        <p:spPr>
-          <a:xfrm>
-            <a:off x="1097280" y="3209544"/>
-            <a:ext cx="4480560" cy="548640"/>
-          </a:xfrm>
-          <a:prstGeom prst="rect">
-            <a:avLst/>
-          </a:prstGeom>
-          <a:noFill/>
-          <a:ln/>
-        </p:spPr>
-        <p:txBody>
-          <a:bodyPr wrap="square" lIns="0" tIns="0" rIns="0" bIns="0" rtlCol="0" anchor="ctr"/>
-          <a:lstStyle/>
-          <a:p>
-            <a:pPr indent="0" marL="0">
-              <a:buNone/>
-            </a:pPr>
-            <a:r>
-              <a:rPr lang="en-US" sz="2400" b="1" dirty="0">
-                <a:solidFill>
-                  <a:srgbClr val="FFFFFF"/>
-                </a:solidFill>
-                <a:latin typeface="Space Grotesk" pitchFamily="34" charset="0"/>
-                <a:ea typeface="Space Grotesk" pitchFamily="34" charset="-122"/>
-                <a:cs typeface="Space Grotesk" pitchFamily="34" charset="-120"/>
-              </a:rPr>
-              <a:t>Govern every AI request</a:t>
-            </a:r>
-            <a:endParaRPr lang="en-US" sz="2400" dirty="0"/>
-          </a:p>
-        </p:txBody>
-      </p:sp>
-      <p:sp>
-        <p:nvSpPr>
-          <p:cNvPr id="8" name="Text 6"/>
-          <p:cNvSpPr/>
-          <p:nvPr/>
-        </p:nvSpPr>
-        <p:spPr>
-          <a:xfrm>
-            <a:off x="1097280" y="3840480"/>
-            <a:ext cx="4480560" cy="1005840"/>
-          </a:xfrm>
-          <a:prstGeom prst="rect">
-            <a:avLst/>
-          </a:prstGeom>
-          <a:noFill/>
-          <a:ln/>
-        </p:spPr>
-        <p:txBody>
-          <a:bodyPr wrap="square" lIns="0" tIns="0" rIns="0" bIns="0" rtlCol="0" anchor="ctr"/>
-          <a:lstStyle/>
-          <a:p>
-            <a:pPr indent="0" marL="0">
+              <a:t># Install on any desktop or server</a:t>
+            </a:r>
+            <a:endParaRPr lang="en-US" sz="1200" dirty="0"/>
+          </a:p>
+          <a:p>
+            <a:pPr marL="0" indent="0">
               <a:lnSpc>
-                <a:spcPct val="140000"/>
+                <a:spcPct val="145000"/>
               </a:lnSpc>
               <a:buNone/>
             </a:pPr>
             <a:r>
-              <a:rPr lang="en-US" sz="1350" dirty="0">
-                <a:solidFill>
-                  <a:srgbClr val="9DB0C9"/>
-                </a:solidFill>
-                <a:latin typeface="Inter" pitchFamily="34" charset="0"/>
-                <a:ea typeface="Inter" pitchFamily="34" charset="-122"/>
-                <a:cs typeface="Inter" pitchFamily="34" charset="-120"/>
-              </a:rPr>
-              <a:t>Installs at the network edge and intercepts AI traffic with zero code changes. Sensitive values are swapped for Privacy Twins on the way out and restored on return — provider-agnostic, streaming-safe.</a:t>
-            </a:r>
-            <a:endParaRPr lang="en-US" sz="1350" dirty="0"/>
-          </a:p>
-        </p:txBody>
-      </p:sp>
-      <p:sp>
-        <p:nvSpPr>
-          <p:cNvPr id="9" name="Text 7"/>
-          <p:cNvSpPr/>
-          <p:nvPr/>
-        </p:nvSpPr>
-        <p:spPr>
-          <a:xfrm>
-            <a:off x="1097280" y="4937760"/>
-            <a:ext cx="4480560" cy="365760"/>
-          </a:xfrm>
-          <a:prstGeom prst="rect">
-            <a:avLst/>
-          </a:prstGeom>
-          <a:noFill/>
-          <a:ln/>
-        </p:spPr>
-        <p:txBody>
-          <a:bodyPr wrap="square" lIns="0" tIns="0" rIns="0" bIns="0" rtlCol="0" anchor="ctr"/>
-          <a:lstStyle/>
-          <a:p>
-            <a:pPr indent="0" marL="0">
-              <a:buNone/>
-            </a:pPr>
-            <a:r>
-              <a:rPr lang="en-US" sz="1050" spc="50" kern="0" dirty="0">
-                <a:solidFill>
-                  <a:srgbClr val="FFFFFF"/>
+              <a:rPr lang="en-US" sz="1200" dirty="0">
+                <a:solidFill>
+                  <a:srgbClr val="12A7B5"/>
                 </a:solidFill>
                 <a:latin typeface="JetBrains Mono" pitchFamily="34" charset="0"/>
                 <a:ea typeface="JetBrains Mono" pitchFamily="34" charset="-122"/>
                 <a:cs typeface="JetBrains Mono" pitchFamily="34" charset="-120"/>
               </a:rPr>
-              <a:t>OpenAI · Anthropic · Google · Mistral · Llama · Own fine-tune</a:t>
-            </a:r>
-            <a:endParaRPr lang="en-US" sz="1050" dirty="0"/>
-          </a:p>
-        </p:txBody>
-      </p:sp>
-      <p:sp>
-        <p:nvSpPr>
-          <p:cNvPr id="10" name="Shape 8"/>
-          <p:cNvSpPr/>
-          <p:nvPr/>
-        </p:nvSpPr>
-        <p:spPr>
-          <a:xfrm>
-            <a:off x="6355080" y="2606040"/>
-            <a:ext cx="5120640" cy="2834640"/>
-          </a:xfrm>
-          <a:prstGeom prst="roundRect">
-            <a:avLst>
-              <a:gd name="adj" fmla="val 4516"/>
-            </a:avLst>
-          </a:prstGeom>
-          <a:solidFill>
-            <a:srgbClr val="0A2C5E"/>
-          </a:solidFill>
-          <a:ln w="12700">
-            <a:solidFill>
-              <a:srgbClr val="FFFFFF">
-                <a:alpha val="14000"/>
-              </a:srgbClr>
-            </a:solidFill>
-            <a:prstDash val="solid"/>
-          </a:ln>
-        </p:spPr>
-      </p:sp>
-      <p:sp>
-        <p:nvSpPr>
-          <p:cNvPr id="11" name="Text 9"/>
-          <p:cNvSpPr/>
-          <p:nvPr/>
-        </p:nvSpPr>
-        <p:spPr>
-          <a:xfrm>
-            <a:off x="6675120" y="2898648"/>
-            <a:ext cx="4480560" cy="274320"/>
-          </a:xfrm>
-          <a:prstGeom prst="rect">
-            <a:avLst/>
-          </a:prstGeom>
-          <a:noFill/>
-          <a:ln/>
-        </p:spPr>
-        <p:txBody>
-          <a:bodyPr wrap="square" lIns="0" tIns="0" rIns="0" bIns="0" rtlCol="0" anchor="ctr"/>
-          <a:lstStyle/>
-          <a:p>
-            <a:pPr indent="0" marL="0">
-              <a:buNone/>
-            </a:pPr>
-            <a:r>
-              <a:rPr lang="en-US" sz="1100" b="1" spc="150" kern="0" dirty="0">
-                <a:solidFill>
-                  <a:srgbClr val="FAA968"/>
+              <a:t>$ </a:t>
+            </a:r>
+            <a:r>
+              <a:rPr lang="en-US" sz="1200" dirty="0">
+                <a:solidFill>
+                  <a:srgbClr val="FFFFFF"/>
                 </a:solidFill>
                 <a:latin typeface="JetBrains Mono" pitchFamily="34" charset="0"/>
                 <a:ea typeface="JetBrains Mono" pitchFamily="34" charset="-122"/>
                 <a:cs typeface="JetBrains Mono" pitchFamily="34" charset="-120"/>
               </a:rPr>
-              <a:t>DATA AT REST · NETWORK DSPM</a:t>
-            </a:r>
-            <a:endParaRPr lang="en-US" sz="1100" dirty="0"/>
-          </a:p>
-        </p:txBody>
-      </p:sp>
-      <p:sp>
-        <p:nvSpPr>
-          <p:cNvPr id="12" name="Text 10"/>
-          <p:cNvSpPr/>
-          <p:nvPr/>
-        </p:nvSpPr>
-        <p:spPr>
-          <a:xfrm>
-            <a:off x="6675120" y="3209544"/>
-            <a:ext cx="4480560" cy="548640"/>
-          </a:xfrm>
-          <a:prstGeom prst="rect">
-            <a:avLst/>
-          </a:prstGeom>
-          <a:noFill/>
-          <a:ln/>
-        </p:spPr>
-        <p:txBody>
-          <a:bodyPr wrap="square" lIns="0" tIns="0" rIns="0" bIns="0" rtlCol="0" anchor="ctr"/>
-          <a:lstStyle/>
-          <a:p>
-            <a:pPr indent="0" marL="0">
-              <a:buNone/>
-            </a:pPr>
-            <a:r>
-              <a:rPr lang="en-US" sz="2400" b="1" dirty="0">
-                <a:solidFill>
-                  <a:srgbClr val="FFFFFF"/>
-                </a:solidFill>
-                <a:latin typeface="Space Grotesk" pitchFamily="34" charset="0"/>
-                <a:ea typeface="Space Grotesk" pitchFamily="34" charset="-122"/>
-                <a:cs typeface="Space Grotesk" pitchFamily="34" charset="-120"/>
-              </a:rPr>
-              <a:t>Govern every data store</a:t>
-            </a:r>
-            <a:endParaRPr lang="en-US" sz="2400" dirty="0"/>
-          </a:p>
-        </p:txBody>
-      </p:sp>
-      <p:sp>
-        <p:nvSpPr>
-          <p:cNvPr id="13" name="Text 11"/>
-          <p:cNvSpPr/>
-          <p:nvPr/>
-        </p:nvSpPr>
-        <p:spPr>
-          <a:xfrm>
-            <a:off x="6675120" y="3840480"/>
-            <a:ext cx="4480560" cy="1005840"/>
-          </a:xfrm>
-          <a:prstGeom prst="rect">
-            <a:avLst/>
-          </a:prstGeom>
-          <a:noFill/>
-          <a:ln/>
-        </p:spPr>
-        <p:txBody>
-          <a:bodyPr wrap="square" lIns="0" tIns="0" rIns="0" bIns="0" rtlCol="0" anchor="ctr"/>
-          <a:lstStyle/>
-          <a:p>
-            <a:pPr indent="0" marL="0">
+              <a:t>curl -sSL https://get.privacypal.ai | sh</a:t>
+            </a:r>
+            <a:endParaRPr lang="en-US" sz="1200" dirty="0"/>
+          </a:p>
+          <a:p>
+            <a:pPr marL="0" indent="0">
               <a:lnSpc>
-                <a:spcPct val="140000"/>
+                <a:spcPct val="145000"/>
               </a:lnSpc>
               <a:buNone/>
             </a:pPr>
             <a:r>
-              <a:rPr lang="en-US" sz="1350" dirty="0">
+              <a:rPr lang="en-US" sz="1200" dirty="0">
                 <a:solidFill>
                   <a:srgbClr val="9DB0C9"/>
-                </a:solidFill>
-                <a:latin typeface="Inter" pitchFamily="34" charset="0"/>
-                <a:ea typeface="Inter" pitchFamily="34" charset="-122"/>
-                <a:cs typeface="Inter" pitchFamily="34" charset="-120"/>
-              </a:rPr>
-              <a:t>The same install continuously discovers, classifies, prioritizes and remediates sensitive data across the AI data layer — databases, lakes, RAG pipelines, vector stores and agent memory.</a:t>
-            </a:r>
-            <a:endParaRPr lang="en-US" sz="1350" dirty="0"/>
-          </a:p>
-        </p:txBody>
-      </p:sp>
-      <p:sp>
-        <p:nvSpPr>
-          <p:cNvPr id="14" name="Text 12"/>
-          <p:cNvSpPr/>
-          <p:nvPr/>
-        </p:nvSpPr>
-        <p:spPr>
-          <a:xfrm>
-            <a:off x="6675120" y="4937760"/>
-            <a:ext cx="4480560" cy="365760"/>
-          </a:xfrm>
-          <a:prstGeom prst="rect">
-            <a:avLst/>
-          </a:prstGeom>
-          <a:noFill/>
-          <a:ln/>
-        </p:spPr>
-        <p:txBody>
-          <a:bodyPr wrap="square" lIns="0" tIns="0" rIns="0" bIns="0" rtlCol="0" anchor="ctr"/>
-          <a:lstStyle/>
-          <a:p>
-            <a:pPr indent="0" marL="0">
-              <a:buNone/>
-            </a:pPr>
-            <a:r>
-              <a:rPr lang="en-US" sz="1050" spc="50" kern="0" dirty="0">
-                <a:solidFill>
-                  <a:srgbClr val="FFFFFF"/>
                 </a:solidFill>
                 <a:latin typeface="JetBrains Mono" pitchFamily="34" charset="0"/>
                 <a:ea typeface="JetBrains Mono" pitchFamily="34" charset="-122"/>
                 <a:cs typeface="JetBrains Mono" pitchFamily="34" charset="-120"/>
               </a:rPr>
-              <a:t>SQL · PostgreSQL · MongoDB · Supabase · Object · Vector/RAG</a:t>
-            </a:r>
-            <a:endParaRPr lang="en-US" sz="1050" dirty="0"/>
-          </a:p>
-        </p:txBody>
-      </p:sp>
-      <p:sp>
-        <p:nvSpPr>
-          <p:cNvPr id="15" name="Text 13"/>
-          <p:cNvSpPr/>
-          <p:nvPr/>
-        </p:nvSpPr>
-        <p:spPr>
-          <a:xfrm>
-            <a:off x="777240" y="5669280"/>
-            <a:ext cx="10515600" cy="457200"/>
-          </a:xfrm>
-          <a:prstGeom prst="rect">
-            <a:avLst/>
-          </a:prstGeom>
-          <a:noFill/>
-          <a:ln/>
-        </p:spPr>
-        <p:txBody>
-          <a:bodyPr wrap="square" lIns="0" tIns="0" rIns="0" bIns="0" rtlCol="0" anchor="ctr"/>
-          <a:lstStyle/>
-          <a:p>
-            <a:pPr indent="0" marL="0">
-              <a:buNone/>
-            </a:pPr>
-            <a:r>
-              <a:rPr lang="en-US" sz="2000" b="1" dirty="0">
-                <a:solidFill>
-                  <a:srgbClr val="FFFFFF"/>
-                </a:solidFill>
-                <a:latin typeface="Space Grotesk" pitchFamily="34" charset="0"/>
-                <a:ea typeface="Space Grotesk" pitchFamily="34" charset="-122"/>
-                <a:cs typeface="Space Grotesk" pitchFamily="34" charset="-120"/>
-              </a:rPr>
-              <a:t>One layer. Every AI, every endpoint, every data store — </a:t>
-            </a:r>
-            <a:pPr indent="0" marL="0">
-              <a:buNone/>
-            </a:pPr>
-            <a:r>
-              <a:rPr lang="en-US" sz="2000" b="1" dirty="0">
-                <a:solidFill>
-                  <a:srgbClr val="12A7B5"/>
-                </a:solidFill>
-                <a:latin typeface="Space Grotesk" pitchFamily="34" charset="0"/>
-                <a:ea typeface="Space Grotesk" pitchFamily="34" charset="-122"/>
-                <a:cs typeface="Space Grotesk" pitchFamily="34" charset="-120"/>
-              </a:rPr>
-              <a:t>governed and enabled.</a:t>
-            </a:r>
-            <a:endParaRPr lang="en-US" sz="2000" dirty="0"/>
-          </a:p>
-        </p:txBody>
-      </p:sp>
-      <p:pic>
-        <p:nvPicPr>
-          <p:cNvPr id="16" name="Image 0" descr="assets/pp-logo-light.png">    </p:cNvPr>
-          <p:cNvPicPr>
-            <a:picLocks noChangeAspect="1"/>
-          </p:cNvPicPr>
-          <p:nvPr/>
-        </p:nvPicPr>
-        <p:blipFill>
-          <a:blip r:embed="rId1"/>
-          <a:stretch>
-            <a:fillRect/>
-          </a:stretch>
-        </p:blipFill>
-        <p:spPr>
-          <a:xfrm>
-            <a:off x="777240" y="6419088"/>
-            <a:ext cx="841248" cy="233026"/>
-          </a:xfrm>
-          <a:prstGeom prst="rect">
-            <a:avLst/>
-          </a:prstGeom>
-        </p:spPr>
-      </p:pic>
-      <p:sp>
-        <p:nvSpPr>
-          <p:cNvPr id="17" name="Text 14"/>
-          <p:cNvSpPr/>
-          <p:nvPr/>
-        </p:nvSpPr>
-        <p:spPr>
-          <a:xfrm>
-            <a:off x="10317175" y="6382512"/>
-            <a:ext cx="1097280" cy="274320"/>
-          </a:xfrm>
-          <a:prstGeom prst="rect">
-            <a:avLst/>
-          </a:prstGeom>
-          <a:noFill/>
-          <a:ln/>
-        </p:spPr>
-        <p:txBody>
-          <a:bodyPr wrap="square" lIns="0" tIns="0" rIns="0" bIns="0" rtlCol="0" anchor="ctr"/>
-          <a:lstStyle/>
-          <a:p>
-            <a:pPr algn="r" indent="0" marL="0">
-              <a:buNone/>
-            </a:pPr>
-            <a:r>
-              <a:rPr lang="en-US" sz="1000" spc="200" kern="0" dirty="0">
+              <a:t> </a:t>
+            </a:r>
+            <a:endParaRPr lang="en-US" sz="1200" dirty="0"/>
+          </a:p>
+          <a:p>
+            <a:pPr marL="0" indent="0">
+              <a:lnSpc>
+                <a:spcPct val="145000"/>
+              </a:lnSpc>
+              <a:buNone/>
+            </a:pPr>
+            <a:r>
+              <a:rPr lang="en-US" sz="1200" dirty="0">
                 <a:solidFill>
                   <a:srgbClr val="9DB0C9"/>
                 </a:solidFill>
@@ -4834,9 +4115,160 @@
                 <a:ea typeface="JetBrains Mono" pitchFamily="34" charset="-122"/>
                 <a:cs typeface="JetBrains Mono" pitchFamily="34" charset="-120"/>
               </a:rPr>
-              <a:t>03 / 11</a:t>
-            </a:r>
-            <a:endParaRPr lang="en-US" sz="1000" dirty="0"/>
+              <a:t># Every AI agent on this machine is</a:t>
+            </a:r>
+            <a:endParaRPr lang="en-US" sz="1200" dirty="0"/>
+          </a:p>
+          <a:p>
+            <a:pPr marL="0" indent="0">
+              <a:lnSpc>
+                <a:spcPct val="145000"/>
+              </a:lnSpc>
+              <a:buNone/>
+            </a:pPr>
+            <a:r>
+              <a:rPr lang="en-US" sz="1200" dirty="0">
+                <a:solidFill>
+                  <a:srgbClr val="9DB0C9"/>
+                </a:solidFill>
+                <a:latin typeface="JetBrains Mono" pitchFamily="34" charset="0"/>
+                <a:ea typeface="JetBrains Mono" pitchFamily="34" charset="-122"/>
+                <a:cs typeface="JetBrains Mono" pitchFamily="34" charset="-120"/>
+              </a:rPr>
+              <a:t># now protected by PrivacyPal Cloud.</a:t>
+            </a:r>
+            <a:endParaRPr lang="en-US" sz="1200" dirty="0"/>
+          </a:p>
+          <a:p>
+            <a:pPr marL="0" indent="0">
+              <a:lnSpc>
+                <a:spcPct val="145000"/>
+              </a:lnSpc>
+              <a:buNone/>
+            </a:pPr>
+            <a:r>
+              <a:rPr lang="en-US" sz="1200" dirty="0">
+                <a:solidFill>
+                  <a:srgbClr val="9DB0C9"/>
+                </a:solidFill>
+                <a:latin typeface="JetBrains Mono" pitchFamily="34" charset="0"/>
+                <a:ea typeface="JetBrains Mono" pitchFamily="34" charset="-122"/>
+                <a:cs typeface="JetBrains Mono" pitchFamily="34" charset="-120"/>
+              </a:rPr>
+              <a:t> </a:t>
+            </a:r>
+            <a:endParaRPr lang="en-US" sz="1200" dirty="0"/>
+          </a:p>
+          <a:p>
+            <a:pPr marL="0" indent="0">
+              <a:lnSpc>
+                <a:spcPct val="145000"/>
+              </a:lnSpc>
+              <a:buNone/>
+            </a:pPr>
+            <a:r>
+              <a:rPr lang="en-US" sz="1200" dirty="0">
+                <a:solidFill>
+                  <a:srgbClr val="12A7B5"/>
+                </a:solidFill>
+                <a:latin typeface="JetBrains Mono" pitchFamily="34" charset="0"/>
+                <a:ea typeface="JetBrains Mono" pitchFamily="34" charset="-122"/>
+                <a:cs typeface="JetBrains Mono" pitchFamily="34" charset="-120"/>
+              </a:rPr>
+              <a:t>$ </a:t>
+            </a:r>
+            <a:r>
+              <a:rPr lang="en-US" sz="1200" dirty="0">
+                <a:solidFill>
+                  <a:srgbClr val="FFFFFF"/>
+                </a:solidFill>
+                <a:latin typeface="JetBrains Mono" pitchFamily="34" charset="0"/>
+                <a:ea typeface="JetBrains Mono" pitchFamily="34" charset="-122"/>
+                <a:cs typeface="JetBrains Mono" pitchFamily="34" charset="-120"/>
+              </a:rPr>
+              <a:t>privacypal status</a:t>
+            </a:r>
+            <a:endParaRPr lang="en-US" sz="1200" dirty="0"/>
+          </a:p>
+          <a:p>
+            <a:pPr marL="0" indent="0">
+              <a:lnSpc>
+                <a:spcPct val="145000"/>
+              </a:lnSpc>
+              <a:buNone/>
+            </a:pPr>
+            <a:r>
+              <a:rPr lang="en-US" sz="1200" dirty="0">
+                <a:solidFill>
+                  <a:srgbClr val="4DA394"/>
+                </a:solidFill>
+                <a:latin typeface="JetBrains Mono" pitchFamily="34" charset="0"/>
+                <a:ea typeface="JetBrains Mono" pitchFamily="34" charset="-122"/>
+                <a:cs typeface="JetBrains Mono" pitchFamily="34" charset="-120"/>
+              </a:rPr>
+              <a:t>✓ Gateway running on 127.0.0.1:7878</a:t>
+            </a:r>
+            <a:endParaRPr lang="en-US" sz="1200" dirty="0"/>
+          </a:p>
+          <a:p>
+            <a:pPr marL="0" indent="0">
+              <a:lnSpc>
+                <a:spcPct val="145000"/>
+              </a:lnSpc>
+              <a:buNone/>
+            </a:pPr>
+            <a:r>
+              <a:rPr lang="en-US" sz="1200" dirty="0">
+                <a:solidFill>
+                  <a:srgbClr val="4DA394"/>
+                </a:solidFill>
+                <a:latin typeface="JetBrains Mono" pitchFamily="34" charset="0"/>
+                <a:ea typeface="JetBrains Mono" pitchFamily="34" charset="-122"/>
+                <a:cs typeface="JetBrains Mono" pitchFamily="34" charset="-120"/>
+              </a:rPr>
+              <a:t>✓ Watching 4 local AI processes</a:t>
+            </a:r>
+            <a:endParaRPr lang="en-US" sz="1200" dirty="0"/>
+          </a:p>
+          <a:p>
+            <a:pPr marL="0" indent="0">
+              <a:lnSpc>
+                <a:spcPct val="145000"/>
+              </a:lnSpc>
+              <a:buNone/>
+            </a:pPr>
+            <a:r>
+              <a:rPr lang="en-US" sz="1200" dirty="0">
+                <a:solidFill>
+                  <a:srgbClr val="4DA394"/>
+                </a:solidFill>
+                <a:latin typeface="JetBrains Mono" pitchFamily="34" charset="0"/>
+                <a:ea typeface="JetBrains Mono" pitchFamily="34" charset="-122"/>
+                <a:cs typeface="JetBrains Mono" pitchFamily="34" charset="-120"/>
+              </a:rPr>
+              <a:t>✓ Routing via privacypal.yourco.internal</a:t>
+            </a:r>
+            <a:endParaRPr lang="en-US" sz="1200" dirty="0"/>
+          </a:p>
+          <a:p>
+            <a:pPr marL="0" indent="0">
+              <a:lnSpc>
+                <a:spcPct val="145000"/>
+              </a:lnSpc>
+              <a:buNone/>
+            </a:pPr>
+            <a:r>
+              <a:rPr lang="en-US" sz="1200" dirty="0">
+                <a:solidFill>
+                  <a:srgbClr val="4DA394"/>
+                </a:solidFill>
+                <a:latin typeface="JetBrains Mono" pitchFamily="34" charset="0"/>
+                <a:ea typeface="JetBrains Mono" pitchFamily="34" charset="-122"/>
+                <a:cs typeface="JetBrains Mono" pitchFamily="34" charset="-120"/>
+              </a:rPr>
+              <a:t>✓ 0 prompts left this network</a:t>
+            </a:r>
+            <a:endParaRPr lang="en-US" sz="1200" dirty="0"/>
           </a:p>
         </p:txBody>
       </p:sp>
@@ -4856,6 +4288,7 @@
         <a:solidFill>
           <a:srgbClr val="01204E"/>
         </a:solidFill>
+        <a:effectLst/>
       </p:bgPr>
     </p:bg>
     <p:spTree>
@@ -4891,6 +4324,13 @@
           </a:solidFill>
           <a:ln/>
         </p:spPr>
+        <p:txBody>
+          <a:bodyPr/>
+          <a:lstStyle/>
+          <a:p>
+            <a:endParaRPr lang="en-US"/>
+          </a:p>
+        </p:txBody>
       </p:sp>
       <p:sp>
         <p:nvSpPr>
@@ -4913,11 +4353,11 @@
           <a:bodyPr wrap="square" lIns="0" tIns="0" rIns="0" bIns="0" rtlCol="0" anchor="ctr"/>
           <a:lstStyle/>
           <a:p>
-            <a:pPr algn="l" indent="0" marL="0">
-              <a:buNone/>
-            </a:pPr>
-            <a:r>
-              <a:rPr lang="en-US" sz="1250" b="1" spc="300" kern="0" dirty="0">
+            <a:pPr marL="0" indent="0" algn="l">
+              <a:buNone/>
+            </a:pPr>
+            <a:r>
+              <a:rPr lang="en-US" sz="1250" b="1" kern="0" spc="300" dirty="0">
                 <a:solidFill>
                   <a:srgbClr val="12A7B5"/>
                 </a:solidFill>
@@ -4952,7 +4392,7 @@
           <a:bodyPr wrap="square" lIns="0" tIns="0" rIns="0" bIns="0" rtlCol="0" anchor="ctr"/>
           <a:lstStyle/>
           <a:p>
-            <a:pPr indent="0" marL="0">
+            <a:pPr marL="0" indent="0">
               <a:buNone/>
             </a:pPr>
             <a:r>
@@ -4978,7 +4418,7 @@
         </p:nvSpPr>
         <p:spPr>
           <a:xfrm>
-            <a:off x="777240" y="1691640"/>
+            <a:off x="777240" y="1872112"/>
             <a:ext cx="10424160" cy="731520"/>
           </a:xfrm>
           <a:prstGeom prst="rect">
@@ -4991,7 +4431,7 @@
           <a:bodyPr wrap="square" lIns="0" tIns="0" rIns="0" bIns="0" rtlCol="0" anchor="ctr"/>
           <a:lstStyle/>
           <a:p>
-            <a:pPr indent="0" marL="0">
+            <a:pPr marL="0" indent="0">
               <a:lnSpc>
                 <a:spcPct val="135000"/>
               </a:lnSpc>
@@ -5008,12 +4448,6 @@
               </a:rPr>
               <a:t>Others stop at redaction — which breaks the model's output and kills adoption. PrivacyPal substitutes a </a:t>
             </a:r>
-            <a:pPr indent="0" marL="0">
-              <a:lnSpc>
-                <a:spcPct val="135000"/>
-              </a:lnSpc>
-              <a:buNone/>
-            </a:pPr>
             <a:r>
               <a:rPr lang="en-US" sz="1450" dirty="0">
                 <a:solidFill>
@@ -5025,12 +4459,6 @@
               </a:rPr>
               <a:t>context-preserving Privacy Twin</a:t>
             </a:r>
-            <a:pPr indent="0" marL="0">
-              <a:lnSpc>
-                <a:spcPct val="135000"/>
-              </a:lnSpc>
-              <a:buNone/>
-            </a:pPr>
             <a:r>
               <a:rPr lang="en-US" sz="1450" dirty="0">
                 <a:solidFill>
@@ -5040,7 +4468,7 @@
                 <a:ea typeface="Inter" pitchFamily="34" charset="-122"/>
                 <a:cs typeface="Inter" pitchFamily="34" charset="-120"/>
               </a:rPr>
-              <a:t>, then restores the real values on the way back. The work gets done. The data never leaves.</a:t>
+              <a:t>, then restores the real values on the way back. </a:t>
             </a:r>
             <a:endParaRPr lang="en-US" sz="1450" dirty="0"/>
           </a:p>
@@ -5074,6 +4502,13 @@
             <a:prstDash val="solid"/>
           </a:ln>
         </p:spPr>
+        <p:txBody>
+          <a:bodyPr/>
+          <a:lstStyle/>
+          <a:p>
+            <a:endParaRPr lang="en-US"/>
+          </a:p>
+        </p:txBody>
       </p:sp>
       <p:sp>
         <p:nvSpPr>
@@ -5096,11 +4531,11 @@
           <a:bodyPr wrap="square" lIns="0" tIns="0" rIns="0" bIns="0" rtlCol="0" anchor="ctr"/>
           <a:lstStyle/>
           <a:p>
-            <a:pPr indent="0" marL="0">
-              <a:buNone/>
-            </a:pPr>
-            <a:r>
-              <a:rPr lang="en-US" sz="1000" b="1" spc="50" kern="0" dirty="0">
+            <a:pPr marL="0" indent="0">
+              <a:buNone/>
+            </a:pPr>
+            <a:r>
+              <a:rPr lang="en-US" sz="1000" b="1" kern="0" spc="50" dirty="0">
                 <a:solidFill>
                   <a:srgbClr val="D54751"/>
                 </a:solidFill>
@@ -5135,7 +4570,7 @@
           <a:bodyPr wrap="square" lIns="0" tIns="0" rIns="0" bIns="0" rtlCol="0" anchor="ctr"/>
           <a:lstStyle/>
           <a:p>
-            <a:pPr indent="0" marL="0">
+            <a:pPr marL="0" indent="0">
               <a:lnSpc>
                 <a:spcPct val="135000"/>
               </a:lnSpc>
@@ -5152,12 +4587,6 @@
               </a:rPr>
               <a:t>"Summarize </a:t>
             </a:r>
-            <a:pPr indent="0" marL="0">
-              <a:lnSpc>
-                <a:spcPct val="135000"/>
-              </a:lnSpc>
-              <a:buNone/>
-            </a:pPr>
             <a:r>
               <a:rPr lang="en-US" sz="1250" b="1" dirty="0">
                 <a:solidFill>
@@ -5169,12 +4598,6 @@
               </a:rPr>
               <a:t>Margaret Chen</a:t>
             </a:r>
-            <a:pPr indent="0" marL="0">
-              <a:lnSpc>
-                <a:spcPct val="135000"/>
-              </a:lnSpc>
-              <a:buNone/>
-            </a:pPr>
             <a:r>
               <a:rPr lang="en-US" sz="1250" dirty="0">
                 <a:solidFill>
@@ -5186,12 +4609,6 @@
               </a:rPr>
               <a:t>'s chart — </a:t>
             </a:r>
-            <a:pPr indent="0" marL="0">
-              <a:lnSpc>
-                <a:spcPct val="135000"/>
-              </a:lnSpc>
-              <a:buNone/>
-            </a:pPr>
             <a:r>
               <a:rPr lang="en-US" sz="1250" b="1" dirty="0">
                 <a:solidFill>
@@ -5203,12 +4620,6 @@
               </a:rPr>
               <a:t>MRN 4471-8829</a:t>
             </a:r>
-            <a:pPr indent="0" marL="0">
-              <a:lnSpc>
-                <a:spcPct val="135000"/>
-              </a:lnSpc>
-              <a:buNone/>
-            </a:pPr>
             <a:r>
               <a:rPr lang="en-US" sz="1250" dirty="0">
                 <a:solidFill>
@@ -5220,12 +4631,6 @@
               </a:rPr>
               <a:t>, admitted </a:t>
             </a:r>
-            <a:pPr indent="0" marL="0">
-              <a:lnSpc>
-                <a:spcPct val="135000"/>
-              </a:lnSpc>
-              <a:buNone/>
-            </a:pPr>
             <a:r>
               <a:rPr lang="en-US" sz="1250" b="1" dirty="0">
                 <a:solidFill>
@@ -5237,12 +4642,6 @@
               </a:rPr>
               <a:t>March 14</a:t>
             </a:r>
-            <a:pPr indent="0" marL="0">
-              <a:lnSpc>
-                <a:spcPct val="135000"/>
-              </a:lnSpc>
-              <a:buNone/>
-            </a:pPr>
             <a:r>
               <a:rPr lang="en-US" sz="1250" dirty="0">
                 <a:solidFill>
@@ -5286,6 +4685,13 @@
             <a:prstDash val="solid"/>
           </a:ln>
         </p:spPr>
+        <p:txBody>
+          <a:bodyPr/>
+          <a:lstStyle/>
+          <a:p>
+            <a:endParaRPr lang="en-US"/>
+          </a:p>
+        </p:txBody>
       </p:sp>
       <p:sp>
         <p:nvSpPr>
@@ -5308,11 +4714,11 @@
           <a:bodyPr wrap="square" lIns="0" tIns="0" rIns="0" bIns="0" rtlCol="0" anchor="ctr"/>
           <a:lstStyle/>
           <a:p>
-            <a:pPr indent="0" marL="0">
-              <a:buNone/>
-            </a:pPr>
-            <a:r>
-              <a:rPr lang="en-US" sz="1000" b="1" spc="50" kern="0" dirty="0">
+            <a:pPr marL="0" indent="0">
+              <a:buNone/>
+            </a:pPr>
+            <a:r>
+              <a:rPr lang="en-US" sz="1000" b="1" kern="0" spc="50" dirty="0">
                 <a:solidFill>
                   <a:srgbClr val="12A7B5"/>
                 </a:solidFill>
@@ -5347,7 +4753,7 @@
           <a:bodyPr wrap="square" lIns="0" tIns="0" rIns="0" bIns="0" rtlCol="0" anchor="ctr"/>
           <a:lstStyle/>
           <a:p>
-            <a:pPr indent="0" marL="0">
+            <a:pPr marL="0" indent="0">
               <a:lnSpc>
                 <a:spcPct val="135000"/>
               </a:lnSpc>
@@ -5364,12 +4770,6 @@
               </a:rPr>
               <a:t>"Summarize </a:t>
             </a:r>
-            <a:pPr indent="0" marL="0">
-              <a:lnSpc>
-                <a:spcPct val="135000"/>
-              </a:lnSpc>
-              <a:buNone/>
-            </a:pPr>
             <a:r>
               <a:rPr lang="en-US" sz="1250" b="1" dirty="0">
                 <a:solidFill>
@@ -5381,12 +4781,6 @@
               </a:rPr>
               <a:t>Nancy Grace</a:t>
             </a:r>
-            <a:pPr indent="0" marL="0">
-              <a:lnSpc>
-                <a:spcPct val="135000"/>
-              </a:lnSpc>
-              <a:buNone/>
-            </a:pPr>
             <a:r>
               <a:rPr lang="en-US" sz="1250" dirty="0">
                 <a:solidFill>
@@ -5398,12 +4792,6 @@
               </a:rPr>
               <a:t>'s chart — </a:t>
             </a:r>
-            <a:pPr indent="0" marL="0">
-              <a:lnSpc>
-                <a:spcPct val="135000"/>
-              </a:lnSpc>
-              <a:buNone/>
-            </a:pPr>
             <a:r>
               <a:rPr lang="en-US" sz="1250" b="1" dirty="0">
                 <a:solidFill>
@@ -5415,12 +4803,6 @@
               </a:rPr>
               <a:t>MRN 8826-3142</a:t>
             </a:r>
-            <a:pPr indent="0" marL="0">
-              <a:lnSpc>
-                <a:spcPct val="135000"/>
-              </a:lnSpc>
-              <a:buNone/>
-            </a:pPr>
             <a:r>
               <a:rPr lang="en-US" sz="1250" dirty="0">
                 <a:solidFill>
@@ -5432,12 +4814,6 @@
               </a:rPr>
               <a:t>, admitted </a:t>
             </a:r>
-            <a:pPr indent="0" marL="0">
-              <a:lnSpc>
-                <a:spcPct val="135000"/>
-              </a:lnSpc>
-              <a:buNone/>
-            </a:pPr>
             <a:r>
               <a:rPr lang="en-US" sz="1250" b="1" dirty="0">
                 <a:solidFill>
@@ -5449,12 +4825,6 @@
               </a:rPr>
               <a:t>April 22</a:t>
             </a:r>
-            <a:pPr indent="0" marL="0">
-              <a:lnSpc>
-                <a:spcPct val="135000"/>
-              </a:lnSpc>
-              <a:buNone/>
-            </a:pPr>
             <a:r>
               <a:rPr lang="en-US" sz="1250" dirty="0">
                 <a:solidFill>
@@ -5498,6 +4868,13 @@
             <a:prstDash val="solid"/>
           </a:ln>
         </p:spPr>
+        <p:txBody>
+          <a:bodyPr/>
+          <a:lstStyle/>
+          <a:p>
+            <a:endParaRPr lang="en-US"/>
+          </a:p>
+        </p:txBody>
       </p:sp>
       <p:sp>
         <p:nvSpPr>
@@ -5520,11 +4897,11 @@
           <a:bodyPr wrap="square" lIns="0" tIns="0" rIns="0" bIns="0" rtlCol="0" anchor="ctr"/>
           <a:lstStyle/>
           <a:p>
-            <a:pPr indent="0" marL="0">
-              <a:buNone/>
-            </a:pPr>
-            <a:r>
-              <a:rPr lang="en-US" sz="1000" b="1" spc="50" kern="0" dirty="0">
+            <a:pPr marL="0" indent="0">
+              <a:buNone/>
+            </a:pPr>
+            <a:r>
+              <a:rPr lang="en-US" sz="1000" b="1" kern="0" spc="50" dirty="0">
                 <a:solidFill>
                   <a:srgbClr val="4DA394"/>
                 </a:solidFill>
@@ -5559,7 +4936,7 @@
           <a:bodyPr wrap="square" lIns="0" tIns="0" rIns="0" bIns="0" rtlCol="0" anchor="ctr"/>
           <a:lstStyle/>
           <a:p>
-            <a:pPr indent="0" marL="0">
+            <a:pPr marL="0" indent="0">
               <a:lnSpc>
                 <a:spcPct val="135000"/>
               </a:lnSpc>
@@ -5576,12 +4953,6 @@
               </a:rPr>
               <a:t>Accurate clinical summary for </a:t>
             </a:r>
-            <a:pPr indent="0" marL="0">
-              <a:lnSpc>
-                <a:spcPct val="135000"/>
-              </a:lnSpc>
-              <a:buNone/>
-            </a:pPr>
             <a:r>
               <a:rPr lang="en-US" sz="1250" b="1" dirty="0">
                 <a:solidFill>
@@ -5593,12 +4964,6 @@
               </a:rPr>
               <a:t>Margaret Chen</a:t>
             </a:r>
-            <a:pPr indent="0" marL="0">
-              <a:lnSpc>
-                <a:spcPct val="135000"/>
-              </a:lnSpc>
-              <a:buNone/>
-            </a:pPr>
             <a:r>
               <a:rPr lang="en-US" sz="1250" dirty="0">
                 <a:solidFill>
@@ -5635,7 +5000,7 @@
           <a:bodyPr wrap="square" lIns="0" tIns="0" rIns="0" bIns="0" rtlCol="0" anchor="ctr"/>
           <a:lstStyle/>
           <a:p>
-            <a:pPr algn="ctr" indent="0" marL="0">
+            <a:pPr marL="0" indent="0" algn="ctr">
               <a:buNone/>
             </a:pPr>
             <a:r>
@@ -5674,7 +5039,7 @@
           <a:bodyPr wrap="square" lIns="0" tIns="0" rIns="0" bIns="0" rtlCol="0" anchor="ctr"/>
           <a:lstStyle/>
           <a:p>
-            <a:pPr algn="ctr" indent="0" marL="0">
+            <a:pPr marL="0" indent="0" algn="ctr">
               <a:buNone/>
             </a:pPr>
             <a:r>
@@ -5713,7 +5078,7 @@
           <a:bodyPr wrap="square" lIns="0" tIns="0" rIns="0" bIns="0" rtlCol="0" anchor="ctr"/>
           <a:lstStyle/>
           <a:p>
-            <a:pPr algn="ctr" indent="0" marL="0">
+            <a:pPr marL="0" indent="0" algn="ctr">
               <a:buNone/>
             </a:pPr>
             <a:r>
@@ -5752,7 +5117,7 @@
           <a:bodyPr wrap="square" lIns="0" tIns="0" rIns="0" bIns="0" rtlCol="0" anchor="ctr"/>
           <a:lstStyle/>
           <a:p>
-            <a:pPr algn="ctr" indent="0" marL="0">
+            <a:pPr marL="0" indent="0" algn="ctr">
               <a:buNone/>
             </a:pPr>
             <a:r>
@@ -5772,44 +5137,13 @@
       </p:sp>
       <p:sp>
         <p:nvSpPr>
-          <p:cNvPr id="19" name="Shape 17"/>
-          <p:cNvSpPr/>
-          <p:nvPr/>
-        </p:nvSpPr>
-        <p:spPr>
-          <a:xfrm>
-            <a:off x="777240" y="5166360"/>
-            <a:ext cx="2260397" cy="457200"/>
-          </a:xfrm>
-          <a:prstGeom prst="roundRect">
-            <a:avLst>
-              <a:gd name="adj" fmla="val 50000"/>
-            </a:avLst>
-          </a:prstGeom>
-          <a:solidFill>
-            <a:srgbClr val="FFFFFF">
-              <a:alpha val="8000"/>
-            </a:srgbClr>
-          </a:solidFill>
-          <a:ln w="12700">
-            <a:solidFill>
-              <a:srgbClr val="FFFFFF">
-                <a:alpha val="30000"/>
-              </a:srgbClr>
-            </a:solidFill>
-            <a:prstDash val="solid"/>
-          </a:ln>
-        </p:spPr>
-      </p:sp>
-      <p:sp>
-        <p:nvSpPr>
           <p:cNvPr id="20" name="Text 18"/>
           <p:cNvSpPr/>
           <p:nvPr/>
         </p:nvSpPr>
         <p:spPr>
           <a:xfrm>
-            <a:off x="941832" y="5166360"/>
+            <a:off x="1954987" y="5446214"/>
             <a:ext cx="1986077" cy="457200"/>
           </a:xfrm>
           <a:prstGeom prst="rect">
@@ -5822,7 +5156,7 @@
           <a:bodyPr wrap="square" lIns="0" tIns="0" rIns="0" bIns="0" rtlCol="0" anchor="ctr"/>
           <a:lstStyle/>
           <a:p>
-            <a:pPr indent="0" marL="0">
+            <a:pPr marL="0" indent="0" algn="ctr">
               <a:buNone/>
             </a:pPr>
             <a:r>
@@ -5834,11 +5168,8 @@
                 <a:ea typeface="Inter" pitchFamily="34" charset="-122"/>
                 <a:cs typeface="Inter" pitchFamily="34" charset="-120"/>
               </a:rPr>
-              <a:t>340ms  </a:t>
-            </a:r>
-            <a:pPr indent="0" marL="0">
-              <a:buNone/>
-            </a:pPr>
+              <a:t>40ms  </a:t>
+            </a:r>
             <a:r>
               <a:rPr lang="en-US" sz="1200" dirty="0">
                 <a:solidFill>
@@ -5856,57 +5187,26 @@
       </p:sp>
       <p:sp>
         <p:nvSpPr>
-          <p:cNvPr id="21" name="Shape 19"/>
-          <p:cNvSpPr/>
-          <p:nvPr/>
-        </p:nvSpPr>
-        <p:spPr>
-          <a:xfrm>
-            <a:off x="3202229" y="5166360"/>
-            <a:ext cx="2110435" cy="457200"/>
-          </a:xfrm>
-          <a:prstGeom prst="roundRect">
-            <a:avLst>
-              <a:gd name="adj" fmla="val 50000"/>
-            </a:avLst>
-          </a:prstGeom>
-          <a:solidFill>
-            <a:srgbClr val="FFFFFF">
-              <a:alpha val="8000"/>
-            </a:srgbClr>
-          </a:solidFill>
-          <a:ln w="12700">
-            <a:solidFill>
-              <a:srgbClr val="FFFFFF">
-                <a:alpha val="30000"/>
-              </a:srgbClr>
-            </a:solidFill>
-            <a:prstDash val="solid"/>
-          </a:ln>
-        </p:spPr>
-      </p:sp>
-      <p:sp>
-        <p:nvSpPr>
-          <p:cNvPr id="22" name="Text 20"/>
-          <p:cNvSpPr/>
-          <p:nvPr/>
-        </p:nvSpPr>
-        <p:spPr>
-          <a:xfrm>
-            <a:off x="3366821" y="5166360"/>
-            <a:ext cx="1836115" cy="457200"/>
-          </a:xfrm>
-          <a:prstGeom prst="rect">
-            <a:avLst/>
-          </a:prstGeom>
-          <a:noFill/>
-          <a:ln/>
-        </p:spPr>
-        <p:txBody>
-          <a:bodyPr wrap="square" lIns="0" tIns="0" rIns="0" bIns="0" rtlCol="0" anchor="ctr"/>
-          <a:lstStyle/>
-          <a:p>
-            <a:pPr indent="0" marL="0">
+          <p:cNvPr id="24" name="Text 22"/>
+          <p:cNvSpPr/>
+          <p:nvPr/>
+        </p:nvSpPr>
+        <p:spPr>
+          <a:xfrm>
+            <a:off x="4489704" y="5453433"/>
+            <a:ext cx="2660904" cy="457200"/>
+          </a:xfrm>
+          <a:prstGeom prst="rect">
+            <a:avLst/>
+          </a:prstGeom>
+          <a:noFill/>
+          <a:ln/>
+        </p:spPr>
+        <p:txBody>
+          <a:bodyPr wrap="square" lIns="0" tIns="0" rIns="0" bIns="0" rtlCol="0" anchor="ctr"/>
+          <a:lstStyle/>
+          <a:p>
+            <a:pPr marL="0" indent="0" algn="ctr">
               <a:buNone/>
             </a:pPr>
             <a:r>
@@ -5918,11 +5218,8 @@
                 <a:ea typeface="Inter" pitchFamily="34" charset="-122"/>
                 <a:cs typeface="Inter" pitchFamily="34" charset="-120"/>
               </a:rPr>
-              <a:t>0 bytes  </a:t>
-            </a:r>
-            <a:pPr indent="0" marL="0">
-              <a:buNone/>
-            </a:pPr>
+              <a:t>47  </a:t>
+            </a:r>
             <a:r>
               <a:rPr lang="en-US" sz="1200" dirty="0">
                 <a:solidFill>
@@ -5932,7 +5229,7 @@
                 <a:ea typeface="Inter" pitchFamily="34" charset="-122"/>
                 <a:cs typeface="Inter" pitchFamily="34" charset="-120"/>
               </a:rPr>
-              <a:t>to providers</a:t>
+              <a:t>PII · PHI · PCI · IP classes</a:t>
             </a:r>
             <a:endParaRPr lang="en-US" sz="1200" dirty="0"/>
           </a:p>
@@ -5940,44 +5237,13 @@
       </p:sp>
       <p:sp>
         <p:nvSpPr>
-          <p:cNvPr id="23" name="Shape 21"/>
-          <p:cNvSpPr/>
-          <p:nvPr/>
-        </p:nvSpPr>
-        <p:spPr>
-          <a:xfrm>
-            <a:off x="5477256" y="5166360"/>
-            <a:ext cx="2935224" cy="457200"/>
-          </a:xfrm>
-          <a:prstGeom prst="roundRect">
-            <a:avLst>
-              <a:gd name="adj" fmla="val 50000"/>
-            </a:avLst>
-          </a:prstGeom>
-          <a:solidFill>
-            <a:srgbClr val="FFFFFF">
-              <a:alpha val="8000"/>
-            </a:srgbClr>
-          </a:solidFill>
-          <a:ln w="12700">
-            <a:solidFill>
-              <a:srgbClr val="FFFFFF">
-                <a:alpha val="30000"/>
-              </a:srgbClr>
-            </a:solidFill>
-            <a:prstDash val="solid"/>
-          </a:ln>
-        </p:spPr>
-      </p:sp>
-      <p:sp>
-        <p:nvSpPr>
-          <p:cNvPr id="24" name="Text 22"/>
-          <p:cNvSpPr/>
-          <p:nvPr/>
-        </p:nvSpPr>
-        <p:spPr>
-          <a:xfrm>
-            <a:off x="5641848" y="5166360"/>
+          <p:cNvPr id="26" name="Text 24"/>
+          <p:cNvSpPr/>
+          <p:nvPr/>
+        </p:nvSpPr>
+        <p:spPr>
+          <a:xfrm>
+            <a:off x="7699248" y="5446214"/>
             <a:ext cx="2660904" cy="457200"/>
           </a:xfrm>
           <a:prstGeom prst="rect">
@@ -5990,7 +5256,7 @@
           <a:bodyPr wrap="square" lIns="0" tIns="0" rIns="0" bIns="0" rtlCol="0" anchor="ctr"/>
           <a:lstStyle/>
           <a:p>
-            <a:pPr indent="0" marL="0">
+            <a:pPr marL="0" indent="0" algn="ctr">
               <a:buNone/>
             </a:pPr>
             <a:r>
@@ -6002,11 +5268,8 @@
                 <a:ea typeface="Inter" pitchFamily="34" charset="-122"/>
                 <a:cs typeface="Inter" pitchFamily="34" charset="-120"/>
               </a:rPr>
-              <a:t>47  </a:t>
-            </a:r>
-            <a:pPr indent="0" marL="0">
-              <a:buNone/>
-            </a:pPr>
+              <a:t>100%  </a:t>
+            </a:r>
             <a:r>
               <a:rPr lang="en-US" sz="1200" dirty="0">
                 <a:solidFill>
@@ -6016,90 +5279,6 @@
                 <a:ea typeface="Inter" pitchFamily="34" charset="-122"/>
                 <a:cs typeface="Inter" pitchFamily="34" charset="-120"/>
               </a:rPr>
-              <a:t>PII · PHI · PCI · IP classes</a:t>
-            </a:r>
-            <a:endParaRPr lang="en-US" sz="1200" dirty="0"/>
-          </a:p>
-        </p:txBody>
-      </p:sp>
-      <p:sp>
-        <p:nvSpPr>
-          <p:cNvPr id="25" name="Shape 23"/>
-          <p:cNvSpPr/>
-          <p:nvPr/>
-        </p:nvSpPr>
-        <p:spPr>
-          <a:xfrm>
-            <a:off x="8577072" y="5166360"/>
-            <a:ext cx="2935224" cy="457200"/>
-          </a:xfrm>
-          <a:prstGeom prst="roundRect">
-            <a:avLst>
-              <a:gd name="adj" fmla="val 50000"/>
-            </a:avLst>
-          </a:prstGeom>
-          <a:solidFill>
-            <a:srgbClr val="FFFFFF">
-              <a:alpha val="8000"/>
-            </a:srgbClr>
-          </a:solidFill>
-          <a:ln w="12700">
-            <a:solidFill>
-              <a:srgbClr val="FFFFFF">
-                <a:alpha val="30000"/>
-              </a:srgbClr>
-            </a:solidFill>
-            <a:prstDash val="solid"/>
-          </a:ln>
-        </p:spPr>
-      </p:sp>
-      <p:sp>
-        <p:nvSpPr>
-          <p:cNvPr id="26" name="Text 24"/>
-          <p:cNvSpPr/>
-          <p:nvPr/>
-        </p:nvSpPr>
-        <p:spPr>
-          <a:xfrm>
-            <a:off x="8741664" y="5166360"/>
-            <a:ext cx="2660904" cy="457200"/>
-          </a:xfrm>
-          <a:prstGeom prst="rect">
-            <a:avLst/>
-          </a:prstGeom>
-          <a:noFill/>
-          <a:ln/>
-        </p:spPr>
-        <p:txBody>
-          <a:bodyPr wrap="square" lIns="0" tIns="0" rIns="0" bIns="0" rtlCol="0" anchor="ctr"/>
-          <a:lstStyle/>
-          <a:p>
-            <a:pPr indent="0" marL="0">
-              <a:buNone/>
-            </a:pPr>
-            <a:r>
-              <a:rPr lang="en-US" sz="1200" b="1" dirty="0">
-                <a:solidFill>
-                  <a:srgbClr val="12A7B5"/>
-                </a:solidFill>
-                <a:latin typeface="Inter" pitchFamily="34" charset="0"/>
-                <a:ea typeface="Inter" pitchFamily="34" charset="-122"/>
-                <a:cs typeface="Inter" pitchFamily="34" charset="-120"/>
-              </a:rPr>
-              <a:t>100%  </a:t>
-            </a:r>
-            <a:pPr indent="0" marL="0">
-              <a:buNone/>
-            </a:pPr>
-            <a:r>
-              <a:rPr lang="en-US" sz="1200" dirty="0">
-                <a:solidFill>
-                  <a:srgbClr val="FFFFFF"/>
-                </a:solidFill>
-                <a:latin typeface="Inter" pitchFamily="34" charset="0"/>
-                <a:ea typeface="Inter" pitchFamily="34" charset="-122"/>
-                <a:cs typeface="Inter" pitchFamily="34" charset="-120"/>
-              </a:rPr>
               <a:t>on-device · zero-knowledge</a:t>
             </a:r>
             <a:endParaRPr lang="en-US" sz="1200" dirty="0"/>
@@ -6108,14 +5287,14 @@
       </p:sp>
       <p:pic>
         <p:nvPicPr>
-          <p:cNvPr id="27" name="Image 0" descr="assets/pp-logo-light.png">    </p:cNvPr>
+          <p:cNvPr id="27" name="Image 0" descr="assets/pp-logo-light.png"/>
           <p:cNvPicPr>
             <a:picLocks noChangeAspect="1"/>
           </p:cNvPicPr>
           <p:nvPr/>
         </p:nvPicPr>
         <p:blipFill>
-          <a:blip r:embed="rId1"/>
+          <a:blip r:embed="rId3"/>
           <a:stretch>
             <a:fillRect/>
           </a:stretch>
@@ -6151,11 +5330,11 @@
           <a:bodyPr wrap="square" lIns="0" tIns="0" rIns="0" bIns="0" rtlCol="0" anchor="ctr"/>
           <a:lstStyle/>
           <a:p>
-            <a:pPr algn="r" indent="0" marL="0">
-              <a:buNone/>
-            </a:pPr>
-            <a:r>
-              <a:rPr lang="en-US" sz="1000" spc="200" kern="0" dirty="0">
+            <a:pPr marL="0" indent="0" algn="r">
+              <a:buNone/>
+            </a:pPr>
+            <a:r>
+              <a:rPr lang="en-US" sz="1000" kern="0" spc="200" dirty="0">
                 <a:solidFill>
                   <a:srgbClr val="9DB0C9"/>
                 </a:solidFill>
@@ -6166,6 +5345,50 @@
               <a:t>04 / 11</a:t>
             </a:r>
             <a:endParaRPr lang="en-US" sz="1000" dirty="0"/>
+          </a:p>
+        </p:txBody>
+      </p:sp>
+      <p:sp>
+        <p:nvSpPr>
+          <p:cNvPr id="30" name="TextBox 29">
+            <a:extLst>
+              <a:ext uri="{FF2B5EF4-FFF2-40B4-BE49-F238E27FC236}">
+                <a16:creationId xmlns:a16="http://schemas.microsoft.com/office/drawing/2014/main" id="{1E3EEDFE-B364-EF02-CDA7-35FDEDECE701}"/>
+              </a:ext>
+            </a:extLst>
+          </p:cNvPr>
+          <p:cNvSpPr txBox="1"/>
+          <p:nvPr/>
+        </p:nvSpPr>
+        <p:spPr>
+          <a:xfrm>
+            <a:off x="3242571" y="4855982"/>
+            <a:ext cx="6097002" cy="369332"/>
+          </a:xfrm>
+          <a:prstGeom prst="rect">
+            <a:avLst/>
+          </a:prstGeom>
+          <a:noFill/>
+        </p:spPr>
+        <p:txBody>
+          <a:bodyPr wrap="square">
+            <a:spAutoFit/>
+          </a:bodyPr>
+          <a:lstStyle/>
+          <a:p>
+            <a:pPr algn="ctr"/>
+            <a:r>
+              <a:rPr lang="en-US" sz="1800" dirty="0">
+                <a:solidFill>
+                  <a:srgbClr val="FFFFFF"/>
+                </a:solidFill>
+                <a:latin typeface="Inter" pitchFamily="34" charset="0"/>
+                <a:ea typeface="Inter" pitchFamily="34" charset="-122"/>
+                <a:cs typeface="Inter" pitchFamily="34" charset="-120"/>
+              </a:rPr>
+              <a:t>The work gets done. The data never leaves.</a:t>
+            </a:r>
+            <a:endParaRPr lang="en-US" dirty="0"/>
           </a:p>
         </p:txBody>
       </p:sp>
@@ -6185,6 +5408,7 @@
         <a:solidFill>
           <a:srgbClr val="01204E"/>
         </a:solidFill>
+        <a:effectLst/>
       </p:bgPr>
     </p:bg>
     <p:spTree>
@@ -6220,6 +5444,13 @@
           </a:solidFill>
           <a:ln/>
         </p:spPr>
+        <p:txBody>
+          <a:bodyPr/>
+          <a:lstStyle/>
+          <a:p>
+            <a:endParaRPr lang="en-US"/>
+          </a:p>
+        </p:txBody>
       </p:sp>
       <p:sp>
         <p:nvSpPr>
@@ -6242,11 +5473,11 @@
           <a:bodyPr wrap="square" lIns="0" tIns="0" rIns="0" bIns="0" rtlCol="0" anchor="ctr"/>
           <a:lstStyle/>
           <a:p>
-            <a:pPr algn="l" indent="0" marL="0">
-              <a:buNone/>
-            </a:pPr>
-            <a:r>
-              <a:rPr lang="en-US" sz="1250" b="1" spc="300" kern="0" dirty="0">
+            <a:pPr marL="0" indent="0" algn="l">
+              <a:buNone/>
+            </a:pPr>
+            <a:r>
+              <a:rPr lang="en-US" sz="1250" b="1" kern="0" spc="300" dirty="0">
                 <a:solidFill>
                   <a:srgbClr val="12A7B5"/>
                 </a:solidFill>
@@ -6281,7 +5512,7 @@
           <a:bodyPr wrap="square" lIns="0" tIns="0" rIns="0" bIns="0" rtlCol="0" anchor="ctr"/>
           <a:lstStyle/>
           <a:p>
-            <a:pPr indent="0" marL="0">
+            <a:pPr marL="0" indent="0">
               <a:buNone/>
             </a:pPr>
             <a:r>
@@ -6298,35 +5529,6 @@
             <a:endParaRPr lang="en-US" sz="3200" dirty="0"/>
           </a:p>
         </p:txBody>
-      </p:sp>
-      <p:sp>
-        <p:nvSpPr>
-          <p:cNvPr id="5" name="Shape 3"/>
-          <p:cNvSpPr/>
-          <p:nvPr/>
-        </p:nvSpPr>
-        <p:spPr>
-          <a:xfrm>
-            <a:off x="777240" y="1783080"/>
-            <a:ext cx="3383280" cy="2103120"/>
-          </a:xfrm>
-          <a:prstGeom prst="roundRect">
-            <a:avLst>
-              <a:gd name="adj" fmla="val 6087"/>
-            </a:avLst>
-          </a:prstGeom>
-          <a:solidFill>
-            <a:srgbClr val="0A2C5E"/>
-          </a:solidFill>
-          <a:ln w="12700">
-            <a:solidFill>
-              <a:srgbClr val="FFFFFF">
-                <a:alpha val="14000"/>
-              </a:srgbClr>
-            </a:solidFill>
-            <a:prstDash val="solid"/>
-          </a:ln>
-        </p:spPr>
       </p:sp>
       <p:sp>
         <p:nvSpPr>
@@ -6351,332 +5553,17 @@
           </a:solidFill>
           <a:ln/>
         </p:spPr>
+        <p:txBody>
+          <a:bodyPr/>
+          <a:lstStyle/>
+          <a:p>
+            <a:endParaRPr lang="en-US"/>
+          </a:p>
+        </p:txBody>
       </p:sp>
       <p:pic>
         <p:nvPicPr>
-          <p:cNvPr id="7" name="Image 0" descr="preencoded.png">    </p:cNvPr>
-          <p:cNvPicPr>
-            <a:picLocks noChangeAspect="1"/>
-          </p:cNvPicPr>
-          <p:nvPr/>
-        </p:nvPicPr>
-        <p:blipFill>
-          <a:blip r:embed="rId1"/>
-          <a:stretch>
-            <a:fillRect/>
-          </a:stretch>
-        </p:blipFill>
-        <p:spPr>
-          <a:xfrm>
-            <a:off x="1161288" y="2148840"/>
-            <a:ext cx="274320" cy="274320"/>
-          </a:xfrm>
-          <a:prstGeom prst="rect">
-            <a:avLst/>
-          </a:prstGeom>
-        </p:spPr>
-      </p:pic>
-      <p:sp>
-        <p:nvSpPr>
-          <p:cNvPr id="8" name="Text 5"/>
-          <p:cNvSpPr/>
-          <p:nvPr/>
-        </p:nvSpPr>
-        <p:spPr>
-          <a:xfrm>
-            <a:off x="1033272" y="2651760"/>
-            <a:ext cx="2871216" cy="530352"/>
-          </a:xfrm>
-          <a:prstGeom prst="rect">
-            <a:avLst/>
-          </a:prstGeom>
-          <a:noFill/>
-          <a:ln/>
-        </p:spPr>
-        <p:txBody>
-          <a:bodyPr wrap="square" lIns="0" tIns="0" rIns="0" bIns="0" rtlCol="0" anchor="t"/>
-          <a:lstStyle/>
-          <a:p>
-            <a:pPr indent="0" marL="0">
-              <a:lnSpc>
-                <a:spcPct val="98000"/>
-              </a:lnSpc>
-              <a:buNone/>
-            </a:pPr>
-            <a:r>
-              <a:rPr lang="en-US" sz="1600" b="1" dirty="0">
-                <a:solidFill>
-                  <a:srgbClr val="FFFFFF"/>
-                </a:solidFill>
-                <a:latin typeface="Space Grotesk" pitchFamily="34" charset="0"/>
-                <a:ea typeface="Space Grotesk" pitchFamily="34" charset="-122"/>
-                <a:cs typeface="Space Grotesk" pitchFamily="34" charset="-120"/>
-              </a:rPr>
-              <a:t>Zero code changes</a:t>
-            </a:r>
-            <a:endParaRPr lang="en-US" sz="1600" dirty="0"/>
-          </a:p>
-        </p:txBody>
-      </p:sp>
-      <p:sp>
-        <p:nvSpPr>
-          <p:cNvPr id="9" name="Text 6"/>
-          <p:cNvSpPr/>
-          <p:nvPr/>
-        </p:nvSpPr>
-        <p:spPr>
-          <a:xfrm>
-            <a:off x="1033272" y="3227832"/>
-            <a:ext cx="2871216" cy="530352"/>
-          </a:xfrm>
-          <a:prstGeom prst="rect">
-            <a:avLst/>
-          </a:prstGeom>
-          <a:noFill/>
-          <a:ln/>
-        </p:spPr>
-        <p:txBody>
-          <a:bodyPr wrap="square" lIns="0" tIns="0" rIns="0" bIns="0" rtlCol="0" anchor="t"/>
-          <a:lstStyle/>
-          <a:p>
-            <a:pPr indent="0" marL="0">
-              <a:lnSpc>
-                <a:spcPct val="125000"/>
-              </a:lnSpc>
-              <a:buNone/>
-            </a:pPr>
-            <a:r>
-              <a:rPr lang="en-US" sz="1100" dirty="0">
-                <a:solidFill>
-                  <a:srgbClr val="9DB0C9"/>
-                </a:solidFill>
-                <a:latin typeface="Inter" pitchFamily="34" charset="0"/>
-                <a:ea typeface="Inter" pitchFamily="34" charset="-122"/>
-                <a:cs typeface="Inter" pitchFamily="34" charset="-120"/>
-              </a:rPr>
-              <a:t>Intercepts AI traffic at the network edge. Existing agents, copilots and SDKs keep their config — every request twin-swapped.</a:t>
-            </a:r>
-            <a:endParaRPr lang="en-US" sz="1100" dirty="0"/>
-          </a:p>
-        </p:txBody>
-      </p:sp>
-      <p:sp>
-        <p:nvSpPr>
-          <p:cNvPr id="10" name="Shape 7"/>
-          <p:cNvSpPr/>
-          <p:nvPr/>
-        </p:nvSpPr>
-        <p:spPr>
-          <a:xfrm>
-            <a:off x="4434840" y="1783080"/>
-            <a:ext cx="3383280" cy="2103120"/>
-          </a:xfrm>
-          <a:prstGeom prst="roundRect">
-            <a:avLst>
-              <a:gd name="adj" fmla="val 6087"/>
-            </a:avLst>
-          </a:prstGeom>
-          <a:solidFill>
-            <a:srgbClr val="0A2C5E"/>
-          </a:solidFill>
-          <a:ln w="12700">
-            <a:solidFill>
-              <a:srgbClr val="FFFFFF">
-                <a:alpha val="14000"/>
-              </a:srgbClr>
-            </a:solidFill>
-            <a:prstDash val="solid"/>
-          </a:ln>
-        </p:spPr>
-      </p:sp>
-      <p:sp>
-        <p:nvSpPr>
-          <p:cNvPr id="11" name="Shape 8"/>
-          <p:cNvSpPr/>
-          <p:nvPr/>
-        </p:nvSpPr>
-        <p:spPr>
-          <a:xfrm>
-            <a:off x="4690872" y="2020824"/>
-            <a:ext cx="530352" cy="530352"/>
-          </a:xfrm>
-          <a:prstGeom prst="roundRect">
-            <a:avLst>
-              <a:gd name="adj" fmla="val 17241"/>
-            </a:avLst>
-          </a:prstGeom>
-          <a:solidFill>
-            <a:srgbClr val="FFFFFF">
-              <a:alpha val="10000"/>
-            </a:srgbClr>
-          </a:solidFill>
-          <a:ln/>
-        </p:spPr>
-      </p:sp>
-      <p:pic>
-        <p:nvPicPr>
-          <p:cNvPr id="12" name="Image 1" descr="preencoded.png">    </p:cNvPr>
-          <p:cNvPicPr>
-            <a:picLocks noChangeAspect="1"/>
-          </p:cNvPicPr>
-          <p:nvPr/>
-        </p:nvPicPr>
-        <p:blipFill>
-          <a:blip r:embed="rId2"/>
-          <a:stretch>
-            <a:fillRect/>
-          </a:stretch>
-        </p:blipFill>
-        <p:spPr>
-          <a:xfrm>
-            <a:off x="4818888" y="2148840"/>
-            <a:ext cx="274320" cy="274320"/>
-          </a:xfrm>
-          <a:prstGeom prst="rect">
-            <a:avLst/>
-          </a:prstGeom>
-        </p:spPr>
-      </p:pic>
-      <p:sp>
-        <p:nvSpPr>
-          <p:cNvPr id="13" name="Text 9"/>
-          <p:cNvSpPr/>
-          <p:nvPr/>
-        </p:nvSpPr>
-        <p:spPr>
-          <a:xfrm>
-            <a:off x="4690872" y="2651760"/>
-            <a:ext cx="2871216" cy="530352"/>
-          </a:xfrm>
-          <a:prstGeom prst="rect">
-            <a:avLst/>
-          </a:prstGeom>
-          <a:noFill/>
-          <a:ln/>
-        </p:spPr>
-        <p:txBody>
-          <a:bodyPr wrap="square" lIns="0" tIns="0" rIns="0" bIns="0" rtlCol="0" anchor="t"/>
-          <a:lstStyle/>
-          <a:p>
-            <a:pPr indent="0" marL="0">
-              <a:lnSpc>
-                <a:spcPct val="98000"/>
-              </a:lnSpc>
-              <a:buNone/>
-            </a:pPr>
-            <a:r>
-              <a:rPr lang="en-US" sz="1600" b="1" dirty="0">
-                <a:solidFill>
-                  <a:srgbClr val="FFFFFF"/>
-                </a:solidFill>
-                <a:latin typeface="Space Grotesk" pitchFamily="34" charset="0"/>
-                <a:ea typeface="Space Grotesk" pitchFamily="34" charset="-122"/>
-                <a:cs typeface="Space Grotesk" pitchFamily="34" charset="-120"/>
-              </a:rPr>
-              <a:t>AWS · Azure · GCP · bare metal</a:t>
-            </a:r>
-            <a:endParaRPr lang="en-US" sz="1600" dirty="0"/>
-          </a:p>
-        </p:txBody>
-      </p:sp>
-      <p:sp>
-        <p:nvSpPr>
-          <p:cNvPr id="14" name="Text 10"/>
-          <p:cNvSpPr/>
-          <p:nvPr/>
-        </p:nvSpPr>
-        <p:spPr>
-          <a:xfrm>
-            <a:off x="4690872" y="3227832"/>
-            <a:ext cx="2871216" cy="530352"/>
-          </a:xfrm>
-          <a:prstGeom prst="rect">
-            <a:avLst/>
-          </a:prstGeom>
-          <a:noFill/>
-          <a:ln/>
-        </p:spPr>
-        <p:txBody>
-          <a:bodyPr wrap="square" lIns="0" tIns="0" rIns="0" bIns="0" rtlCol="0" anchor="t"/>
-          <a:lstStyle/>
-          <a:p>
-            <a:pPr indent="0" marL="0">
-              <a:lnSpc>
-                <a:spcPct val="125000"/>
-              </a:lnSpc>
-              <a:buNone/>
-            </a:pPr>
-            <a:r>
-              <a:rPr lang="en-US" sz="1100" dirty="0">
-                <a:solidFill>
-                  <a:srgbClr val="9DB0C9"/>
-                </a:solidFill>
-                <a:latin typeface="Inter" pitchFamily="34" charset="0"/>
-                <a:ea typeface="Inter" pitchFamily="34" charset="-122"/>
-                <a:cs typeface="Inter" pitchFamily="34" charset="-120"/>
-              </a:rPr>
-              <a:t>Terraform, Helm, or single-container deploy. Production-ready in an afternoon, inside your tenancy — no third-party DPAs.</a:t>
-            </a:r>
-            <a:endParaRPr lang="en-US" sz="1100" dirty="0"/>
-          </a:p>
-        </p:txBody>
-      </p:sp>
-      <p:sp>
-        <p:nvSpPr>
-          <p:cNvPr id="15" name="Shape 11"/>
-          <p:cNvSpPr/>
-          <p:nvPr/>
-        </p:nvSpPr>
-        <p:spPr>
-          <a:xfrm>
-            <a:off x="8092440" y="1783080"/>
-            <a:ext cx="3383280" cy="2103120"/>
-          </a:xfrm>
-          <a:prstGeom prst="roundRect">
-            <a:avLst>
-              <a:gd name="adj" fmla="val 6087"/>
-            </a:avLst>
-          </a:prstGeom>
-          <a:solidFill>
-            <a:srgbClr val="0A2C5E"/>
-          </a:solidFill>
-          <a:ln w="12700">
-            <a:solidFill>
-              <a:srgbClr val="FFFFFF">
-                <a:alpha val="14000"/>
-              </a:srgbClr>
-            </a:solidFill>
-            <a:prstDash val="solid"/>
-          </a:ln>
-        </p:spPr>
-      </p:sp>
-      <p:sp>
-        <p:nvSpPr>
-          <p:cNvPr id="16" name="Shape 12"/>
-          <p:cNvSpPr/>
-          <p:nvPr/>
-        </p:nvSpPr>
-        <p:spPr>
-          <a:xfrm>
-            <a:off x="8348472" y="2020824"/>
-            <a:ext cx="530352" cy="530352"/>
-          </a:xfrm>
-          <a:prstGeom prst="roundRect">
-            <a:avLst>
-              <a:gd name="adj" fmla="val 17241"/>
-            </a:avLst>
-          </a:prstGeom>
-          <a:solidFill>
-            <a:srgbClr val="FFFFFF">
-              <a:alpha val="10000"/>
-            </a:srgbClr>
-          </a:solidFill>
-          <a:ln/>
-        </p:spPr>
-      </p:sp>
-      <p:pic>
-        <p:nvPicPr>
-          <p:cNvPr id="17" name="Image 2" descr="preencoded.png">    </p:cNvPr>
+          <p:cNvPr id="7" name="Image 0" descr="preencoded.png"/>
           <p:cNvPicPr>
             <a:picLocks noChangeAspect="1"/>
           </p:cNvPicPr>
@@ -6690,7 +5577,7 @@
         </p:blipFill>
         <p:spPr>
           <a:xfrm>
-            <a:off x="8476488" y="2148840"/>
+            <a:off x="1161288" y="2148840"/>
             <a:ext cx="274320" cy="274320"/>
           </a:xfrm>
           <a:prstGeom prst="rect">
@@ -6700,13 +5587,13 @@
       </p:pic>
       <p:sp>
         <p:nvSpPr>
-          <p:cNvPr id="18" name="Text 13"/>
-          <p:cNvSpPr/>
-          <p:nvPr/>
-        </p:nvSpPr>
-        <p:spPr>
-          <a:xfrm>
-            <a:off x="8348472" y="2651760"/>
+          <p:cNvPr id="8" name="Text 5"/>
+          <p:cNvSpPr/>
+          <p:nvPr/>
+        </p:nvSpPr>
+        <p:spPr>
+          <a:xfrm>
+            <a:off x="1033272" y="2651760"/>
             <a:ext cx="2871216" cy="530352"/>
           </a:xfrm>
           <a:prstGeom prst="rect">
@@ -6719,7 +5606,7 @@
           <a:bodyPr wrap="square" lIns="0" tIns="0" rIns="0" bIns="0" rtlCol="0" anchor="t"/>
           <a:lstStyle/>
           <a:p>
-            <a:pPr indent="0" marL="0">
+            <a:pPr marL="0" indent="0">
               <a:lnSpc>
                 <a:spcPct val="98000"/>
               </a:lnSpc>
@@ -6734,7 +5621,7 @@
                 <a:ea typeface="Space Grotesk" pitchFamily="34" charset="-122"/>
                 <a:cs typeface="Space Grotesk" pitchFamily="34" charset="-120"/>
               </a:rPr>
-              <a:t>Air-gapped option</a:t>
+              <a:t>Zero code changes</a:t>
             </a:r>
             <a:endParaRPr lang="en-US" sz="1600" dirty="0"/>
           </a:p>
@@ -6742,13 +5629,13 @@
       </p:sp>
       <p:sp>
         <p:nvSpPr>
-          <p:cNvPr id="19" name="Text 14"/>
-          <p:cNvSpPr/>
-          <p:nvPr/>
-        </p:nvSpPr>
-        <p:spPr>
-          <a:xfrm>
-            <a:off x="8348472" y="3227832"/>
+          <p:cNvPr id="9" name="Text 6"/>
+          <p:cNvSpPr/>
+          <p:nvPr/>
+        </p:nvSpPr>
+        <p:spPr>
+          <a:xfrm>
+            <a:off x="1033272" y="3227832"/>
             <a:ext cx="2871216" cy="530352"/>
           </a:xfrm>
           <a:prstGeom prst="rect">
@@ -6761,7 +5648,7 @@
           <a:bodyPr wrap="square" lIns="0" tIns="0" rIns="0" bIns="0" rtlCol="0" anchor="t"/>
           <a:lstStyle/>
           <a:p>
-            <a:pPr indent="0" marL="0">
+            <a:pPr marL="0" indent="0">
               <a:lnSpc>
                 <a:spcPct val="125000"/>
               </a:lnSpc>
@@ -6776,7 +5663,7 @@
                 <a:ea typeface="Inter" pitchFamily="34" charset="-122"/>
                 <a:cs typeface="Inter" pitchFamily="34" charset="-120"/>
               </a:rPr>
-              <a:t>Run detection with on-prem models. No outbound traffic. Built for regulated enterprises — Healthcare, FSI, Defense.</a:t>
+              <a:t>Intercepts AI traffic at the network edge. Existing agents, copilots and SDKs keep their config — every request twin-swapped.</a:t>
             </a:r>
             <a:endParaRPr lang="en-US" sz="1100" dirty="0"/>
           </a:p>
@@ -6784,42 +5671,13 @@
       </p:sp>
       <p:sp>
         <p:nvSpPr>
-          <p:cNvPr id="20" name="Shape 15"/>
-          <p:cNvSpPr/>
-          <p:nvPr/>
-        </p:nvSpPr>
-        <p:spPr>
-          <a:xfrm>
-            <a:off x="777240" y="4105656"/>
-            <a:ext cx="3383280" cy="2103120"/>
-          </a:xfrm>
-          <a:prstGeom prst="roundRect">
-            <a:avLst>
-              <a:gd name="adj" fmla="val 6087"/>
-            </a:avLst>
-          </a:prstGeom>
-          <a:solidFill>
-            <a:srgbClr val="0A2C5E"/>
-          </a:solidFill>
-          <a:ln w="12700">
-            <a:solidFill>
-              <a:srgbClr val="FFFFFF">
-                <a:alpha val="14000"/>
-              </a:srgbClr>
-            </a:solidFill>
-            <a:prstDash val="solid"/>
-          </a:ln>
-        </p:spPr>
-      </p:sp>
-      <p:sp>
-        <p:nvSpPr>
-          <p:cNvPr id="21" name="Shape 16"/>
-          <p:cNvSpPr/>
-          <p:nvPr/>
-        </p:nvSpPr>
-        <p:spPr>
-          <a:xfrm>
-            <a:off x="1033272" y="4343400"/>
+          <p:cNvPr id="11" name="Shape 8"/>
+          <p:cNvSpPr/>
+          <p:nvPr/>
+        </p:nvSpPr>
+        <p:spPr>
+          <a:xfrm>
+            <a:off x="4690872" y="2020824"/>
             <a:ext cx="530352" cy="530352"/>
           </a:xfrm>
           <a:prstGeom prst="roundRect">
@@ -6834,10 +5692,17 @@
           </a:solidFill>
           <a:ln/>
         </p:spPr>
+        <p:txBody>
+          <a:bodyPr/>
+          <a:lstStyle/>
+          <a:p>
+            <a:endParaRPr lang="en-US"/>
+          </a:p>
+        </p:txBody>
       </p:sp>
       <p:pic>
         <p:nvPicPr>
-          <p:cNvPr id="22" name="Image 3" descr="preencoded.png">    </p:cNvPr>
+          <p:cNvPr id="12" name="Image 1" descr="preencoded.png"/>
           <p:cNvPicPr>
             <a:picLocks noChangeAspect="1"/>
           </p:cNvPicPr>
@@ -6851,7 +5716,7 @@
         </p:blipFill>
         <p:spPr>
           <a:xfrm>
-            <a:off x="1161288" y="4471416"/>
+            <a:off x="4818888" y="2148840"/>
             <a:ext cx="274320" cy="274320"/>
           </a:xfrm>
           <a:prstGeom prst="rect">
@@ -6861,13 +5726,13 @@
       </p:pic>
       <p:sp>
         <p:nvSpPr>
-          <p:cNvPr id="23" name="Text 17"/>
-          <p:cNvSpPr/>
-          <p:nvPr/>
-        </p:nvSpPr>
-        <p:spPr>
-          <a:xfrm>
-            <a:off x="1033272" y="4974336"/>
+          <p:cNvPr id="13" name="Text 9"/>
+          <p:cNvSpPr/>
+          <p:nvPr/>
+        </p:nvSpPr>
+        <p:spPr>
+          <a:xfrm>
+            <a:off x="4690872" y="2651760"/>
             <a:ext cx="2871216" cy="530352"/>
           </a:xfrm>
           <a:prstGeom prst="rect">
@@ -6880,7 +5745,7 @@
           <a:bodyPr wrap="square" lIns="0" tIns="0" rIns="0" bIns="0" rtlCol="0" anchor="t"/>
           <a:lstStyle/>
           <a:p>
-            <a:pPr indent="0" marL="0">
+            <a:pPr marL="0" indent="0">
               <a:lnSpc>
                 <a:spcPct val="98000"/>
               </a:lnSpc>
@@ -6895,7 +5760,7 @@
                 <a:ea typeface="Space Grotesk" pitchFamily="34" charset="-122"/>
                 <a:cs typeface="Space Grotesk" pitchFamily="34" charset="-120"/>
               </a:rPr>
-              <a:t>Provider-agnostic gateway</a:t>
+              <a:t>AWS · Azure · GCP · bare metal</a:t>
             </a:r>
             <a:endParaRPr lang="en-US" sz="1600" dirty="0"/>
           </a:p>
@@ -6903,13 +5768,13 @@
       </p:sp>
       <p:sp>
         <p:nvSpPr>
-          <p:cNvPr id="24" name="Text 18"/>
-          <p:cNvSpPr/>
-          <p:nvPr/>
-        </p:nvSpPr>
-        <p:spPr>
-          <a:xfrm>
-            <a:off x="1033272" y="5550408"/>
+          <p:cNvPr id="14" name="Text 10"/>
+          <p:cNvSpPr/>
+          <p:nvPr/>
+        </p:nvSpPr>
+        <p:spPr>
+          <a:xfrm>
+            <a:off x="4690872" y="3227832"/>
             <a:ext cx="2871216" cy="530352"/>
           </a:xfrm>
           <a:prstGeom prst="rect">
@@ -6922,7 +5787,7 @@
           <a:bodyPr wrap="square" lIns="0" tIns="0" rIns="0" bIns="0" rtlCol="0" anchor="t"/>
           <a:lstStyle/>
           <a:p>
-            <a:pPr indent="0" marL="0">
+            <a:pPr marL="0" indent="0">
               <a:lnSpc>
                 <a:spcPct val="125000"/>
               </a:lnSpc>
@@ -6937,7 +5802,7 @@
                 <a:ea typeface="Inter" pitchFamily="34" charset="-122"/>
                 <a:cs typeface="Inter" pitchFamily="34" charset="-120"/>
               </a:rPr>
-              <a:t>OpenAI / Anthropic / Google compatible. Route to GPT, Claude, Gemini, Mistral, Llama or your own fine-tune.</a:t>
+              <a:t>Terraform, Helm, or single-container deploy. Production-ready in an afternoon, inside your tenancy — no third-party DPAs.</a:t>
             </a:r>
             <a:endParaRPr lang="en-US" sz="1100" dirty="0"/>
           </a:p>
@@ -6945,42 +5810,13 @@
       </p:sp>
       <p:sp>
         <p:nvSpPr>
-          <p:cNvPr id="25" name="Shape 19"/>
-          <p:cNvSpPr/>
-          <p:nvPr/>
-        </p:nvSpPr>
-        <p:spPr>
-          <a:xfrm>
-            <a:off x="4434840" y="4105656"/>
-            <a:ext cx="3383280" cy="2103120"/>
-          </a:xfrm>
-          <a:prstGeom prst="roundRect">
-            <a:avLst>
-              <a:gd name="adj" fmla="val 6087"/>
-            </a:avLst>
-          </a:prstGeom>
-          <a:solidFill>
-            <a:srgbClr val="0A2C5E"/>
-          </a:solidFill>
-          <a:ln w="12700">
-            <a:solidFill>
-              <a:srgbClr val="FFFFFF">
-                <a:alpha val="14000"/>
-              </a:srgbClr>
-            </a:solidFill>
-            <a:prstDash val="solid"/>
-          </a:ln>
-        </p:spPr>
-      </p:sp>
-      <p:sp>
-        <p:nvSpPr>
-          <p:cNvPr id="26" name="Shape 20"/>
-          <p:cNvSpPr/>
-          <p:nvPr/>
-        </p:nvSpPr>
-        <p:spPr>
-          <a:xfrm>
-            <a:off x="4690872" y="4343400"/>
+          <p:cNvPr id="16" name="Shape 12"/>
+          <p:cNvSpPr/>
+          <p:nvPr/>
+        </p:nvSpPr>
+        <p:spPr>
+          <a:xfrm>
+            <a:off x="8348472" y="2020824"/>
             <a:ext cx="530352" cy="530352"/>
           </a:xfrm>
           <a:prstGeom prst="roundRect">
@@ -6995,10 +5831,17 @@
           </a:solidFill>
           <a:ln/>
         </p:spPr>
+        <p:txBody>
+          <a:bodyPr/>
+          <a:lstStyle/>
+          <a:p>
+            <a:endParaRPr lang="en-US"/>
+          </a:p>
+        </p:txBody>
       </p:sp>
       <p:pic>
         <p:nvPicPr>
-          <p:cNvPr id="27" name="Image 4" descr="preencoded.png">    </p:cNvPr>
+          <p:cNvPr id="17" name="Image 2" descr="preencoded.png"/>
           <p:cNvPicPr>
             <a:picLocks noChangeAspect="1"/>
           </p:cNvPicPr>
@@ -7012,7 +5855,7 @@
         </p:blipFill>
         <p:spPr>
           <a:xfrm>
-            <a:off x="4818888" y="4471416"/>
+            <a:off x="8476488" y="2148840"/>
             <a:ext cx="274320" cy="274320"/>
           </a:xfrm>
           <a:prstGeom prst="rect">
@@ -7022,13 +5865,13 @@
       </p:pic>
       <p:sp>
         <p:nvSpPr>
-          <p:cNvPr id="28" name="Text 21"/>
-          <p:cNvSpPr/>
-          <p:nvPr/>
-        </p:nvSpPr>
-        <p:spPr>
-          <a:xfrm>
-            <a:off x="4690872" y="4974336"/>
+          <p:cNvPr id="18" name="Text 13"/>
+          <p:cNvSpPr/>
+          <p:nvPr/>
+        </p:nvSpPr>
+        <p:spPr>
+          <a:xfrm>
+            <a:off x="8348472" y="2651760"/>
             <a:ext cx="2871216" cy="530352"/>
           </a:xfrm>
           <a:prstGeom prst="rect">
@@ -7041,7 +5884,7 @@
           <a:bodyPr wrap="square" lIns="0" tIns="0" rIns="0" bIns="0" rtlCol="0" anchor="t"/>
           <a:lstStyle/>
           <a:p>
-            <a:pPr indent="0" marL="0">
+            <a:pPr marL="0" indent="0">
               <a:lnSpc>
                 <a:spcPct val="98000"/>
               </a:lnSpc>
@@ -7056,7 +5899,7 @@
                 <a:ea typeface="Space Grotesk" pitchFamily="34" charset="-122"/>
                 <a:cs typeface="Space Grotesk" pitchFamily="34" charset="-120"/>
               </a:rPr>
-              <a:t>Streaming-safe</a:t>
+              <a:t>Air-gapped option</a:t>
             </a:r>
             <a:endParaRPr lang="en-US" sz="1600" dirty="0"/>
           </a:p>
@@ -7064,13 +5907,13 @@
       </p:sp>
       <p:sp>
         <p:nvSpPr>
-          <p:cNvPr id="29" name="Text 22"/>
-          <p:cNvSpPr/>
-          <p:nvPr/>
-        </p:nvSpPr>
-        <p:spPr>
-          <a:xfrm>
-            <a:off x="4690872" y="5550408"/>
+          <p:cNvPr id="19" name="Text 14"/>
+          <p:cNvSpPr/>
+          <p:nvPr/>
+        </p:nvSpPr>
+        <p:spPr>
+          <a:xfrm>
+            <a:off x="8348472" y="3227832"/>
             <a:ext cx="2871216" cy="530352"/>
           </a:xfrm>
           <a:prstGeom prst="rect">
@@ -7083,7 +5926,7 @@
           <a:bodyPr wrap="square" lIns="0" tIns="0" rIns="0" bIns="0" rtlCol="0" anchor="t"/>
           <a:lstStyle/>
           <a:p>
-            <a:pPr indent="0" marL="0">
+            <a:pPr marL="0" indent="0">
               <a:lnSpc>
                 <a:spcPct val="125000"/>
               </a:lnSpc>
@@ -7098,7 +5941,7 @@
                 <a:ea typeface="Inter" pitchFamily="34" charset="-122"/>
                 <a:cs typeface="Inter" pitchFamily="34" charset="-120"/>
               </a:rPr>
-              <a:t>Detects and swaps mid-stream without breaking token-by-token responses. Users never see a hitch.</a:t>
+              <a:t>Run detection with on-prem models. No outbound traffic. Built for regulated enterprises — Healthcare, FSI, Defense.</a:t>
             </a:r>
             <a:endParaRPr lang="en-US" sz="1100" dirty="0"/>
           </a:p>
@@ -7106,42 +5949,13 @@
       </p:sp>
       <p:sp>
         <p:nvSpPr>
-          <p:cNvPr id="30" name="Shape 23"/>
-          <p:cNvSpPr/>
-          <p:nvPr/>
-        </p:nvSpPr>
-        <p:spPr>
-          <a:xfrm>
-            <a:off x="8092440" y="4105656"/>
-            <a:ext cx="3383280" cy="2103120"/>
-          </a:xfrm>
-          <a:prstGeom prst="roundRect">
-            <a:avLst>
-              <a:gd name="adj" fmla="val 6087"/>
-            </a:avLst>
-          </a:prstGeom>
-          <a:solidFill>
-            <a:srgbClr val="0A2C5E"/>
-          </a:solidFill>
-          <a:ln w="12700">
-            <a:solidFill>
-              <a:srgbClr val="FFFFFF">
-                <a:alpha val="14000"/>
-              </a:srgbClr>
-            </a:solidFill>
-            <a:prstDash val="solid"/>
-          </a:ln>
-        </p:spPr>
-      </p:sp>
-      <p:sp>
-        <p:nvSpPr>
-          <p:cNvPr id="31" name="Shape 24"/>
-          <p:cNvSpPr/>
-          <p:nvPr/>
-        </p:nvSpPr>
-        <p:spPr>
-          <a:xfrm>
-            <a:off x="8348472" y="4343400"/>
+          <p:cNvPr id="21" name="Shape 16"/>
+          <p:cNvSpPr/>
+          <p:nvPr/>
+        </p:nvSpPr>
+        <p:spPr>
+          <a:xfrm>
+            <a:off x="1033272" y="4343400"/>
             <a:ext cx="530352" cy="530352"/>
           </a:xfrm>
           <a:prstGeom prst="roundRect">
@@ -7156,10 +5970,17 @@
           </a:solidFill>
           <a:ln/>
         </p:spPr>
+        <p:txBody>
+          <a:bodyPr/>
+          <a:lstStyle/>
+          <a:p>
+            <a:endParaRPr lang="en-US"/>
+          </a:p>
+        </p:txBody>
       </p:sp>
       <p:pic>
         <p:nvPicPr>
-          <p:cNvPr id="32" name="Image 5" descr="preencoded.png">    </p:cNvPr>
+          <p:cNvPr id="22" name="Image 3" descr="preencoded.png"/>
           <p:cNvPicPr>
             <a:picLocks noChangeAspect="1"/>
           </p:cNvPicPr>
@@ -7173,7 +5994,7 @@
         </p:blipFill>
         <p:spPr>
           <a:xfrm>
-            <a:off x="8476488" y="4471416"/>
+            <a:off x="1161288" y="4471416"/>
             <a:ext cx="274320" cy="274320"/>
           </a:xfrm>
           <a:prstGeom prst="rect">
@@ -7183,13 +6004,13 @@
       </p:pic>
       <p:sp>
         <p:nvSpPr>
-          <p:cNvPr id="33" name="Text 25"/>
-          <p:cNvSpPr/>
-          <p:nvPr/>
-        </p:nvSpPr>
-        <p:spPr>
-          <a:xfrm>
-            <a:off x="8348472" y="4974336"/>
+          <p:cNvPr id="23" name="Text 17"/>
+          <p:cNvSpPr/>
+          <p:nvPr/>
+        </p:nvSpPr>
+        <p:spPr>
+          <a:xfrm>
+            <a:off x="1033272" y="4974336"/>
             <a:ext cx="2871216" cy="530352"/>
           </a:xfrm>
           <a:prstGeom prst="rect">
@@ -7202,7 +6023,7 @@
           <a:bodyPr wrap="square" lIns="0" tIns="0" rIns="0" bIns="0" rtlCol="0" anchor="t"/>
           <a:lstStyle/>
           <a:p>
-            <a:pPr indent="0" marL="0">
+            <a:pPr marL="0" indent="0">
               <a:lnSpc>
                 <a:spcPct val="98000"/>
               </a:lnSpc>
@@ -7217,7 +6038,7 @@
                 <a:ea typeface="Space Grotesk" pitchFamily="34" charset="-122"/>
                 <a:cs typeface="Space Grotesk" pitchFamily="34" charset="-120"/>
               </a:rPr>
-              <a:t>Horizontal scale &amp; 24/7 SLA</a:t>
+              <a:t>Provider-agnostic gateway</a:t>
             </a:r>
             <a:endParaRPr lang="en-US" sz="1600" dirty="0"/>
           </a:p>
@@ -7225,13 +6046,13 @@
       </p:sp>
       <p:sp>
         <p:nvSpPr>
-          <p:cNvPr id="34" name="Text 26"/>
-          <p:cNvSpPr/>
-          <p:nvPr/>
-        </p:nvSpPr>
-        <p:spPr>
-          <a:xfrm>
-            <a:off x="8348472" y="5550408"/>
+          <p:cNvPr id="24" name="Text 18"/>
+          <p:cNvSpPr/>
+          <p:nvPr/>
+        </p:nvSpPr>
+        <p:spPr>
+          <a:xfrm>
+            <a:off x="1033272" y="5550408"/>
             <a:ext cx="2871216" cy="530352"/>
           </a:xfrm>
           <a:prstGeom prst="rect">
@@ -7244,7 +6065,7 @@
           <a:bodyPr wrap="square" lIns="0" tIns="0" rIns="0" bIns="0" rtlCol="0" anchor="t"/>
           <a:lstStyle/>
           <a:p>
-            <a:pPr indent="0" marL="0">
+            <a:pPr marL="0" indent="0">
               <a:lnSpc>
                 <a:spcPct val="125000"/>
               </a:lnSpc>
@@ -7259,15 +6080,46 @@
                 <a:ea typeface="Inter" pitchFamily="34" charset="-122"/>
                 <a:cs typeface="Inter" pitchFamily="34" charset="-120"/>
               </a:rPr>
-              <a:t>Stateless workers scale to 100k req/s. P99 under half a second. Dedicated SE. 24/7 support included.</a:t>
+              <a:t>OpenAI / Anthropic / Google compatible. Route to GPT, Claude, Gemini, Mistral, Llama or your own fine-tune.</a:t>
             </a:r>
             <a:endParaRPr lang="en-US" sz="1100" dirty="0"/>
+          </a:p>
+        </p:txBody>
+      </p:sp>
+      <p:sp>
+        <p:nvSpPr>
+          <p:cNvPr id="26" name="Shape 20"/>
+          <p:cNvSpPr/>
+          <p:nvPr/>
+        </p:nvSpPr>
+        <p:spPr>
+          <a:xfrm>
+            <a:off x="4690872" y="4343400"/>
+            <a:ext cx="530352" cy="530352"/>
+          </a:xfrm>
+          <a:prstGeom prst="roundRect">
+            <a:avLst>
+              <a:gd name="adj" fmla="val 17241"/>
+            </a:avLst>
+          </a:prstGeom>
+          <a:solidFill>
+            <a:srgbClr val="FFFFFF">
+              <a:alpha val="10000"/>
+            </a:srgbClr>
+          </a:solidFill>
+          <a:ln/>
+        </p:spPr>
+        <p:txBody>
+          <a:bodyPr/>
+          <a:lstStyle/>
+          <a:p>
+            <a:endParaRPr lang="en-US"/>
           </a:p>
         </p:txBody>
       </p:sp>
       <p:pic>
         <p:nvPicPr>
-          <p:cNvPr id="35" name="Image 6" descr="assets/pp-logo-light.png">    </p:cNvPr>
+          <p:cNvPr id="27" name="Image 4" descr="preencoded.png"/>
           <p:cNvPicPr>
             <a:picLocks noChangeAspect="1"/>
           </p:cNvPicPr>
@@ -7281,6 +6133,253 @@
         </p:blipFill>
         <p:spPr>
           <a:xfrm>
+            <a:off x="4818888" y="4471416"/>
+            <a:ext cx="274320" cy="274320"/>
+          </a:xfrm>
+          <a:prstGeom prst="rect">
+            <a:avLst/>
+          </a:prstGeom>
+        </p:spPr>
+      </p:pic>
+      <p:sp>
+        <p:nvSpPr>
+          <p:cNvPr id="28" name="Text 21"/>
+          <p:cNvSpPr/>
+          <p:nvPr/>
+        </p:nvSpPr>
+        <p:spPr>
+          <a:xfrm>
+            <a:off x="4690872" y="4974336"/>
+            <a:ext cx="2871216" cy="530352"/>
+          </a:xfrm>
+          <a:prstGeom prst="rect">
+            <a:avLst/>
+          </a:prstGeom>
+          <a:noFill/>
+          <a:ln/>
+        </p:spPr>
+        <p:txBody>
+          <a:bodyPr wrap="square" lIns="0" tIns="0" rIns="0" bIns="0" rtlCol="0" anchor="t"/>
+          <a:lstStyle/>
+          <a:p>
+            <a:pPr marL="0" indent="0">
+              <a:lnSpc>
+                <a:spcPct val="98000"/>
+              </a:lnSpc>
+              <a:buNone/>
+            </a:pPr>
+            <a:r>
+              <a:rPr lang="en-US" sz="1600" b="1" dirty="0">
+                <a:solidFill>
+                  <a:srgbClr val="FFFFFF"/>
+                </a:solidFill>
+                <a:latin typeface="Space Grotesk" pitchFamily="34" charset="0"/>
+                <a:ea typeface="Space Grotesk" pitchFamily="34" charset="-122"/>
+                <a:cs typeface="Space Grotesk" pitchFamily="34" charset="-120"/>
+              </a:rPr>
+              <a:t>Streaming-safe</a:t>
+            </a:r>
+            <a:endParaRPr lang="en-US" sz="1600" dirty="0"/>
+          </a:p>
+        </p:txBody>
+      </p:sp>
+      <p:sp>
+        <p:nvSpPr>
+          <p:cNvPr id="29" name="Text 22"/>
+          <p:cNvSpPr/>
+          <p:nvPr/>
+        </p:nvSpPr>
+        <p:spPr>
+          <a:xfrm>
+            <a:off x="4690872" y="5550408"/>
+            <a:ext cx="2871216" cy="530352"/>
+          </a:xfrm>
+          <a:prstGeom prst="rect">
+            <a:avLst/>
+          </a:prstGeom>
+          <a:noFill/>
+          <a:ln/>
+        </p:spPr>
+        <p:txBody>
+          <a:bodyPr wrap="square" lIns="0" tIns="0" rIns="0" bIns="0" rtlCol="0" anchor="t"/>
+          <a:lstStyle/>
+          <a:p>
+            <a:pPr marL="0" indent="0">
+              <a:lnSpc>
+                <a:spcPct val="125000"/>
+              </a:lnSpc>
+              <a:buNone/>
+            </a:pPr>
+            <a:r>
+              <a:rPr lang="en-US" sz="1100" dirty="0">
+                <a:solidFill>
+                  <a:srgbClr val="9DB0C9"/>
+                </a:solidFill>
+                <a:latin typeface="Inter" pitchFamily="34" charset="0"/>
+                <a:ea typeface="Inter" pitchFamily="34" charset="-122"/>
+                <a:cs typeface="Inter" pitchFamily="34" charset="-120"/>
+              </a:rPr>
+              <a:t>Detects and swaps mid-stream without breaking token-by-token responses. Users never see a hitch.</a:t>
+            </a:r>
+            <a:endParaRPr lang="en-US" sz="1100" dirty="0"/>
+          </a:p>
+        </p:txBody>
+      </p:sp>
+      <p:sp>
+        <p:nvSpPr>
+          <p:cNvPr id="31" name="Shape 24"/>
+          <p:cNvSpPr/>
+          <p:nvPr/>
+        </p:nvSpPr>
+        <p:spPr>
+          <a:xfrm>
+            <a:off x="8348472" y="4343400"/>
+            <a:ext cx="530352" cy="530352"/>
+          </a:xfrm>
+          <a:prstGeom prst="roundRect">
+            <a:avLst>
+              <a:gd name="adj" fmla="val 17241"/>
+            </a:avLst>
+          </a:prstGeom>
+          <a:solidFill>
+            <a:srgbClr val="FFFFFF">
+              <a:alpha val="10000"/>
+            </a:srgbClr>
+          </a:solidFill>
+          <a:ln/>
+        </p:spPr>
+        <p:txBody>
+          <a:bodyPr/>
+          <a:lstStyle/>
+          <a:p>
+            <a:endParaRPr lang="en-US"/>
+          </a:p>
+        </p:txBody>
+      </p:sp>
+      <p:pic>
+        <p:nvPicPr>
+          <p:cNvPr id="32" name="Image 5" descr="preencoded.png"/>
+          <p:cNvPicPr>
+            <a:picLocks noChangeAspect="1"/>
+          </p:cNvPicPr>
+          <p:nvPr/>
+        </p:nvPicPr>
+        <p:blipFill>
+          <a:blip r:embed="rId8"/>
+          <a:stretch>
+            <a:fillRect/>
+          </a:stretch>
+        </p:blipFill>
+        <p:spPr>
+          <a:xfrm>
+            <a:off x="8476488" y="4471416"/>
+            <a:ext cx="274320" cy="274320"/>
+          </a:xfrm>
+          <a:prstGeom prst="rect">
+            <a:avLst/>
+          </a:prstGeom>
+        </p:spPr>
+      </p:pic>
+      <p:sp>
+        <p:nvSpPr>
+          <p:cNvPr id="33" name="Text 25"/>
+          <p:cNvSpPr/>
+          <p:nvPr/>
+        </p:nvSpPr>
+        <p:spPr>
+          <a:xfrm>
+            <a:off x="8348472" y="4974336"/>
+            <a:ext cx="2871216" cy="530352"/>
+          </a:xfrm>
+          <a:prstGeom prst="rect">
+            <a:avLst/>
+          </a:prstGeom>
+          <a:noFill/>
+          <a:ln/>
+        </p:spPr>
+        <p:txBody>
+          <a:bodyPr wrap="square" lIns="0" tIns="0" rIns="0" bIns="0" rtlCol="0" anchor="t"/>
+          <a:lstStyle/>
+          <a:p>
+            <a:pPr marL="0" indent="0">
+              <a:lnSpc>
+                <a:spcPct val="98000"/>
+              </a:lnSpc>
+              <a:buNone/>
+            </a:pPr>
+            <a:r>
+              <a:rPr lang="en-US" sz="1600" b="1" dirty="0">
+                <a:solidFill>
+                  <a:srgbClr val="FFFFFF"/>
+                </a:solidFill>
+                <a:latin typeface="Space Grotesk" pitchFamily="34" charset="0"/>
+                <a:ea typeface="Space Grotesk" pitchFamily="34" charset="-122"/>
+                <a:cs typeface="Space Grotesk" pitchFamily="34" charset="-120"/>
+              </a:rPr>
+              <a:t>Horizontal scale &amp; 24/7 SLA</a:t>
+            </a:r>
+            <a:endParaRPr lang="en-US" sz="1600" dirty="0"/>
+          </a:p>
+        </p:txBody>
+      </p:sp>
+      <p:sp>
+        <p:nvSpPr>
+          <p:cNvPr id="34" name="Text 26"/>
+          <p:cNvSpPr/>
+          <p:nvPr/>
+        </p:nvSpPr>
+        <p:spPr>
+          <a:xfrm>
+            <a:off x="8348472" y="5550408"/>
+            <a:ext cx="2871216" cy="530352"/>
+          </a:xfrm>
+          <a:prstGeom prst="rect">
+            <a:avLst/>
+          </a:prstGeom>
+          <a:noFill/>
+          <a:ln/>
+        </p:spPr>
+        <p:txBody>
+          <a:bodyPr wrap="square" lIns="0" tIns="0" rIns="0" bIns="0" rtlCol="0" anchor="t"/>
+          <a:lstStyle/>
+          <a:p>
+            <a:pPr marL="0" indent="0">
+              <a:lnSpc>
+                <a:spcPct val="125000"/>
+              </a:lnSpc>
+              <a:buNone/>
+            </a:pPr>
+            <a:r>
+              <a:rPr lang="en-US" sz="1100" dirty="0">
+                <a:solidFill>
+                  <a:srgbClr val="9DB0C9"/>
+                </a:solidFill>
+                <a:latin typeface="Inter" pitchFamily="34" charset="0"/>
+                <a:ea typeface="Inter" pitchFamily="34" charset="-122"/>
+                <a:cs typeface="Inter" pitchFamily="34" charset="-120"/>
+              </a:rPr>
+              <a:t>Stateless workers scale to 100k req/s. P99 under half a second. Dedicated SE. 24/7 support included.</a:t>
+            </a:r>
+            <a:endParaRPr lang="en-US" sz="1100" dirty="0"/>
+          </a:p>
+        </p:txBody>
+      </p:sp>
+      <p:pic>
+        <p:nvPicPr>
+          <p:cNvPr id="35" name="Image 6" descr="assets/pp-logo-light.png"/>
+          <p:cNvPicPr>
+            <a:picLocks noChangeAspect="1"/>
+          </p:cNvPicPr>
+          <p:nvPr/>
+        </p:nvPicPr>
+        <p:blipFill>
+          <a:blip r:embed="rId9"/>
+          <a:stretch>
+            <a:fillRect/>
+          </a:stretch>
+        </p:blipFill>
+        <p:spPr>
+          <a:xfrm>
             <a:off x="777240" y="6419088"/>
             <a:ext cx="841248" cy="233026"/>
           </a:xfrm>
@@ -7310,11 +6409,11 @@
           <a:bodyPr wrap="square" lIns="0" tIns="0" rIns="0" bIns="0" rtlCol="0" anchor="ctr"/>
           <a:lstStyle/>
           <a:p>
-            <a:pPr algn="r" indent="0" marL="0">
-              <a:buNone/>
-            </a:pPr>
-            <a:r>
-              <a:rPr lang="en-US" sz="1000" spc="200" kern="0" dirty="0">
+            <a:pPr marL="0" indent="0" algn="r">
+              <a:buNone/>
+            </a:pPr>
+            <a:r>
+              <a:rPr lang="en-US" sz="1000" kern="0" spc="200" dirty="0">
                 <a:solidFill>
                   <a:srgbClr val="9DB0C9"/>
                 </a:solidFill>
@@ -7344,6 +6443,7 @@
         <a:solidFill>
           <a:srgbClr val="01204E"/>
         </a:solidFill>
+        <a:effectLst/>
       </p:bgPr>
     </p:bg>
     <p:spTree>
@@ -7379,6 +6479,13 @@
           </a:solidFill>
           <a:ln/>
         </p:spPr>
+        <p:txBody>
+          <a:bodyPr/>
+          <a:lstStyle/>
+          <a:p>
+            <a:endParaRPr lang="en-US"/>
+          </a:p>
+        </p:txBody>
       </p:sp>
       <p:sp>
         <p:nvSpPr>
@@ -7401,11 +6508,11 @@
           <a:bodyPr wrap="square" lIns="0" tIns="0" rIns="0" bIns="0" rtlCol="0" anchor="ctr"/>
           <a:lstStyle/>
           <a:p>
-            <a:pPr algn="l" indent="0" marL="0">
-              <a:buNone/>
-            </a:pPr>
-            <a:r>
-              <a:rPr lang="en-US" sz="1250" b="1" spc="300" kern="0" dirty="0">
+            <a:pPr marL="0" indent="0" algn="l">
+              <a:buNone/>
+            </a:pPr>
+            <a:r>
+              <a:rPr lang="en-US" sz="1250" b="1" kern="0" spc="300" dirty="0">
                 <a:solidFill>
                   <a:srgbClr val="12A7B5"/>
                 </a:solidFill>
@@ -7440,7 +6547,7 @@
           <a:bodyPr wrap="square" lIns="0" tIns="0" rIns="0" bIns="0" rtlCol="0" anchor="ctr"/>
           <a:lstStyle/>
           <a:p>
-            <a:pPr indent="0" marL="0">
+            <a:pPr marL="0" indent="0">
               <a:buNone/>
             </a:pPr>
             <a:r>
@@ -7457,35 +6564,6 @@
             <a:endParaRPr lang="en-US" sz="3200" dirty="0"/>
           </a:p>
         </p:txBody>
-      </p:sp>
-      <p:sp>
-        <p:nvSpPr>
-          <p:cNvPr id="5" name="Shape 3"/>
-          <p:cNvSpPr/>
-          <p:nvPr/>
-        </p:nvSpPr>
-        <p:spPr>
-          <a:xfrm>
-            <a:off x="777240" y="1783080"/>
-            <a:ext cx="3383280" cy="2103120"/>
-          </a:xfrm>
-          <a:prstGeom prst="roundRect">
-            <a:avLst>
-              <a:gd name="adj" fmla="val 6087"/>
-            </a:avLst>
-          </a:prstGeom>
-          <a:solidFill>
-            <a:srgbClr val="0A2C5E"/>
-          </a:solidFill>
-          <a:ln w="12700">
-            <a:solidFill>
-              <a:srgbClr val="FFFFFF">
-                <a:alpha val="14000"/>
-              </a:srgbClr>
-            </a:solidFill>
-            <a:prstDash val="solid"/>
-          </a:ln>
-        </p:spPr>
       </p:sp>
       <p:sp>
         <p:nvSpPr>
@@ -7510,332 +6588,17 @@
           </a:solidFill>
           <a:ln/>
         </p:spPr>
+        <p:txBody>
+          <a:bodyPr/>
+          <a:lstStyle/>
+          <a:p>
+            <a:endParaRPr lang="en-US"/>
+          </a:p>
+        </p:txBody>
       </p:sp>
       <p:pic>
         <p:nvPicPr>
-          <p:cNvPr id="7" name="Image 0" descr="preencoded.png">    </p:cNvPr>
-          <p:cNvPicPr>
-            <a:picLocks noChangeAspect="1"/>
-          </p:cNvPicPr>
-          <p:nvPr/>
-        </p:nvPicPr>
-        <p:blipFill>
-          <a:blip r:embed="rId1"/>
-          <a:stretch>
-            <a:fillRect/>
-          </a:stretch>
-        </p:blipFill>
-        <p:spPr>
-          <a:xfrm>
-            <a:off x="1161288" y="2148840"/>
-            <a:ext cx="274320" cy="274320"/>
-          </a:xfrm>
-          <a:prstGeom prst="rect">
-            <a:avLst/>
-          </a:prstGeom>
-        </p:spPr>
-      </p:pic>
-      <p:sp>
-        <p:nvSpPr>
-          <p:cNvPr id="8" name="Text 5"/>
-          <p:cNvSpPr/>
-          <p:nvPr/>
-        </p:nvSpPr>
-        <p:spPr>
-          <a:xfrm>
-            <a:off x="1033272" y="2651760"/>
-            <a:ext cx="2871216" cy="530352"/>
-          </a:xfrm>
-          <a:prstGeom prst="rect">
-            <a:avLst/>
-          </a:prstGeom>
-          <a:noFill/>
-          <a:ln/>
-        </p:spPr>
-        <p:txBody>
-          <a:bodyPr wrap="square" lIns="0" tIns="0" rIns="0" bIns="0" rtlCol="0" anchor="t"/>
-          <a:lstStyle/>
-          <a:p>
-            <a:pPr indent="0" marL="0">
-              <a:lnSpc>
-                <a:spcPct val="98000"/>
-              </a:lnSpc>
-              <a:buNone/>
-            </a:pPr>
-            <a:r>
-              <a:rPr lang="en-US" sz="1600" b="1" dirty="0">
-                <a:solidFill>
-                  <a:srgbClr val="FFFFFF"/>
-                </a:solidFill>
-                <a:latin typeface="Space Grotesk" pitchFamily="34" charset="0"/>
-                <a:ea typeface="Space Grotesk" pitchFamily="34" charset="-122"/>
-                <a:cs typeface="Space Grotesk" pitchFamily="34" charset="-120"/>
-              </a:rPr>
-              <a:t>Agentless discovery</a:t>
-            </a:r>
-            <a:endParaRPr lang="en-US" sz="1600" dirty="0"/>
-          </a:p>
-        </p:txBody>
-      </p:sp>
-      <p:sp>
-        <p:nvSpPr>
-          <p:cNvPr id="9" name="Text 6"/>
-          <p:cNvSpPr/>
-          <p:nvPr/>
-        </p:nvSpPr>
-        <p:spPr>
-          <a:xfrm>
-            <a:off x="1033272" y="3227832"/>
-            <a:ext cx="2871216" cy="530352"/>
-          </a:xfrm>
-          <a:prstGeom prst="rect">
-            <a:avLst/>
-          </a:prstGeom>
-          <a:noFill/>
-          <a:ln/>
-        </p:spPr>
-        <p:txBody>
-          <a:bodyPr wrap="square" lIns="0" tIns="0" rIns="0" bIns="0" rtlCol="0" anchor="t"/>
-          <a:lstStyle/>
-          <a:p>
-            <a:pPr indent="0" marL="0">
-              <a:lnSpc>
-                <a:spcPct val="125000"/>
-              </a:lnSpc>
-              <a:buNone/>
-            </a:pPr>
-            <a:r>
-              <a:rPr lang="en-US" sz="1100" dirty="0">
-                <a:solidFill>
-                  <a:srgbClr val="9DB0C9"/>
-                </a:solidFill>
-                <a:latin typeface="Inter" pitchFamily="34" charset="0"/>
-                <a:ea typeface="Inter" pitchFamily="34" charset="-122"/>
-                <a:cs typeface="Inter" pitchFamily="34" charset="-120"/>
-              </a:rPr>
-              <a:t>Connect a store and it's in the scan queue. SQL, Mongo, Supabase, Drive, object storage — read in place, no agents.</a:t>
-            </a:r>
-            <a:endParaRPr lang="en-US" sz="1100" dirty="0"/>
-          </a:p>
-        </p:txBody>
-      </p:sp>
-      <p:sp>
-        <p:nvSpPr>
-          <p:cNvPr id="10" name="Shape 7"/>
-          <p:cNvSpPr/>
-          <p:nvPr/>
-        </p:nvSpPr>
-        <p:spPr>
-          <a:xfrm>
-            <a:off x="4434840" y="1783080"/>
-            <a:ext cx="3383280" cy="2103120"/>
-          </a:xfrm>
-          <a:prstGeom prst="roundRect">
-            <a:avLst>
-              <a:gd name="adj" fmla="val 6087"/>
-            </a:avLst>
-          </a:prstGeom>
-          <a:solidFill>
-            <a:srgbClr val="0A2C5E"/>
-          </a:solidFill>
-          <a:ln w="12700">
-            <a:solidFill>
-              <a:srgbClr val="FFFFFF">
-                <a:alpha val="14000"/>
-              </a:srgbClr>
-            </a:solidFill>
-            <a:prstDash val="solid"/>
-          </a:ln>
-        </p:spPr>
-      </p:sp>
-      <p:sp>
-        <p:nvSpPr>
-          <p:cNvPr id="11" name="Shape 8"/>
-          <p:cNvSpPr/>
-          <p:nvPr/>
-        </p:nvSpPr>
-        <p:spPr>
-          <a:xfrm>
-            <a:off x="4690872" y="2020824"/>
-            <a:ext cx="530352" cy="530352"/>
-          </a:xfrm>
-          <a:prstGeom prst="roundRect">
-            <a:avLst>
-              <a:gd name="adj" fmla="val 17241"/>
-            </a:avLst>
-          </a:prstGeom>
-          <a:solidFill>
-            <a:srgbClr val="FFFFFF">
-              <a:alpha val="10000"/>
-            </a:srgbClr>
-          </a:solidFill>
-          <a:ln/>
-        </p:spPr>
-      </p:sp>
-      <p:pic>
-        <p:nvPicPr>
-          <p:cNvPr id="12" name="Image 1" descr="preencoded.png">    </p:cNvPr>
-          <p:cNvPicPr>
-            <a:picLocks noChangeAspect="1"/>
-          </p:cNvPicPr>
-          <p:nvPr/>
-        </p:nvPicPr>
-        <p:blipFill>
-          <a:blip r:embed="rId2"/>
-          <a:stretch>
-            <a:fillRect/>
-          </a:stretch>
-        </p:blipFill>
-        <p:spPr>
-          <a:xfrm>
-            <a:off x="4818888" y="2148840"/>
-            <a:ext cx="274320" cy="274320"/>
-          </a:xfrm>
-          <a:prstGeom prst="rect">
-            <a:avLst/>
-          </a:prstGeom>
-        </p:spPr>
-      </p:pic>
-      <p:sp>
-        <p:nvSpPr>
-          <p:cNvPr id="13" name="Text 9"/>
-          <p:cNvSpPr/>
-          <p:nvPr/>
-        </p:nvSpPr>
-        <p:spPr>
-          <a:xfrm>
-            <a:off x="4690872" y="2651760"/>
-            <a:ext cx="2871216" cy="530352"/>
-          </a:xfrm>
-          <a:prstGeom prst="rect">
-            <a:avLst/>
-          </a:prstGeom>
-          <a:noFill/>
-          <a:ln/>
-        </p:spPr>
-        <p:txBody>
-          <a:bodyPr wrap="square" lIns="0" tIns="0" rIns="0" bIns="0" rtlCol="0" anchor="t"/>
-          <a:lstStyle/>
-          <a:p>
-            <a:pPr indent="0" marL="0">
-              <a:lnSpc>
-                <a:spcPct val="98000"/>
-              </a:lnSpc>
-              <a:buNone/>
-            </a:pPr>
-            <a:r>
-              <a:rPr lang="en-US" sz="1600" b="1" dirty="0">
-                <a:solidFill>
-                  <a:srgbClr val="FFFFFF"/>
-                </a:solidFill>
-                <a:latin typeface="Space Grotesk" pitchFamily="34" charset="0"/>
-                <a:ea typeface="Space Grotesk" pitchFamily="34" charset="-122"/>
-                <a:cs typeface="Space Grotesk" pitchFamily="34" charset="-120"/>
-              </a:rPr>
-              <a:t>Context-aware classification</a:t>
-            </a:r>
-            <a:endParaRPr lang="en-US" sz="1600" dirty="0"/>
-          </a:p>
-        </p:txBody>
-      </p:sp>
-      <p:sp>
-        <p:nvSpPr>
-          <p:cNvPr id="14" name="Text 10"/>
-          <p:cNvSpPr/>
-          <p:nvPr/>
-        </p:nvSpPr>
-        <p:spPr>
-          <a:xfrm>
-            <a:off x="4690872" y="3227832"/>
-            <a:ext cx="2871216" cy="530352"/>
-          </a:xfrm>
-          <a:prstGeom prst="rect">
-            <a:avLst/>
-          </a:prstGeom>
-          <a:noFill/>
-          <a:ln/>
-        </p:spPr>
-        <p:txBody>
-          <a:bodyPr wrap="square" lIns="0" tIns="0" rIns="0" bIns="0" rtlCol="0" anchor="t"/>
-          <a:lstStyle/>
-          <a:p>
-            <a:pPr indent="0" marL="0">
-              <a:lnSpc>
-                <a:spcPct val="125000"/>
-              </a:lnSpc>
-              <a:buNone/>
-            </a:pPr>
-            <a:r>
-              <a:rPr lang="en-US" sz="1100" dirty="0">
-                <a:solidFill>
-                  <a:srgbClr val="9DB0C9"/>
-                </a:solidFill>
-                <a:latin typeface="Inter" pitchFamily="34" charset="0"/>
-                <a:ea typeface="Inter" pitchFamily="34" charset="-122"/>
-                <a:cs typeface="Inter" pitchFamily="34" charset="-120"/>
-              </a:rPr>
-              <a:t>The intelligence behind Privacy Twins reads data like a human. PII, PHI, financials, schemas — no regex to maintain.</a:t>
-            </a:r>
-            <a:endParaRPr lang="en-US" sz="1100" dirty="0"/>
-          </a:p>
-        </p:txBody>
-      </p:sp>
-      <p:sp>
-        <p:nvSpPr>
-          <p:cNvPr id="15" name="Shape 11"/>
-          <p:cNvSpPr/>
-          <p:nvPr/>
-        </p:nvSpPr>
-        <p:spPr>
-          <a:xfrm>
-            <a:off x="8092440" y="1783080"/>
-            <a:ext cx="3383280" cy="2103120"/>
-          </a:xfrm>
-          <a:prstGeom prst="roundRect">
-            <a:avLst>
-              <a:gd name="adj" fmla="val 6087"/>
-            </a:avLst>
-          </a:prstGeom>
-          <a:solidFill>
-            <a:srgbClr val="0A2C5E"/>
-          </a:solidFill>
-          <a:ln w="12700">
-            <a:solidFill>
-              <a:srgbClr val="FFFFFF">
-                <a:alpha val="14000"/>
-              </a:srgbClr>
-            </a:solidFill>
-            <a:prstDash val="solid"/>
-          </a:ln>
-        </p:spPr>
-      </p:sp>
-      <p:sp>
-        <p:nvSpPr>
-          <p:cNvPr id="16" name="Shape 12"/>
-          <p:cNvSpPr/>
-          <p:nvPr/>
-        </p:nvSpPr>
-        <p:spPr>
-          <a:xfrm>
-            <a:off x="8348472" y="2020824"/>
-            <a:ext cx="530352" cy="530352"/>
-          </a:xfrm>
-          <a:prstGeom prst="roundRect">
-            <a:avLst>
-              <a:gd name="adj" fmla="val 17241"/>
-            </a:avLst>
-          </a:prstGeom>
-          <a:solidFill>
-            <a:srgbClr val="FFFFFF">
-              <a:alpha val="10000"/>
-            </a:srgbClr>
-          </a:solidFill>
-          <a:ln/>
-        </p:spPr>
-      </p:sp>
-      <p:pic>
-        <p:nvPicPr>
-          <p:cNvPr id="17" name="Image 2" descr="preencoded.png">    </p:cNvPr>
+          <p:cNvPr id="7" name="Image 0" descr="preencoded.png"/>
           <p:cNvPicPr>
             <a:picLocks noChangeAspect="1"/>
           </p:cNvPicPr>
@@ -7849,7 +6612,7 @@
         </p:blipFill>
         <p:spPr>
           <a:xfrm>
-            <a:off x="8476488" y="2148840"/>
+            <a:off x="1161288" y="2148840"/>
             <a:ext cx="274320" cy="274320"/>
           </a:xfrm>
           <a:prstGeom prst="rect">
@@ -7859,13 +6622,13 @@
       </p:pic>
       <p:sp>
         <p:nvSpPr>
-          <p:cNvPr id="18" name="Text 13"/>
-          <p:cNvSpPr/>
-          <p:nvPr/>
-        </p:nvSpPr>
-        <p:spPr>
-          <a:xfrm>
-            <a:off x="8348472" y="2651760"/>
+          <p:cNvPr id="8" name="Text 5"/>
+          <p:cNvSpPr/>
+          <p:nvPr/>
+        </p:nvSpPr>
+        <p:spPr>
+          <a:xfrm>
+            <a:off x="1033272" y="2651760"/>
             <a:ext cx="2871216" cy="530352"/>
           </a:xfrm>
           <a:prstGeom prst="rect">
@@ -7878,7 +6641,7 @@
           <a:bodyPr wrap="square" lIns="0" tIns="0" rIns="0" bIns="0" rtlCol="0" anchor="t"/>
           <a:lstStyle/>
           <a:p>
-            <a:pPr indent="0" marL="0">
+            <a:pPr marL="0" indent="0">
               <a:lnSpc>
                 <a:spcPct val="98000"/>
               </a:lnSpc>
@@ -7893,7 +6656,7 @@
                 <a:ea typeface="Space Grotesk" pitchFamily="34" charset="-122"/>
                 <a:cs typeface="Space Grotesk" pitchFamily="34" charset="-120"/>
               </a:rPr>
-              <a:t>Risk that's actually risk</a:t>
+              <a:t>Agentless discovery</a:t>
             </a:r>
             <a:endParaRPr lang="en-US" sz="1600" dirty="0"/>
           </a:p>
@@ -7901,13 +6664,13 @@
       </p:sp>
       <p:sp>
         <p:nvSpPr>
-          <p:cNvPr id="19" name="Text 14"/>
-          <p:cNvSpPr/>
-          <p:nvPr/>
-        </p:nvSpPr>
-        <p:spPr>
-          <a:xfrm>
-            <a:off x="8348472" y="3227832"/>
+          <p:cNvPr id="9" name="Text 6"/>
+          <p:cNvSpPr/>
+          <p:nvPr/>
+        </p:nvSpPr>
+        <p:spPr>
+          <a:xfrm>
+            <a:off x="1033272" y="3227832"/>
             <a:ext cx="2871216" cy="530352"/>
           </a:xfrm>
           <a:prstGeom prst="rect">
@@ -7920,7 +6683,7 @@
           <a:bodyPr wrap="square" lIns="0" tIns="0" rIns="0" bIns="0" rtlCol="0" anchor="t"/>
           <a:lstStyle/>
           <a:p>
-            <a:pPr indent="0" marL="0">
+            <a:pPr marL="0" indent="0">
               <a:lnSpc>
                 <a:spcPct val="125000"/>
               </a:lnSpc>
@@ -7935,7 +6698,7 @@
                 <a:ea typeface="Inter" pitchFamily="34" charset="-122"/>
                 <a:cs typeface="Inter" pitchFamily="34" charset="-120"/>
               </a:rPr>
-              <a:t>Sensitivity tied to access, exposure and business purpose. An SSN in a public bucket is critical; a dev fixture is not.</a:t>
+              <a:t>Connect a store and it's in the scan queue. SQL, Mongo, Supabase, Drive, object storage — read in place, no agents.</a:t>
             </a:r>
             <a:endParaRPr lang="en-US" sz="1100" dirty="0"/>
           </a:p>
@@ -7943,42 +6706,13 @@
       </p:sp>
       <p:sp>
         <p:nvSpPr>
-          <p:cNvPr id="20" name="Shape 15"/>
-          <p:cNvSpPr/>
-          <p:nvPr/>
-        </p:nvSpPr>
-        <p:spPr>
-          <a:xfrm>
-            <a:off x="777240" y="4105656"/>
-            <a:ext cx="3383280" cy="2103120"/>
-          </a:xfrm>
-          <a:prstGeom prst="roundRect">
-            <a:avLst>
-              <a:gd name="adj" fmla="val 6087"/>
-            </a:avLst>
-          </a:prstGeom>
-          <a:solidFill>
-            <a:srgbClr val="0A2C5E"/>
-          </a:solidFill>
-          <a:ln w="12700">
-            <a:solidFill>
-              <a:srgbClr val="FFFFFF">
-                <a:alpha val="14000"/>
-              </a:srgbClr>
-            </a:solidFill>
-            <a:prstDash val="solid"/>
-          </a:ln>
-        </p:spPr>
-      </p:sp>
-      <p:sp>
-        <p:nvSpPr>
-          <p:cNvPr id="21" name="Shape 16"/>
-          <p:cNvSpPr/>
-          <p:nvPr/>
-        </p:nvSpPr>
-        <p:spPr>
-          <a:xfrm>
-            <a:off x="1033272" y="4343400"/>
+          <p:cNvPr id="11" name="Shape 8"/>
+          <p:cNvSpPr/>
+          <p:nvPr/>
+        </p:nvSpPr>
+        <p:spPr>
+          <a:xfrm>
+            <a:off x="4690872" y="2020824"/>
             <a:ext cx="530352" cy="530352"/>
           </a:xfrm>
           <a:prstGeom prst="roundRect">
@@ -7993,10 +6727,17 @@
           </a:solidFill>
           <a:ln/>
         </p:spPr>
+        <p:txBody>
+          <a:bodyPr/>
+          <a:lstStyle/>
+          <a:p>
+            <a:endParaRPr lang="en-US"/>
+          </a:p>
+        </p:txBody>
       </p:sp>
       <p:pic>
         <p:nvPicPr>
-          <p:cNvPr id="22" name="Image 3" descr="preencoded.png">    </p:cNvPr>
+          <p:cNvPr id="12" name="Image 1" descr="preencoded.png"/>
           <p:cNvPicPr>
             <a:picLocks noChangeAspect="1"/>
           </p:cNvPicPr>
@@ -8010,7 +6751,7 @@
         </p:blipFill>
         <p:spPr>
           <a:xfrm>
-            <a:off x="1161288" y="4471416"/>
+            <a:off x="4818888" y="2148840"/>
             <a:ext cx="274320" cy="274320"/>
           </a:xfrm>
           <a:prstGeom prst="rect">
@@ -8020,13 +6761,13 @@
       </p:pic>
       <p:sp>
         <p:nvSpPr>
-          <p:cNvPr id="23" name="Text 17"/>
-          <p:cNvSpPr/>
-          <p:nvPr/>
-        </p:nvSpPr>
-        <p:spPr>
-          <a:xfrm>
-            <a:off x="1033272" y="4974336"/>
+          <p:cNvPr id="13" name="Text 9"/>
+          <p:cNvSpPr/>
+          <p:nvPr/>
+        </p:nvSpPr>
+        <p:spPr>
+          <a:xfrm>
+            <a:off x="4690872" y="2651760"/>
             <a:ext cx="2871216" cy="530352"/>
           </a:xfrm>
           <a:prstGeom prst="rect">
@@ -8039,7 +6780,7 @@
           <a:bodyPr wrap="square" lIns="0" tIns="0" rIns="0" bIns="0" rtlCol="0" anchor="t"/>
           <a:lstStyle/>
           <a:p>
-            <a:pPr indent="0" marL="0">
+            <a:pPr marL="0" indent="0">
               <a:lnSpc>
                 <a:spcPct val="98000"/>
               </a:lnSpc>
@@ -8054,7 +6795,7 @@
                 <a:ea typeface="Space Grotesk" pitchFamily="34" charset="-122"/>
                 <a:cs typeface="Space Grotesk" pitchFamily="34" charset="-120"/>
               </a:rPr>
-              <a:t>One-click remediation</a:t>
+              <a:t>Context-aware classification</a:t>
             </a:r>
             <a:endParaRPr lang="en-US" sz="1600" dirty="0"/>
           </a:p>
@@ -8062,13 +6803,13 @@
       </p:sp>
       <p:sp>
         <p:nvSpPr>
-          <p:cNvPr id="24" name="Text 18"/>
-          <p:cNvSpPr/>
-          <p:nvPr/>
-        </p:nvSpPr>
-        <p:spPr>
-          <a:xfrm>
-            <a:off x="1033272" y="5550408"/>
+          <p:cNvPr id="14" name="Text 10"/>
+          <p:cNvSpPr/>
+          <p:nvPr/>
+        </p:nvSpPr>
+        <p:spPr>
+          <a:xfrm>
+            <a:off x="4690872" y="3227832"/>
             <a:ext cx="2871216" cy="530352"/>
           </a:xfrm>
           <a:prstGeom prst="rect">
@@ -8081,7 +6822,7 @@
           <a:bodyPr wrap="square" lIns="0" tIns="0" rIns="0" bIns="0" rtlCol="0" anchor="t"/>
           <a:lstStyle/>
           <a:p>
-            <a:pPr indent="0" marL="0">
+            <a:pPr marL="0" indent="0">
               <a:lnSpc>
                 <a:spcPct val="125000"/>
               </a:lnSpc>
@@ -8096,7 +6837,7 @@
                 <a:ea typeface="Inter" pitchFamily="34" charset="-122"/>
                 <a:cs typeface="Inter" pitchFamily="34" charset="-120"/>
               </a:rPr>
-              <a:t>Revoke access, mask columns, trigger a workflow, or route findings to the owner with full context. Cloud closes the loop.</a:t>
+              <a:t>The intelligence behind Privacy Twins reads data like a human. PII, PHI, financials, schemas — no regex to maintain.</a:t>
             </a:r>
             <a:endParaRPr lang="en-US" sz="1100" dirty="0"/>
           </a:p>
@@ -8104,42 +6845,13 @@
       </p:sp>
       <p:sp>
         <p:nvSpPr>
-          <p:cNvPr id="25" name="Shape 19"/>
-          <p:cNvSpPr/>
-          <p:nvPr/>
-        </p:nvSpPr>
-        <p:spPr>
-          <a:xfrm>
-            <a:off x="4434840" y="4105656"/>
-            <a:ext cx="3383280" cy="2103120"/>
-          </a:xfrm>
-          <a:prstGeom prst="roundRect">
-            <a:avLst>
-              <a:gd name="adj" fmla="val 6087"/>
-            </a:avLst>
-          </a:prstGeom>
-          <a:solidFill>
-            <a:srgbClr val="0A2C5E"/>
-          </a:solidFill>
-          <a:ln w="12700">
-            <a:solidFill>
-              <a:srgbClr val="FFFFFF">
-                <a:alpha val="14000"/>
-              </a:srgbClr>
-            </a:solidFill>
-            <a:prstDash val="solid"/>
-          </a:ln>
-        </p:spPr>
-      </p:sp>
-      <p:sp>
-        <p:nvSpPr>
-          <p:cNvPr id="26" name="Shape 20"/>
-          <p:cNvSpPr/>
-          <p:nvPr/>
-        </p:nvSpPr>
-        <p:spPr>
-          <a:xfrm>
-            <a:off x="4690872" y="4343400"/>
+          <p:cNvPr id="16" name="Shape 12"/>
+          <p:cNvSpPr/>
+          <p:nvPr/>
+        </p:nvSpPr>
+        <p:spPr>
+          <a:xfrm>
+            <a:off x="8348472" y="2020824"/>
             <a:ext cx="530352" cy="530352"/>
           </a:xfrm>
           <a:prstGeom prst="roundRect">
@@ -8154,10 +6866,17 @@
           </a:solidFill>
           <a:ln/>
         </p:spPr>
+        <p:txBody>
+          <a:bodyPr/>
+          <a:lstStyle/>
+          <a:p>
+            <a:endParaRPr lang="en-US"/>
+          </a:p>
+        </p:txBody>
       </p:sp>
       <p:pic>
         <p:nvPicPr>
-          <p:cNvPr id="27" name="Image 4" descr="preencoded.png">    </p:cNvPr>
+          <p:cNvPr id="17" name="Image 2" descr="preencoded.png"/>
           <p:cNvPicPr>
             <a:picLocks noChangeAspect="1"/>
           </p:cNvPicPr>
@@ -8171,7 +6890,7 @@
         </p:blipFill>
         <p:spPr>
           <a:xfrm>
-            <a:off x="4818888" y="4471416"/>
+            <a:off x="8476488" y="2148840"/>
             <a:ext cx="274320" cy="274320"/>
           </a:xfrm>
           <a:prstGeom prst="rect">
@@ -8181,13 +6900,13 @@
       </p:pic>
       <p:sp>
         <p:nvSpPr>
-          <p:cNvPr id="28" name="Text 21"/>
-          <p:cNvSpPr/>
-          <p:nvPr/>
-        </p:nvSpPr>
-        <p:spPr>
-          <a:xfrm>
-            <a:off x="4690872" y="4974336"/>
+          <p:cNvPr id="18" name="Text 13"/>
+          <p:cNvSpPr/>
+          <p:nvPr/>
+        </p:nvSpPr>
+        <p:spPr>
+          <a:xfrm>
+            <a:off x="8348472" y="2651760"/>
             <a:ext cx="2871216" cy="530352"/>
           </a:xfrm>
           <a:prstGeom prst="rect">
@@ -8200,7 +6919,7 @@
           <a:bodyPr wrap="square" lIns="0" tIns="0" rIns="0" bIns="0" rtlCol="0" anchor="t"/>
           <a:lstStyle/>
           <a:p>
-            <a:pPr indent="0" marL="0">
+            <a:pPr marL="0" indent="0">
               <a:lnSpc>
                 <a:spcPct val="98000"/>
               </a:lnSpc>
@@ -8215,7 +6934,7 @@
                 <a:ea typeface="Space Grotesk" pitchFamily="34" charset="-122"/>
                 <a:cs typeface="Space Grotesk" pitchFamily="34" charset="-120"/>
               </a:rPr>
-              <a:t>RAG, vector &amp; agent memory</a:t>
+              <a:t>Risk that's actually risk</a:t>
             </a:r>
             <a:endParaRPr lang="en-US" sz="1600" dirty="0"/>
           </a:p>
@@ -8223,13 +6942,13 @@
       </p:sp>
       <p:sp>
         <p:nvSpPr>
-          <p:cNvPr id="29" name="Text 22"/>
-          <p:cNvSpPr/>
-          <p:nvPr/>
-        </p:nvSpPr>
-        <p:spPr>
-          <a:xfrm>
-            <a:off x="4690872" y="5550408"/>
+          <p:cNvPr id="19" name="Text 14"/>
+          <p:cNvSpPr/>
+          <p:nvPr/>
+        </p:nvSpPr>
+        <p:spPr>
+          <a:xfrm>
+            <a:off x="8348472" y="3227832"/>
             <a:ext cx="2871216" cy="530352"/>
           </a:xfrm>
           <a:prstGeom prst="rect">
@@ -8242,7 +6961,7 @@
           <a:bodyPr wrap="square" lIns="0" tIns="0" rIns="0" bIns="0" rtlCol="0" anchor="t"/>
           <a:lstStyle/>
           <a:p>
-            <a:pPr indent="0" marL="0">
+            <a:pPr marL="0" indent="0">
               <a:lnSpc>
                 <a:spcPct val="125000"/>
               </a:lnSpc>
@@ -8257,7 +6976,7 @@
                 <a:ea typeface="Inter" pitchFamily="34" charset="-122"/>
                 <a:cs typeface="Inter" pitchFamily="34" charset="-120"/>
               </a:rPr>
-              <a:t>Scan the AI data layer the way you scan the database layer — where models read from, and where data quietly leaks in.</a:t>
+              <a:t>Sensitivity tied to access, exposure and business purpose. An SSN in a public bucket is critical; a dev fixture is not.</a:t>
             </a:r>
             <a:endParaRPr lang="en-US" sz="1100" dirty="0"/>
           </a:p>
@@ -8265,42 +6984,13 @@
       </p:sp>
       <p:sp>
         <p:nvSpPr>
-          <p:cNvPr id="30" name="Shape 23"/>
-          <p:cNvSpPr/>
-          <p:nvPr/>
-        </p:nvSpPr>
-        <p:spPr>
-          <a:xfrm>
-            <a:off x="8092440" y="4105656"/>
-            <a:ext cx="3383280" cy="2103120"/>
-          </a:xfrm>
-          <a:prstGeom prst="roundRect">
-            <a:avLst>
-              <a:gd name="adj" fmla="val 6087"/>
-            </a:avLst>
-          </a:prstGeom>
-          <a:solidFill>
-            <a:srgbClr val="0A2C5E"/>
-          </a:solidFill>
-          <a:ln w="12700">
-            <a:solidFill>
-              <a:srgbClr val="FFFFFF">
-                <a:alpha val="14000"/>
-              </a:srgbClr>
-            </a:solidFill>
-            <a:prstDash val="solid"/>
-          </a:ln>
-        </p:spPr>
-      </p:sp>
-      <p:sp>
-        <p:nvSpPr>
-          <p:cNvPr id="31" name="Shape 24"/>
-          <p:cNvSpPr/>
-          <p:nvPr/>
-        </p:nvSpPr>
-        <p:spPr>
-          <a:xfrm>
-            <a:off x="8348472" y="4343400"/>
+          <p:cNvPr id="21" name="Shape 16"/>
+          <p:cNvSpPr/>
+          <p:nvPr/>
+        </p:nvSpPr>
+        <p:spPr>
+          <a:xfrm>
+            <a:off x="1033272" y="4343400"/>
             <a:ext cx="530352" cy="530352"/>
           </a:xfrm>
           <a:prstGeom prst="roundRect">
@@ -8315,10 +7005,17 @@
           </a:solidFill>
           <a:ln/>
         </p:spPr>
+        <p:txBody>
+          <a:bodyPr/>
+          <a:lstStyle/>
+          <a:p>
+            <a:endParaRPr lang="en-US"/>
+          </a:p>
+        </p:txBody>
       </p:sp>
       <p:pic>
         <p:nvPicPr>
-          <p:cNvPr id="32" name="Image 5" descr="preencoded.png">    </p:cNvPr>
+          <p:cNvPr id="22" name="Image 3" descr="preencoded.png"/>
           <p:cNvPicPr>
             <a:picLocks noChangeAspect="1"/>
           </p:cNvPicPr>
@@ -8332,7 +7029,7 @@
         </p:blipFill>
         <p:spPr>
           <a:xfrm>
-            <a:off x="8476488" y="4471416"/>
+            <a:off x="1161288" y="4471416"/>
             <a:ext cx="274320" cy="274320"/>
           </a:xfrm>
           <a:prstGeom prst="rect">
@@ -8342,13 +7039,13 @@
       </p:pic>
       <p:sp>
         <p:nvSpPr>
-          <p:cNvPr id="33" name="Text 25"/>
-          <p:cNvSpPr/>
-          <p:nvPr/>
-        </p:nvSpPr>
-        <p:spPr>
-          <a:xfrm>
-            <a:off x="8348472" y="4974336"/>
+          <p:cNvPr id="23" name="Text 17"/>
+          <p:cNvSpPr/>
+          <p:nvPr/>
+        </p:nvSpPr>
+        <p:spPr>
+          <a:xfrm>
+            <a:off x="1033272" y="4974336"/>
             <a:ext cx="2871216" cy="530352"/>
           </a:xfrm>
           <a:prstGeom prst="rect">
@@ -8361,7 +7058,7 @@
           <a:bodyPr wrap="square" lIns="0" tIns="0" rIns="0" bIns="0" rtlCol="0" anchor="t"/>
           <a:lstStyle/>
           <a:p>
-            <a:pPr indent="0" marL="0">
+            <a:pPr marL="0" indent="0">
               <a:lnSpc>
                 <a:spcPct val="98000"/>
               </a:lnSpc>
@@ -8376,7 +7073,7 @@
                 <a:ea typeface="Space Grotesk" pitchFamily="34" charset="-122"/>
                 <a:cs typeface="Space Grotesk" pitchFamily="34" charset="-120"/>
               </a:rPr>
-              <a:t>Sovereign by design</a:t>
+              <a:t>One-click remediation</a:t>
             </a:r>
             <a:endParaRPr lang="en-US" sz="1600" dirty="0"/>
           </a:p>
@@ -8384,13 +7081,13 @@
       </p:sp>
       <p:sp>
         <p:nvSpPr>
-          <p:cNvPr id="34" name="Text 26"/>
-          <p:cNvSpPr/>
-          <p:nvPr/>
-        </p:nvSpPr>
-        <p:spPr>
-          <a:xfrm>
-            <a:off x="8348472" y="5550408"/>
+          <p:cNvPr id="24" name="Text 18"/>
+          <p:cNvSpPr/>
+          <p:nvPr/>
+        </p:nvSpPr>
+        <p:spPr>
+          <a:xfrm>
+            <a:off x="1033272" y="5550408"/>
             <a:ext cx="2871216" cy="530352"/>
           </a:xfrm>
           <a:prstGeom prst="rect">
@@ -8403,7 +7100,7 @@
           <a:bodyPr wrap="square" lIns="0" tIns="0" rIns="0" bIns="0" rtlCol="0" anchor="t"/>
           <a:lstStyle/>
           <a:p>
-            <a:pPr indent="0" marL="0">
+            <a:pPr marL="0" indent="0">
               <a:lnSpc>
                 <a:spcPct val="125000"/>
               </a:lnSpc>
@@ -8418,15 +7115,46 @@
                 <a:ea typeface="Inter" pitchFamily="34" charset="-122"/>
                 <a:cs typeface="Inter" pitchFamily="34" charset="-120"/>
               </a:rPr>
-              <a:t>Scans run inside your network against the same gateway. Findings, classifications and remediation never leave your tenancy.</a:t>
+              <a:t>Privacy Twin protect columns, trigger a workflow, or route findings to the owner with full context.</a:t>
             </a:r>
             <a:endParaRPr lang="en-US" sz="1100" dirty="0"/>
+          </a:p>
+        </p:txBody>
+      </p:sp>
+      <p:sp>
+        <p:nvSpPr>
+          <p:cNvPr id="26" name="Shape 20"/>
+          <p:cNvSpPr/>
+          <p:nvPr/>
+        </p:nvSpPr>
+        <p:spPr>
+          <a:xfrm>
+            <a:off x="4690872" y="4343400"/>
+            <a:ext cx="530352" cy="530352"/>
+          </a:xfrm>
+          <a:prstGeom prst="roundRect">
+            <a:avLst>
+              <a:gd name="adj" fmla="val 17241"/>
+            </a:avLst>
+          </a:prstGeom>
+          <a:solidFill>
+            <a:srgbClr val="FFFFFF">
+              <a:alpha val="10000"/>
+            </a:srgbClr>
+          </a:solidFill>
+          <a:ln/>
+        </p:spPr>
+        <p:txBody>
+          <a:bodyPr/>
+          <a:lstStyle/>
+          <a:p>
+            <a:endParaRPr lang="en-US"/>
           </a:p>
         </p:txBody>
       </p:sp>
       <p:pic>
         <p:nvPicPr>
-          <p:cNvPr id="35" name="Image 6" descr="assets/pp-logo-light.png">    </p:cNvPr>
+          <p:cNvPr id="27" name="Image 4" descr="preencoded.png"/>
           <p:cNvPicPr>
             <a:picLocks noChangeAspect="1"/>
           </p:cNvPicPr>
@@ -8440,6 +7168,253 @@
         </p:blipFill>
         <p:spPr>
           <a:xfrm>
+            <a:off x="4818888" y="4471416"/>
+            <a:ext cx="274320" cy="274320"/>
+          </a:xfrm>
+          <a:prstGeom prst="rect">
+            <a:avLst/>
+          </a:prstGeom>
+        </p:spPr>
+      </p:pic>
+      <p:sp>
+        <p:nvSpPr>
+          <p:cNvPr id="28" name="Text 21"/>
+          <p:cNvSpPr/>
+          <p:nvPr/>
+        </p:nvSpPr>
+        <p:spPr>
+          <a:xfrm>
+            <a:off x="4690872" y="4974336"/>
+            <a:ext cx="2871216" cy="530352"/>
+          </a:xfrm>
+          <a:prstGeom prst="rect">
+            <a:avLst/>
+          </a:prstGeom>
+          <a:noFill/>
+          <a:ln/>
+        </p:spPr>
+        <p:txBody>
+          <a:bodyPr wrap="square" lIns="0" tIns="0" rIns="0" bIns="0" rtlCol="0" anchor="t"/>
+          <a:lstStyle/>
+          <a:p>
+            <a:pPr marL="0" indent="0">
+              <a:lnSpc>
+                <a:spcPct val="98000"/>
+              </a:lnSpc>
+              <a:buNone/>
+            </a:pPr>
+            <a:r>
+              <a:rPr lang="en-US" sz="1600" b="1" dirty="0">
+                <a:solidFill>
+                  <a:srgbClr val="FFFFFF"/>
+                </a:solidFill>
+                <a:latin typeface="Space Grotesk" pitchFamily="34" charset="0"/>
+                <a:ea typeface="Space Grotesk" pitchFamily="34" charset="-122"/>
+                <a:cs typeface="Space Grotesk" pitchFamily="34" charset="-120"/>
+              </a:rPr>
+              <a:t>RAG, vector &amp; agent memory</a:t>
+            </a:r>
+            <a:endParaRPr lang="en-US" sz="1600" dirty="0"/>
+          </a:p>
+        </p:txBody>
+      </p:sp>
+      <p:sp>
+        <p:nvSpPr>
+          <p:cNvPr id="29" name="Text 22"/>
+          <p:cNvSpPr/>
+          <p:nvPr/>
+        </p:nvSpPr>
+        <p:spPr>
+          <a:xfrm>
+            <a:off x="4690872" y="5550408"/>
+            <a:ext cx="2871216" cy="530352"/>
+          </a:xfrm>
+          <a:prstGeom prst="rect">
+            <a:avLst/>
+          </a:prstGeom>
+          <a:noFill/>
+          <a:ln/>
+        </p:spPr>
+        <p:txBody>
+          <a:bodyPr wrap="square" lIns="0" tIns="0" rIns="0" bIns="0" rtlCol="0" anchor="t"/>
+          <a:lstStyle/>
+          <a:p>
+            <a:pPr marL="0" indent="0">
+              <a:lnSpc>
+                <a:spcPct val="125000"/>
+              </a:lnSpc>
+              <a:buNone/>
+            </a:pPr>
+            <a:r>
+              <a:rPr lang="en-US" sz="1100" dirty="0">
+                <a:solidFill>
+                  <a:srgbClr val="9DB0C9"/>
+                </a:solidFill>
+                <a:latin typeface="Inter" pitchFamily="34" charset="0"/>
+                <a:ea typeface="Inter" pitchFamily="34" charset="-122"/>
+                <a:cs typeface="Inter" pitchFamily="34" charset="-120"/>
+              </a:rPr>
+              <a:t>Scan the AI data layer the way you scan the database layer — where models read from, and where data quietly leaks in.</a:t>
+            </a:r>
+            <a:endParaRPr lang="en-US" sz="1100" dirty="0"/>
+          </a:p>
+        </p:txBody>
+      </p:sp>
+      <p:sp>
+        <p:nvSpPr>
+          <p:cNvPr id="31" name="Shape 24"/>
+          <p:cNvSpPr/>
+          <p:nvPr/>
+        </p:nvSpPr>
+        <p:spPr>
+          <a:xfrm>
+            <a:off x="8348472" y="4343400"/>
+            <a:ext cx="530352" cy="530352"/>
+          </a:xfrm>
+          <a:prstGeom prst="roundRect">
+            <a:avLst>
+              <a:gd name="adj" fmla="val 17241"/>
+            </a:avLst>
+          </a:prstGeom>
+          <a:solidFill>
+            <a:srgbClr val="FFFFFF">
+              <a:alpha val="10000"/>
+            </a:srgbClr>
+          </a:solidFill>
+          <a:ln/>
+        </p:spPr>
+        <p:txBody>
+          <a:bodyPr/>
+          <a:lstStyle/>
+          <a:p>
+            <a:endParaRPr lang="en-US"/>
+          </a:p>
+        </p:txBody>
+      </p:sp>
+      <p:pic>
+        <p:nvPicPr>
+          <p:cNvPr id="32" name="Image 5" descr="preencoded.png"/>
+          <p:cNvPicPr>
+            <a:picLocks noChangeAspect="1"/>
+          </p:cNvPicPr>
+          <p:nvPr/>
+        </p:nvPicPr>
+        <p:blipFill>
+          <a:blip r:embed="rId8"/>
+          <a:stretch>
+            <a:fillRect/>
+          </a:stretch>
+        </p:blipFill>
+        <p:spPr>
+          <a:xfrm>
+            <a:off x="8476488" y="4471416"/>
+            <a:ext cx="274320" cy="274320"/>
+          </a:xfrm>
+          <a:prstGeom prst="rect">
+            <a:avLst/>
+          </a:prstGeom>
+        </p:spPr>
+      </p:pic>
+      <p:sp>
+        <p:nvSpPr>
+          <p:cNvPr id="33" name="Text 25"/>
+          <p:cNvSpPr/>
+          <p:nvPr/>
+        </p:nvSpPr>
+        <p:spPr>
+          <a:xfrm>
+            <a:off x="8348472" y="4974336"/>
+            <a:ext cx="2871216" cy="530352"/>
+          </a:xfrm>
+          <a:prstGeom prst="rect">
+            <a:avLst/>
+          </a:prstGeom>
+          <a:noFill/>
+          <a:ln/>
+        </p:spPr>
+        <p:txBody>
+          <a:bodyPr wrap="square" lIns="0" tIns="0" rIns="0" bIns="0" rtlCol="0" anchor="t"/>
+          <a:lstStyle/>
+          <a:p>
+            <a:pPr marL="0" indent="0">
+              <a:lnSpc>
+                <a:spcPct val="98000"/>
+              </a:lnSpc>
+              <a:buNone/>
+            </a:pPr>
+            <a:r>
+              <a:rPr lang="en-US" sz="1600" b="1" dirty="0">
+                <a:solidFill>
+                  <a:srgbClr val="FFFFFF"/>
+                </a:solidFill>
+                <a:latin typeface="Space Grotesk" pitchFamily="34" charset="0"/>
+                <a:ea typeface="Space Grotesk" pitchFamily="34" charset="-122"/>
+                <a:cs typeface="Space Grotesk" pitchFamily="34" charset="-120"/>
+              </a:rPr>
+              <a:t>Sovereign by design</a:t>
+            </a:r>
+            <a:endParaRPr lang="en-US" sz="1600" dirty="0"/>
+          </a:p>
+        </p:txBody>
+      </p:sp>
+      <p:sp>
+        <p:nvSpPr>
+          <p:cNvPr id="34" name="Text 26"/>
+          <p:cNvSpPr/>
+          <p:nvPr/>
+        </p:nvSpPr>
+        <p:spPr>
+          <a:xfrm>
+            <a:off x="8348472" y="5550408"/>
+            <a:ext cx="2871216" cy="530352"/>
+          </a:xfrm>
+          <a:prstGeom prst="rect">
+            <a:avLst/>
+          </a:prstGeom>
+          <a:noFill/>
+          <a:ln/>
+        </p:spPr>
+        <p:txBody>
+          <a:bodyPr wrap="square" lIns="0" tIns="0" rIns="0" bIns="0" rtlCol="0" anchor="t"/>
+          <a:lstStyle/>
+          <a:p>
+            <a:pPr marL="0" indent="0">
+              <a:lnSpc>
+                <a:spcPct val="125000"/>
+              </a:lnSpc>
+              <a:buNone/>
+            </a:pPr>
+            <a:r>
+              <a:rPr lang="en-US" sz="1100" dirty="0">
+                <a:solidFill>
+                  <a:srgbClr val="9DB0C9"/>
+                </a:solidFill>
+                <a:latin typeface="Inter" pitchFamily="34" charset="0"/>
+                <a:ea typeface="Inter" pitchFamily="34" charset="-122"/>
+                <a:cs typeface="Inter" pitchFamily="34" charset="-120"/>
+              </a:rPr>
+              <a:t>Scans run inside your network against the same gateway. Findings, classifications and remediation never leave your tenancy.</a:t>
+            </a:r>
+            <a:endParaRPr lang="en-US" sz="1100" dirty="0"/>
+          </a:p>
+        </p:txBody>
+      </p:sp>
+      <p:pic>
+        <p:nvPicPr>
+          <p:cNvPr id="35" name="Image 6" descr="assets/pp-logo-light.png"/>
+          <p:cNvPicPr>
+            <a:picLocks noChangeAspect="1"/>
+          </p:cNvPicPr>
+          <p:nvPr/>
+        </p:nvPicPr>
+        <p:blipFill>
+          <a:blip r:embed="rId9"/>
+          <a:stretch>
+            <a:fillRect/>
+          </a:stretch>
+        </p:blipFill>
+        <p:spPr>
+          <a:xfrm>
             <a:off x="777240" y="6419088"/>
             <a:ext cx="841248" cy="233026"/>
           </a:xfrm>
@@ -8469,11 +7444,11 @@
           <a:bodyPr wrap="square" lIns="0" tIns="0" rIns="0" bIns="0" rtlCol="0" anchor="ctr"/>
           <a:lstStyle/>
           <a:p>
-            <a:pPr algn="r" indent="0" marL="0">
-              <a:buNone/>
-            </a:pPr>
-            <a:r>
-              <a:rPr lang="en-US" sz="1000" spc="200" kern="0" dirty="0">
+            <a:pPr marL="0" indent="0" algn="r">
+              <a:buNone/>
+            </a:pPr>
+            <a:r>
+              <a:rPr lang="en-US" sz="1000" kern="0" spc="200" dirty="0">
                 <a:solidFill>
                   <a:srgbClr val="9DB0C9"/>
                 </a:solidFill>
@@ -8503,6 +7478,7 @@
         <a:solidFill>
           <a:srgbClr val="01204E"/>
         </a:solidFill>
+        <a:effectLst/>
       </p:bgPr>
     </p:bg>
     <p:spTree>
@@ -8538,6 +7514,13 @@
           </a:solidFill>
           <a:ln/>
         </p:spPr>
+        <p:txBody>
+          <a:bodyPr/>
+          <a:lstStyle/>
+          <a:p>
+            <a:endParaRPr lang="en-US"/>
+          </a:p>
+        </p:txBody>
       </p:sp>
       <p:sp>
         <p:nvSpPr>
@@ -8560,11 +7543,11 @@
           <a:bodyPr wrap="square" lIns="0" tIns="0" rIns="0" bIns="0" rtlCol="0" anchor="ctr"/>
           <a:lstStyle/>
           <a:p>
-            <a:pPr algn="l" indent="0" marL="0">
-              <a:buNone/>
-            </a:pPr>
-            <a:r>
-              <a:rPr lang="en-US" sz="1250" b="1" spc="300" kern="0" dirty="0">
+            <a:pPr marL="0" indent="0" algn="l">
+              <a:buNone/>
+            </a:pPr>
+            <a:r>
+              <a:rPr lang="en-US" sz="1250" b="1" kern="0" spc="300" dirty="0">
                 <a:solidFill>
                   <a:srgbClr val="12A7B5"/>
                 </a:solidFill>
@@ -8599,7 +7582,7 @@
           <a:bodyPr wrap="square" lIns="0" tIns="0" rIns="0" bIns="0" rtlCol="0" anchor="ctr"/>
           <a:lstStyle/>
           <a:p>
-            <a:pPr indent="0" marL="0">
+            <a:pPr marL="0" indent="0">
               <a:buNone/>
             </a:pPr>
             <a:r>
@@ -8640,268 +7623,17 @@
           </a:solidFill>
           <a:ln/>
         </p:spPr>
+        <p:txBody>
+          <a:bodyPr/>
+          <a:lstStyle/>
+          <a:p>
+            <a:endParaRPr lang="en-US"/>
+          </a:p>
+        </p:txBody>
       </p:sp>
       <p:pic>
         <p:nvPicPr>
-          <p:cNvPr id="6" name="Image 0" descr="preencoded.png">    </p:cNvPr>
-          <p:cNvPicPr>
-            <a:picLocks noChangeAspect="1"/>
-          </p:cNvPicPr>
-          <p:nvPr/>
-        </p:nvPicPr>
-        <p:blipFill>
-          <a:blip r:embed="rId1"/>
-          <a:stretch>
-            <a:fillRect/>
-          </a:stretch>
-        </p:blipFill>
-        <p:spPr>
-          <a:xfrm>
-            <a:off x="914400" y="2240280"/>
-            <a:ext cx="274320" cy="274320"/>
-          </a:xfrm>
-          <a:prstGeom prst="rect">
-            <a:avLst/>
-          </a:prstGeom>
-        </p:spPr>
-      </p:pic>
-      <p:sp>
-        <p:nvSpPr>
-          <p:cNvPr id="7" name="Text 4"/>
-          <p:cNvSpPr/>
-          <p:nvPr/>
-        </p:nvSpPr>
-        <p:spPr>
-          <a:xfrm>
-            <a:off x="1554480" y="2066544"/>
-            <a:ext cx="5029200" cy="365760"/>
-          </a:xfrm>
-          <a:prstGeom prst="rect">
-            <a:avLst/>
-          </a:prstGeom>
-          <a:noFill/>
-          <a:ln/>
-        </p:spPr>
-        <p:txBody>
-          <a:bodyPr wrap="square" lIns="0" tIns="0" rIns="0" bIns="0" rtlCol="0" anchor="ctr"/>
-          <a:lstStyle/>
-          <a:p>
-            <a:pPr indent="0" marL="0">
-              <a:buNone/>
-            </a:pPr>
-            <a:r>
-              <a:rPr lang="en-US" sz="1800" b="1" dirty="0">
-                <a:solidFill>
-                  <a:srgbClr val="FFFFFF"/>
-                </a:solidFill>
-                <a:latin typeface="Space Grotesk" pitchFamily="34" charset="0"/>
-                <a:ea typeface="Space Grotesk" pitchFamily="34" charset="-122"/>
-                <a:cs typeface="Space Grotesk" pitchFamily="34" charset="-120"/>
-              </a:rPr>
-              <a:t>Tokenized, never exposed</a:t>
-            </a:r>
-            <a:endParaRPr lang="en-US" sz="1800" dirty="0"/>
-          </a:p>
-        </p:txBody>
-      </p:sp>
-      <p:sp>
-        <p:nvSpPr>
-          <p:cNvPr id="8" name="Text 5"/>
-          <p:cNvSpPr/>
-          <p:nvPr/>
-        </p:nvSpPr>
-        <p:spPr>
-          <a:xfrm>
-            <a:off x="1554480" y="2450592"/>
-            <a:ext cx="5120640" cy="731520"/>
-          </a:xfrm>
-          <a:prstGeom prst="rect">
-            <a:avLst/>
-          </a:prstGeom>
-          <a:noFill/>
-          <a:ln/>
-        </p:spPr>
-        <p:txBody>
-          <a:bodyPr wrap="square" lIns="0" tIns="0" rIns="0" bIns="0" rtlCol="0" anchor="ctr"/>
-          <a:lstStyle/>
-          <a:p>
-            <a:pPr indent="0" marL="0">
-              <a:lnSpc>
-                <a:spcPct val="130000"/>
-              </a:lnSpc>
-              <a:buNone/>
-            </a:pPr>
-            <a:r>
-              <a:rPr lang="en-US" sz="1250" dirty="0">
-                <a:solidFill>
-                  <a:srgbClr val="9DB0C9"/>
-                </a:solidFill>
-                <a:latin typeface="Inter" pitchFamily="34" charset="0"/>
-                <a:ea typeface="Inter" pitchFamily="34" charset="-122"/>
-                <a:cs typeface="Inter" pitchFamily="34" charset="-120"/>
-              </a:rPr>
-              <a:t>Sensitive values become Privacy Twins. Only cryptographic hashes and content IDs go on-chain — never the PII.</a:t>
-            </a:r>
-            <a:endParaRPr lang="en-US" sz="1250" dirty="0"/>
-          </a:p>
-        </p:txBody>
-      </p:sp>
-      <p:sp>
-        <p:nvSpPr>
-          <p:cNvPr id="9" name="Shape 6"/>
-          <p:cNvSpPr/>
-          <p:nvPr/>
-        </p:nvSpPr>
-        <p:spPr>
-          <a:xfrm>
-            <a:off x="777240" y="3291840"/>
-            <a:ext cx="548640" cy="548640"/>
-          </a:xfrm>
-          <a:prstGeom prst="roundRect">
-            <a:avLst>
-              <a:gd name="adj" fmla="val 16667"/>
-            </a:avLst>
-          </a:prstGeom>
-          <a:solidFill>
-            <a:srgbClr val="FFFFFF">
-              <a:alpha val="10000"/>
-            </a:srgbClr>
-          </a:solidFill>
-          <a:ln/>
-        </p:spPr>
-      </p:sp>
-      <p:pic>
-        <p:nvPicPr>
-          <p:cNvPr id="10" name="Image 1" descr="preencoded.png">    </p:cNvPr>
-          <p:cNvPicPr>
-            <a:picLocks noChangeAspect="1"/>
-          </p:cNvPicPr>
-          <p:nvPr/>
-        </p:nvPicPr>
-        <p:blipFill>
-          <a:blip r:embed="rId2"/>
-          <a:stretch>
-            <a:fillRect/>
-          </a:stretch>
-        </p:blipFill>
-        <p:spPr>
-          <a:xfrm>
-            <a:off x="914400" y="3429000"/>
-            <a:ext cx="274320" cy="274320"/>
-          </a:xfrm>
-          <a:prstGeom prst="rect">
-            <a:avLst/>
-          </a:prstGeom>
-        </p:spPr>
-      </p:pic>
-      <p:sp>
-        <p:nvSpPr>
-          <p:cNvPr id="11" name="Text 7"/>
-          <p:cNvSpPr/>
-          <p:nvPr/>
-        </p:nvSpPr>
-        <p:spPr>
-          <a:xfrm>
-            <a:off x="1554480" y="3255264"/>
-            <a:ext cx="5029200" cy="365760"/>
-          </a:xfrm>
-          <a:prstGeom prst="rect">
-            <a:avLst/>
-          </a:prstGeom>
-          <a:noFill/>
-          <a:ln/>
-        </p:spPr>
-        <p:txBody>
-          <a:bodyPr wrap="square" lIns="0" tIns="0" rIns="0" bIns="0" rtlCol="0" anchor="ctr"/>
-          <a:lstStyle/>
-          <a:p>
-            <a:pPr indent="0" marL="0">
-              <a:buNone/>
-            </a:pPr>
-            <a:r>
-              <a:rPr lang="en-US" sz="1800" b="1" dirty="0">
-                <a:solidFill>
-                  <a:srgbClr val="FFFFFF"/>
-                </a:solidFill>
-                <a:latin typeface="Space Grotesk" pitchFamily="34" charset="0"/>
-                <a:ea typeface="Space Grotesk" pitchFamily="34" charset="-122"/>
-                <a:cs typeface="Space Grotesk" pitchFamily="34" charset="-120"/>
-              </a:rPr>
-              <a:t>AI activity, audited on-chain</a:t>
-            </a:r>
-            <a:endParaRPr lang="en-US" sz="1800" dirty="0"/>
-          </a:p>
-        </p:txBody>
-      </p:sp>
-      <p:sp>
-        <p:nvSpPr>
-          <p:cNvPr id="12" name="Text 8"/>
-          <p:cNvSpPr/>
-          <p:nvPr/>
-        </p:nvSpPr>
-        <p:spPr>
-          <a:xfrm>
-            <a:off x="1554480" y="3639312"/>
-            <a:ext cx="5120640" cy="731520"/>
-          </a:xfrm>
-          <a:prstGeom prst="rect">
-            <a:avLst/>
-          </a:prstGeom>
-          <a:noFill/>
-          <a:ln/>
-        </p:spPr>
-        <p:txBody>
-          <a:bodyPr wrap="square" lIns="0" tIns="0" rIns="0" bIns="0" rtlCol="0" anchor="ctr"/>
-          <a:lstStyle/>
-          <a:p>
-            <a:pPr indent="0" marL="0">
-              <a:lnSpc>
-                <a:spcPct val="130000"/>
-              </a:lnSpc>
-              <a:buNone/>
-            </a:pPr>
-            <a:r>
-              <a:rPr lang="en-US" sz="1250" dirty="0">
-                <a:solidFill>
-                  <a:srgbClr val="9DB0C9"/>
-                </a:solidFill>
-                <a:latin typeface="Inter" pitchFamily="34" charset="0"/>
-                <a:ea typeface="Inter" pitchFamily="34" charset="-122"/>
-                <a:cs typeface="Inter" pitchFamily="34" charset="-120"/>
-              </a:rPr>
-              <a:t>Each session is one immutable peaq transaction — user, machine identity, model and twin hashes. Tamper-proof.</a:t>
-            </a:r>
-            <a:endParaRPr lang="en-US" sz="1250" dirty="0"/>
-          </a:p>
-        </p:txBody>
-      </p:sp>
-      <p:sp>
-        <p:nvSpPr>
-          <p:cNvPr id="13" name="Shape 9"/>
-          <p:cNvSpPr/>
-          <p:nvPr/>
-        </p:nvSpPr>
-        <p:spPr>
-          <a:xfrm>
-            <a:off x="777240" y="4480560"/>
-            <a:ext cx="548640" cy="548640"/>
-          </a:xfrm>
-          <a:prstGeom prst="roundRect">
-            <a:avLst>
-              <a:gd name="adj" fmla="val 16667"/>
-            </a:avLst>
-          </a:prstGeom>
-          <a:solidFill>
-            <a:srgbClr val="FFFFFF">
-              <a:alpha val="10000"/>
-            </a:srgbClr>
-          </a:solidFill>
-          <a:ln/>
-        </p:spPr>
-      </p:sp>
-      <p:pic>
-        <p:nvPicPr>
-          <p:cNvPr id="14" name="Image 2" descr="preencoded.png">    </p:cNvPr>
+          <p:cNvPr id="6" name="Image 0" descr="preencoded.png"/>
           <p:cNvPicPr>
             <a:picLocks noChangeAspect="1"/>
           </p:cNvPicPr>
@@ -8915,7 +7647,7 @@
         </p:blipFill>
         <p:spPr>
           <a:xfrm>
-            <a:off x="914400" y="4617720"/>
+            <a:off x="914400" y="2240280"/>
             <a:ext cx="274320" cy="274320"/>
           </a:xfrm>
           <a:prstGeom prst="rect">
@@ -8925,13 +7657,13 @@
       </p:pic>
       <p:sp>
         <p:nvSpPr>
-          <p:cNvPr id="15" name="Text 10"/>
-          <p:cNvSpPr/>
-          <p:nvPr/>
-        </p:nvSpPr>
-        <p:spPr>
-          <a:xfrm>
-            <a:off x="1554480" y="4443984"/>
+          <p:cNvPr id="7" name="Text 4"/>
+          <p:cNvSpPr/>
+          <p:nvPr/>
+        </p:nvSpPr>
+        <p:spPr>
+          <a:xfrm>
+            <a:off x="1554480" y="2066544"/>
             <a:ext cx="5029200" cy="365760"/>
           </a:xfrm>
           <a:prstGeom prst="rect">
@@ -8944,7 +7676,7 @@
           <a:bodyPr wrap="square" lIns="0" tIns="0" rIns="0" bIns="0" rtlCol="0" anchor="ctr"/>
           <a:lstStyle/>
           <a:p>
-            <a:pPr indent="0" marL="0">
+            <a:pPr marL="0" indent="0">
               <a:buNone/>
             </a:pPr>
             <a:r>
@@ -8956,6 +7688,278 @@
                 <a:ea typeface="Space Grotesk" pitchFamily="34" charset="-122"/>
                 <a:cs typeface="Space Grotesk" pitchFamily="34" charset="-120"/>
               </a:rPr>
+              <a:t>Tokenized, never exposed</a:t>
+            </a:r>
+            <a:endParaRPr lang="en-US" sz="1800" dirty="0"/>
+          </a:p>
+        </p:txBody>
+      </p:sp>
+      <p:sp>
+        <p:nvSpPr>
+          <p:cNvPr id="8" name="Text 5"/>
+          <p:cNvSpPr/>
+          <p:nvPr/>
+        </p:nvSpPr>
+        <p:spPr>
+          <a:xfrm>
+            <a:off x="1554480" y="2450592"/>
+            <a:ext cx="5120640" cy="731520"/>
+          </a:xfrm>
+          <a:prstGeom prst="rect">
+            <a:avLst/>
+          </a:prstGeom>
+          <a:noFill/>
+          <a:ln/>
+        </p:spPr>
+        <p:txBody>
+          <a:bodyPr wrap="square" lIns="0" tIns="0" rIns="0" bIns="0" rtlCol="0" anchor="ctr"/>
+          <a:lstStyle/>
+          <a:p>
+            <a:pPr marL="0" indent="0">
+              <a:lnSpc>
+                <a:spcPct val="130000"/>
+              </a:lnSpc>
+              <a:buNone/>
+            </a:pPr>
+            <a:r>
+              <a:rPr lang="en-US" sz="1250" dirty="0">
+                <a:solidFill>
+                  <a:srgbClr val="9DB0C9"/>
+                </a:solidFill>
+                <a:latin typeface="Inter" pitchFamily="34" charset="0"/>
+                <a:ea typeface="Inter" pitchFamily="34" charset="-122"/>
+                <a:cs typeface="Inter" pitchFamily="34" charset="-120"/>
+              </a:rPr>
+              <a:t>Sensitive values become Privacy Twins. Only cryptographic hashes and content IDs go on-chain — never the PII.</a:t>
+            </a:r>
+            <a:endParaRPr lang="en-US" sz="1250" dirty="0"/>
+          </a:p>
+        </p:txBody>
+      </p:sp>
+      <p:sp>
+        <p:nvSpPr>
+          <p:cNvPr id="9" name="Shape 6"/>
+          <p:cNvSpPr/>
+          <p:nvPr/>
+        </p:nvSpPr>
+        <p:spPr>
+          <a:xfrm>
+            <a:off x="777240" y="3291840"/>
+            <a:ext cx="548640" cy="548640"/>
+          </a:xfrm>
+          <a:prstGeom prst="roundRect">
+            <a:avLst>
+              <a:gd name="adj" fmla="val 16667"/>
+            </a:avLst>
+          </a:prstGeom>
+          <a:solidFill>
+            <a:srgbClr val="FFFFFF">
+              <a:alpha val="10000"/>
+            </a:srgbClr>
+          </a:solidFill>
+          <a:ln/>
+        </p:spPr>
+        <p:txBody>
+          <a:bodyPr/>
+          <a:lstStyle/>
+          <a:p>
+            <a:endParaRPr lang="en-US"/>
+          </a:p>
+        </p:txBody>
+      </p:sp>
+      <p:pic>
+        <p:nvPicPr>
+          <p:cNvPr id="10" name="Image 1" descr="preencoded.png"/>
+          <p:cNvPicPr>
+            <a:picLocks noChangeAspect="1"/>
+          </p:cNvPicPr>
+          <p:nvPr/>
+        </p:nvPicPr>
+        <p:blipFill>
+          <a:blip r:embed="rId4"/>
+          <a:stretch>
+            <a:fillRect/>
+          </a:stretch>
+        </p:blipFill>
+        <p:spPr>
+          <a:xfrm>
+            <a:off x="914400" y="3429000"/>
+            <a:ext cx="274320" cy="274320"/>
+          </a:xfrm>
+          <a:prstGeom prst="rect">
+            <a:avLst/>
+          </a:prstGeom>
+        </p:spPr>
+      </p:pic>
+      <p:sp>
+        <p:nvSpPr>
+          <p:cNvPr id="11" name="Text 7"/>
+          <p:cNvSpPr/>
+          <p:nvPr/>
+        </p:nvSpPr>
+        <p:spPr>
+          <a:xfrm>
+            <a:off x="1554480" y="3255264"/>
+            <a:ext cx="5029200" cy="365760"/>
+          </a:xfrm>
+          <a:prstGeom prst="rect">
+            <a:avLst/>
+          </a:prstGeom>
+          <a:noFill/>
+          <a:ln/>
+        </p:spPr>
+        <p:txBody>
+          <a:bodyPr wrap="square" lIns="0" tIns="0" rIns="0" bIns="0" rtlCol="0" anchor="ctr"/>
+          <a:lstStyle/>
+          <a:p>
+            <a:pPr marL="0" indent="0">
+              <a:buNone/>
+            </a:pPr>
+            <a:r>
+              <a:rPr lang="en-US" sz="1800" b="1" dirty="0">
+                <a:solidFill>
+                  <a:srgbClr val="FFFFFF"/>
+                </a:solidFill>
+                <a:latin typeface="Space Grotesk" pitchFamily="34" charset="0"/>
+                <a:ea typeface="Space Grotesk" pitchFamily="34" charset="-122"/>
+                <a:cs typeface="Space Grotesk" pitchFamily="34" charset="-120"/>
+              </a:rPr>
+              <a:t>AI activity, audited on-chain</a:t>
+            </a:r>
+            <a:endParaRPr lang="en-US" sz="1800" dirty="0"/>
+          </a:p>
+        </p:txBody>
+      </p:sp>
+      <p:sp>
+        <p:nvSpPr>
+          <p:cNvPr id="12" name="Text 8"/>
+          <p:cNvSpPr/>
+          <p:nvPr/>
+        </p:nvSpPr>
+        <p:spPr>
+          <a:xfrm>
+            <a:off x="1554480" y="3639312"/>
+            <a:ext cx="5120640" cy="731520"/>
+          </a:xfrm>
+          <a:prstGeom prst="rect">
+            <a:avLst/>
+          </a:prstGeom>
+          <a:noFill/>
+          <a:ln/>
+        </p:spPr>
+        <p:txBody>
+          <a:bodyPr wrap="square" lIns="0" tIns="0" rIns="0" bIns="0" rtlCol="0" anchor="ctr"/>
+          <a:lstStyle/>
+          <a:p>
+            <a:pPr marL="0" indent="0">
+              <a:lnSpc>
+                <a:spcPct val="130000"/>
+              </a:lnSpc>
+              <a:buNone/>
+            </a:pPr>
+            <a:r>
+              <a:rPr lang="en-US" sz="1250" dirty="0">
+                <a:solidFill>
+                  <a:srgbClr val="9DB0C9"/>
+                </a:solidFill>
+                <a:latin typeface="Inter" pitchFamily="34" charset="0"/>
+                <a:ea typeface="Inter" pitchFamily="34" charset="-122"/>
+                <a:cs typeface="Inter" pitchFamily="34" charset="-120"/>
+              </a:rPr>
+              <a:t>Each session is one immutable peaq transaction — user, machine identity, model and twin hashes. Tamper-proof.</a:t>
+            </a:r>
+            <a:endParaRPr lang="en-US" sz="1250" dirty="0"/>
+          </a:p>
+        </p:txBody>
+      </p:sp>
+      <p:sp>
+        <p:nvSpPr>
+          <p:cNvPr id="13" name="Shape 9"/>
+          <p:cNvSpPr/>
+          <p:nvPr/>
+        </p:nvSpPr>
+        <p:spPr>
+          <a:xfrm>
+            <a:off x="777240" y="4480560"/>
+            <a:ext cx="548640" cy="548640"/>
+          </a:xfrm>
+          <a:prstGeom prst="roundRect">
+            <a:avLst>
+              <a:gd name="adj" fmla="val 16667"/>
+            </a:avLst>
+          </a:prstGeom>
+          <a:solidFill>
+            <a:srgbClr val="FFFFFF">
+              <a:alpha val="10000"/>
+            </a:srgbClr>
+          </a:solidFill>
+          <a:ln/>
+        </p:spPr>
+        <p:txBody>
+          <a:bodyPr/>
+          <a:lstStyle/>
+          <a:p>
+            <a:endParaRPr lang="en-US"/>
+          </a:p>
+        </p:txBody>
+      </p:sp>
+      <p:pic>
+        <p:nvPicPr>
+          <p:cNvPr id="14" name="Image 2" descr="preencoded.png"/>
+          <p:cNvPicPr>
+            <a:picLocks noChangeAspect="1"/>
+          </p:cNvPicPr>
+          <p:nvPr/>
+        </p:nvPicPr>
+        <p:blipFill>
+          <a:blip r:embed="rId5"/>
+          <a:stretch>
+            <a:fillRect/>
+          </a:stretch>
+        </p:blipFill>
+        <p:spPr>
+          <a:xfrm>
+            <a:off x="914400" y="4617720"/>
+            <a:ext cx="274320" cy="274320"/>
+          </a:xfrm>
+          <a:prstGeom prst="rect">
+            <a:avLst/>
+          </a:prstGeom>
+        </p:spPr>
+      </p:pic>
+      <p:sp>
+        <p:nvSpPr>
+          <p:cNvPr id="15" name="Text 10"/>
+          <p:cNvSpPr/>
+          <p:nvPr/>
+        </p:nvSpPr>
+        <p:spPr>
+          <a:xfrm>
+            <a:off x="1554480" y="4443984"/>
+            <a:ext cx="5029200" cy="365760"/>
+          </a:xfrm>
+          <a:prstGeom prst="rect">
+            <a:avLst/>
+          </a:prstGeom>
+          <a:noFill/>
+          <a:ln/>
+        </p:spPr>
+        <p:txBody>
+          <a:bodyPr wrap="square" lIns="0" tIns="0" rIns="0" bIns="0" rtlCol="0" anchor="ctr"/>
+          <a:lstStyle/>
+          <a:p>
+            <a:pPr marL="0" indent="0">
+              <a:buNone/>
+            </a:pPr>
+            <a:r>
+              <a:rPr lang="en-US" sz="1800" b="1" dirty="0">
+                <a:solidFill>
+                  <a:srgbClr val="FFFFFF"/>
+                </a:solidFill>
+                <a:latin typeface="Space Grotesk" pitchFamily="34" charset="0"/>
+                <a:ea typeface="Space Grotesk" pitchFamily="34" charset="-122"/>
+                <a:cs typeface="Space Grotesk" pitchFamily="34" charset="-120"/>
+              </a:rPr>
               <a:t>DID-secured vault access</a:t>
             </a:r>
             <a:endParaRPr lang="en-US" sz="1800" dirty="0"/>
@@ -8983,7 +7987,7 @@
           <a:bodyPr wrap="square" lIns="0" tIns="0" rIns="0" bIns="0" rtlCol="0" anchor="ctr"/>
           <a:lstStyle/>
           <a:p>
-            <a:pPr indent="0" marL="0">
+            <a:pPr marL="0" indent="0">
               <a:lnSpc>
                 <a:spcPct val="130000"/>
               </a:lnSpc>
@@ -9032,6 +8036,13 @@
             <a:prstDash val="solid"/>
           </a:ln>
         </p:spPr>
+        <p:txBody>
+          <a:bodyPr/>
+          <a:lstStyle/>
+          <a:p>
+            <a:endParaRPr lang="en-US"/>
+          </a:p>
+        </p:txBody>
       </p:sp>
       <p:sp>
         <p:nvSpPr>
@@ -9054,11 +8065,11 @@
           <a:bodyPr wrap="square" lIns="0" tIns="0" rIns="0" bIns="0" rtlCol="0" anchor="ctr"/>
           <a:lstStyle/>
           <a:p>
-            <a:pPr indent="0" marL="0">
-              <a:buNone/>
-            </a:pPr>
-            <a:r>
-              <a:rPr lang="en-US" sz="1000" spc="100" kern="0" dirty="0">
+            <a:pPr marL="0" indent="0">
+              <a:buNone/>
+            </a:pPr>
+            <a:r>
+              <a:rPr lang="en-US" sz="1000" kern="0" spc="100" dirty="0">
                 <a:solidFill>
                   <a:srgbClr val="12A7B5"/>
                 </a:solidFill>
@@ -9093,7 +8104,7 @@
           <a:bodyPr wrap="square" lIns="0" tIns="0" rIns="0" bIns="0" rtlCol="0" anchor="ctr"/>
           <a:lstStyle/>
           <a:p>
-            <a:pPr algn="r" indent="0" marL="0">
+            <a:pPr marL="0" indent="0" algn="r">
               <a:buNone/>
             </a:pPr>
             <a:r>
@@ -9135,6 +8146,13 @@
             <a:prstDash val="solid"/>
           </a:ln>
         </p:spPr>
+        <p:txBody>
+          <a:bodyPr/>
+          <a:lstStyle/>
+          <a:p>
+            <a:endParaRPr lang="en-US"/>
+          </a:p>
+        </p:txBody>
       </p:sp>
       <p:sp>
         <p:nvSpPr>
@@ -9157,7 +8175,7 @@
           <a:bodyPr wrap="square" lIns="0" tIns="0" rIns="0" bIns="0" rtlCol="0" anchor="ctr"/>
           <a:lstStyle/>
           <a:p>
-            <a:pPr indent="0" marL="0">
+            <a:pPr marL="0" indent="0">
               <a:buNone/>
             </a:pPr>
             <a:r>
@@ -9196,7 +8214,7 @@
           <a:bodyPr wrap="square" lIns="0" tIns="0" rIns="0" bIns="0" rtlCol="0" anchor="ctr"/>
           <a:lstStyle/>
           <a:p>
-            <a:pPr indent="0" marL="0">
+            <a:pPr marL="0" indent="0">
               <a:buNone/>
             </a:pPr>
             <a:r>
@@ -9210,9 +8228,6 @@
               </a:rPr>
               <a:t>3a7f…e1</a:t>
             </a:r>
-            <a:pPr indent="0" marL="0">
-              <a:buNone/>
-            </a:pPr>
             <a:r>
               <a:rPr lang="en-US" sz="1150" dirty="0">
                 <a:solidFill>
@@ -9224,9 +8239,6 @@
               </a:rPr>
               <a:t>  →  </a:t>
             </a:r>
-            <a:pPr indent="0" marL="0">
-              <a:buNone/>
-            </a:pPr>
             <a:r>
               <a:rPr lang="en-US" sz="1150" dirty="0">
                 <a:solidFill>
@@ -9263,11 +8275,11 @@
           <a:bodyPr wrap="square" lIns="0" tIns="0" rIns="0" bIns="0" rtlCol="0" anchor="ctr"/>
           <a:lstStyle/>
           <a:p>
-            <a:pPr algn="r" indent="0" marL="0">
-              <a:buNone/>
-            </a:pPr>
-            <a:r>
-              <a:rPr lang="en-US" sz="900" spc="100" kern="0" dirty="0">
+            <a:pPr marL="0" indent="0" algn="r">
+              <a:buNone/>
+            </a:pPr>
+            <a:r>
+              <a:rPr lang="en-US" sz="900" kern="0" spc="100" dirty="0">
                 <a:solidFill>
                   <a:srgbClr val="9DB0C9"/>
                 </a:solidFill>
@@ -9302,7 +8314,7 @@
           <a:bodyPr wrap="square" lIns="0" tIns="0" rIns="0" bIns="0" rtlCol="0" anchor="ctr"/>
           <a:lstStyle/>
           <a:p>
-            <a:pPr indent="0" marL="0">
+            <a:pPr marL="0" indent="0">
               <a:buNone/>
             </a:pPr>
             <a:r>
@@ -9316,9 +8328,6 @@
               </a:rPr>
               <a:t>88b2…9c</a:t>
             </a:r>
-            <a:pPr indent="0" marL="0">
-              <a:buNone/>
-            </a:pPr>
             <a:r>
               <a:rPr lang="en-US" sz="1150" dirty="0">
                 <a:solidFill>
@@ -9330,9 +8339,6 @@
               </a:rPr>
               <a:t>  →  </a:t>
             </a:r>
-            <a:pPr indent="0" marL="0">
-              <a:buNone/>
-            </a:pPr>
             <a:r>
               <a:rPr lang="en-US" sz="1150" dirty="0">
                 <a:solidFill>
@@ -9369,11 +8375,11 @@
           <a:bodyPr wrap="square" lIns="0" tIns="0" rIns="0" bIns="0" rtlCol="0" anchor="ctr"/>
           <a:lstStyle/>
           <a:p>
-            <a:pPr algn="r" indent="0" marL="0">
-              <a:buNone/>
-            </a:pPr>
-            <a:r>
-              <a:rPr lang="en-US" sz="900" spc="100" kern="0" dirty="0">
+            <a:pPr marL="0" indent="0" algn="r">
+              <a:buNone/>
+            </a:pPr>
+            <a:r>
+              <a:rPr lang="en-US" sz="900" kern="0" spc="100" dirty="0">
                 <a:solidFill>
                   <a:srgbClr val="9DB0C9"/>
                 </a:solidFill>
@@ -9408,7 +8414,7 @@
           <a:bodyPr wrap="square" lIns="0" tIns="0" rIns="0" bIns="0" rtlCol="0" anchor="ctr"/>
           <a:lstStyle/>
           <a:p>
-            <a:pPr indent="0" marL="0">
+            <a:pPr marL="0" indent="0">
               <a:buNone/>
             </a:pPr>
             <a:r>
@@ -9422,9 +8428,6 @@
               </a:rPr>
               <a:t>d04a…7f</a:t>
             </a:r>
-            <a:pPr indent="0" marL="0">
-              <a:buNone/>
-            </a:pPr>
             <a:r>
               <a:rPr lang="en-US" sz="1150" dirty="0">
                 <a:solidFill>
@@ -9436,9 +8439,6 @@
               </a:rPr>
               <a:t>  →  </a:t>
             </a:r>
-            <a:pPr indent="0" marL="0">
-              <a:buNone/>
-            </a:pPr>
             <a:r>
               <a:rPr lang="en-US" sz="1150" dirty="0">
                 <a:solidFill>
@@ -9475,11 +8475,11 @@
           <a:bodyPr wrap="square" lIns="0" tIns="0" rIns="0" bIns="0" rtlCol="0" anchor="ctr"/>
           <a:lstStyle/>
           <a:p>
-            <a:pPr algn="r" indent="0" marL="0">
-              <a:buNone/>
-            </a:pPr>
-            <a:r>
-              <a:rPr lang="en-US" sz="900" spc="100" kern="0" dirty="0">
+            <a:pPr marL="0" indent="0" algn="r">
+              <a:buNone/>
+            </a:pPr>
+            <a:r>
+              <a:rPr lang="en-US" sz="900" kern="0" spc="100" dirty="0">
                 <a:solidFill>
                   <a:srgbClr val="9DB0C9"/>
                 </a:solidFill>
@@ -9517,6 +8517,13 @@
             <a:prstDash val="solid"/>
           </a:ln>
         </p:spPr>
+        <p:txBody>
+          <a:bodyPr/>
+          <a:lstStyle/>
+          <a:p>
+            <a:endParaRPr lang="en-US"/>
+          </a:p>
+        </p:txBody>
       </p:sp>
       <p:sp>
         <p:nvSpPr>
@@ -9539,7 +8546,7 @@
           <a:bodyPr wrap="square" lIns="0" tIns="0" rIns="0" bIns="0" rtlCol="0" anchor="ctr"/>
           <a:lstStyle/>
           <a:p>
-            <a:pPr indent="0" marL="0">
+            <a:pPr marL="0" indent="0">
               <a:buNone/>
             </a:pPr>
             <a:r>
@@ -9578,7 +8585,7 @@
           <a:bodyPr wrap="square" lIns="0" tIns="0" rIns="0" bIns="0" rtlCol="0" anchor="ctr"/>
           <a:lstStyle/>
           <a:p>
-            <a:pPr indent="0" marL="0">
+            <a:pPr marL="0" indent="0">
               <a:buNone/>
             </a:pPr>
             <a:r>
@@ -9617,7 +8624,7 @@
           <a:bodyPr wrap="square" lIns="0" tIns="0" rIns="0" bIns="0" rtlCol="0" anchor="ctr"/>
           <a:lstStyle/>
           <a:p>
-            <a:pPr indent="0" marL="0">
+            <a:pPr marL="0" indent="0">
               <a:buNone/>
             </a:pPr>
             <a:r>
@@ -9656,7 +8663,7 @@
           <a:bodyPr wrap="square" lIns="0" tIns="0" rIns="0" bIns="0" rtlCol="0" anchor="ctr"/>
           <a:lstStyle/>
           <a:p>
-            <a:pPr indent="0" marL="0">
+            <a:pPr marL="0" indent="0">
               <a:buNone/>
             </a:pPr>
             <a:r>
@@ -9695,7 +8702,7 @@
           <a:bodyPr wrap="square" lIns="0" tIns="0" rIns="0" bIns="0" rtlCol="0" anchor="ctr"/>
           <a:lstStyle/>
           <a:p>
-            <a:pPr indent="0" marL="0">
+            <a:pPr marL="0" indent="0">
               <a:buNone/>
             </a:pPr>
             <a:r>
@@ -9734,7 +8741,7 @@
           <a:bodyPr wrap="square" lIns="0" tIns="0" rIns="0" bIns="0" rtlCol="0" anchor="ctr"/>
           <a:lstStyle/>
           <a:p>
-            <a:pPr indent="0" marL="0">
+            <a:pPr marL="0" indent="0">
               <a:buNone/>
             </a:pPr>
             <a:r>
@@ -9754,14 +8761,14 @@
       </p:sp>
       <p:pic>
         <p:nvPicPr>
-          <p:cNvPr id="35" name="Image 3" descr="assets/pp-logo-light.png">    </p:cNvPr>
+          <p:cNvPr id="35" name="Image 3" descr="assets/pp-logo-light.png"/>
           <p:cNvPicPr>
             <a:picLocks noChangeAspect="1"/>
           </p:cNvPicPr>
           <p:nvPr/>
         </p:nvPicPr>
         <p:blipFill>
-          <a:blip r:embed="rId4"/>
+          <a:blip r:embed="rId6"/>
           <a:stretch>
             <a:fillRect/>
           </a:stretch>
@@ -9797,11 +8804,11 @@
           <a:bodyPr wrap="square" lIns="0" tIns="0" rIns="0" bIns="0" rtlCol="0" anchor="ctr"/>
           <a:lstStyle/>
           <a:p>
-            <a:pPr algn="r" indent="0" marL="0">
-              <a:buNone/>
-            </a:pPr>
-            <a:r>
-              <a:rPr lang="en-US" sz="1000" spc="200" kern="0" dirty="0">
+            <a:pPr marL="0" indent="0" algn="r">
+              <a:buNone/>
+            </a:pPr>
+            <a:r>
+              <a:rPr lang="en-US" sz="1000" kern="0" spc="200" dirty="0">
                 <a:solidFill>
                   <a:srgbClr val="9DB0C9"/>
                 </a:solidFill>
@@ -9831,6 +8838,7 @@
         <a:solidFill>
           <a:srgbClr val="01204E"/>
         </a:solidFill>
+        <a:effectLst/>
       </p:bgPr>
     </p:bg>
     <p:spTree>
@@ -9866,6 +8874,13 @@
           </a:solidFill>
           <a:ln/>
         </p:spPr>
+        <p:txBody>
+          <a:bodyPr/>
+          <a:lstStyle/>
+          <a:p>
+            <a:endParaRPr lang="en-US"/>
+          </a:p>
+        </p:txBody>
       </p:sp>
       <p:sp>
         <p:nvSpPr>
@@ -9888,11 +8903,11 @@
           <a:bodyPr wrap="square" lIns="0" tIns="0" rIns="0" bIns="0" rtlCol="0" anchor="ctr"/>
           <a:lstStyle/>
           <a:p>
-            <a:pPr algn="l" indent="0" marL="0">
-              <a:buNone/>
-            </a:pPr>
-            <a:r>
-              <a:rPr lang="en-US" sz="1250" b="1" spc="300" kern="0" dirty="0">
+            <a:pPr marL="0" indent="0" algn="l">
+              <a:buNone/>
+            </a:pPr>
+            <a:r>
+              <a:rPr lang="en-US" sz="1250" b="1" kern="0" spc="300" dirty="0">
                 <a:solidFill>
                   <a:srgbClr val="12A7B5"/>
                 </a:solidFill>
@@ -9927,7 +8942,7 @@
           <a:bodyPr wrap="square" lIns="0" tIns="0" rIns="0" bIns="0" rtlCol="0" anchor="ctr"/>
           <a:lstStyle/>
           <a:p>
-            <a:pPr indent="0" marL="0">
+            <a:pPr marL="0" indent="0">
               <a:buNone/>
             </a:pPr>
             <a:r>
@@ -9973,6 +8988,13 @@
             <a:prstDash val="solid"/>
           </a:ln>
         </p:spPr>
+        <p:txBody>
+          <a:bodyPr/>
+          <a:lstStyle/>
+          <a:p>
+            <a:endParaRPr lang="en-US"/>
+          </a:p>
+        </p:txBody>
       </p:sp>
       <p:sp>
         <p:nvSpPr>
@@ -9995,11 +9017,11 @@
           <a:bodyPr wrap="square" lIns="0" tIns="0" rIns="0" bIns="0" rtlCol="0" anchor="ctr"/>
           <a:lstStyle/>
           <a:p>
-            <a:pPr algn="ctr" indent="0" marL="0">
-              <a:buNone/>
-            </a:pPr>
-            <a:r>
-              <a:rPr lang="en-US" sz="900" b="1" spc="100" kern="0" dirty="0">
+            <a:pPr marL="0" indent="0" algn="ctr">
+              <a:buNone/>
+            </a:pPr>
+            <a:r>
+              <a:rPr lang="en-US" sz="900" b="1" kern="0" spc="100" dirty="0">
                 <a:solidFill>
                   <a:srgbClr val="9DB0C9"/>
                 </a:solidFill>
@@ -10034,7 +9056,7 @@
           <a:bodyPr wrap="square" lIns="0" tIns="0" rIns="0" bIns="0" rtlCol="0" anchor="ctr"/>
           <a:lstStyle/>
           <a:p>
-            <a:pPr algn="ctr" indent="0" marL="0">
+            <a:pPr marL="0" indent="0" algn="ctr">
               <a:buNone/>
             </a:pPr>
             <a:r>
@@ -10073,7 +9095,7 @@
           <a:bodyPr wrap="square" lIns="0" tIns="0" rIns="0" bIns="0" rtlCol="0" anchor="ctr"/>
           <a:lstStyle/>
           <a:p>
-            <a:pPr algn="ctr" indent="0" marL="0">
+            <a:pPr marL="0" indent="0" algn="ctr">
               <a:lnSpc>
                 <a:spcPct val="120000"/>
               </a:lnSpc>
@@ -10115,13 +9137,20 @@
           </a:solidFill>
           <a:ln/>
           <a:effectLst>
-            <a:outerShdw sx="100000" sy="100000" kx="0" ky="0" algn="bl" rotWithShape="0" blurRad="203200" dist="63500" dir="5400000">
+            <a:outerShdw blurRad="203200" dist="63500" dir="5400000" algn="bl" rotWithShape="0">
               <a:srgbClr val="000000">
                 <a:alpha val="40000"/>
               </a:srgbClr>
             </a:outerShdw>
           </a:effectLst>
         </p:spPr>
+        <p:txBody>
+          <a:bodyPr/>
+          <a:lstStyle/>
+          <a:p>
+            <a:endParaRPr lang="en-US"/>
+          </a:p>
+        </p:txBody>
       </p:sp>
       <p:sp>
         <p:nvSpPr>
@@ -10144,11 +9173,11 @@
           <a:bodyPr wrap="square" lIns="0" tIns="0" rIns="0" bIns="0" rtlCol="0" anchor="ctr"/>
           <a:lstStyle/>
           <a:p>
-            <a:pPr algn="ctr" indent="0" marL="0">
-              <a:buNone/>
-            </a:pPr>
-            <a:r>
-              <a:rPr lang="en-US" sz="900" b="1" spc="100" kern="0" dirty="0">
+            <a:pPr marL="0" indent="0" algn="ctr">
+              <a:buNone/>
+            </a:pPr>
+            <a:r>
+              <a:rPr lang="en-US" sz="900" b="1" kern="0" spc="100" dirty="0">
                 <a:solidFill>
                   <a:srgbClr val="FFFFFF"/>
                 </a:solidFill>
@@ -10183,7 +9212,7 @@
           <a:bodyPr wrap="square" lIns="0" tIns="0" rIns="0" bIns="0" rtlCol="0" anchor="ctr"/>
           <a:lstStyle/>
           <a:p>
-            <a:pPr algn="ctr" indent="0" marL="0">
+            <a:pPr marL="0" indent="0" algn="ctr">
               <a:buNone/>
             </a:pPr>
             <a:r>
@@ -10222,7 +9251,7 @@
           <a:bodyPr wrap="square" lIns="0" tIns="0" rIns="0" bIns="0" rtlCol="0" anchor="ctr"/>
           <a:lstStyle/>
           <a:p>
-            <a:pPr algn="ctr" indent="0" marL="0">
+            <a:pPr marL="0" indent="0" algn="ctr">
               <a:lnSpc>
                 <a:spcPct val="120000"/>
               </a:lnSpc>
@@ -10271,6 +9300,13 @@
             <a:prstDash val="solid"/>
           </a:ln>
         </p:spPr>
+        <p:txBody>
+          <a:bodyPr/>
+          <a:lstStyle/>
+          <a:p>
+            <a:endParaRPr lang="en-US"/>
+          </a:p>
+        </p:txBody>
       </p:sp>
       <p:sp>
         <p:nvSpPr>
@@ -10293,11 +9329,11 @@
           <a:bodyPr wrap="square" lIns="0" tIns="0" rIns="0" bIns="0" rtlCol="0" anchor="ctr"/>
           <a:lstStyle/>
           <a:p>
-            <a:pPr algn="ctr" indent="0" marL="0">
-              <a:buNone/>
-            </a:pPr>
-            <a:r>
-              <a:rPr lang="en-US" sz="900" b="1" spc="100" kern="0" dirty="0">
+            <a:pPr marL="0" indent="0" algn="ctr">
+              <a:buNone/>
+            </a:pPr>
+            <a:r>
+              <a:rPr lang="en-US" sz="900" b="1" kern="0" spc="100" dirty="0">
                 <a:solidFill>
                   <a:srgbClr val="9DB0C9"/>
                 </a:solidFill>
@@ -10332,7 +9368,7 @@
           <a:bodyPr wrap="square" lIns="0" tIns="0" rIns="0" bIns="0" rtlCol="0" anchor="ctr"/>
           <a:lstStyle/>
           <a:p>
-            <a:pPr algn="ctr" indent="0" marL="0">
+            <a:pPr marL="0" indent="0" algn="ctr">
               <a:buNone/>
             </a:pPr>
             <a:r>
@@ -10371,7 +9407,7 @@
           <a:bodyPr wrap="square" lIns="0" tIns="0" rIns="0" bIns="0" rtlCol="0" anchor="ctr"/>
           <a:lstStyle/>
           <a:p>
-            <a:pPr algn="ctr" indent="0" marL="0">
+            <a:pPr marL="0" indent="0" algn="ctr">
               <a:lnSpc>
                 <a:spcPct val="120000"/>
               </a:lnSpc>
@@ -10413,7 +9449,7 @@
           <a:bodyPr wrap="square" lIns="0" tIns="0" rIns="0" bIns="0" rtlCol="0" anchor="ctr"/>
           <a:lstStyle/>
           <a:p>
-            <a:pPr algn="ctr" indent="0" marL="0">
+            <a:pPr marL="0" indent="0" algn="ctr">
               <a:buNone/>
             </a:pPr>
             <a:r>
@@ -10452,7 +9488,7 @@
           <a:bodyPr wrap="square" lIns="0" tIns="0" rIns="0" bIns="0" rtlCol="0" anchor="ctr"/>
           <a:lstStyle/>
           <a:p>
-            <a:pPr algn="ctr" indent="0" marL="0">
+            <a:pPr marL="0" indent="0" algn="ctr">
               <a:buNone/>
             </a:pPr>
             <a:r>
@@ -10489,6 +9525,13 @@
           </a:solidFill>
           <a:ln/>
         </p:spPr>
+        <p:txBody>
+          <a:bodyPr/>
+          <a:lstStyle/>
+          <a:p>
+            <a:endParaRPr lang="en-US"/>
+          </a:p>
+        </p:txBody>
       </p:sp>
       <p:sp>
         <p:nvSpPr>
@@ -10511,7 +9554,7 @@
           <a:bodyPr wrap="square" lIns="0" tIns="0" rIns="0" bIns="0" rtlCol="0" anchor="ctr"/>
           <a:lstStyle/>
           <a:p>
-            <a:pPr indent="0" marL="0">
+            <a:pPr marL="0" indent="0">
               <a:buNone/>
             </a:pPr>
             <a:r>
@@ -10550,14 +9593,14 @@
           <a:bodyPr wrap="square" lIns="0" tIns="0" rIns="0" bIns="0" rtlCol="0" anchor="ctr"/>
           <a:lstStyle/>
           <a:p>
-            <a:pPr indent="0" marL="0">
+            <a:pPr marL="0" indent="0">
               <a:lnSpc>
                 <a:spcPct val="120000"/>
               </a:lnSpc>
               <a:buNone/>
             </a:pPr>
             <a:r>
-              <a:rPr lang="en-US" sz="1050" spc="100" kern="0" dirty="0">
+              <a:rPr lang="en-US" sz="1050" kern="0" spc="100" dirty="0">
                 <a:solidFill>
                   <a:srgbClr val="9DB0C9"/>
                 </a:solidFill>
@@ -10590,6 +9633,13 @@
           </a:solidFill>
           <a:ln/>
         </p:spPr>
+        <p:txBody>
+          <a:bodyPr/>
+          <a:lstStyle/>
+          <a:p>
+            <a:endParaRPr lang="en-US"/>
+          </a:p>
+        </p:txBody>
       </p:sp>
       <p:sp>
         <p:nvSpPr>
@@ -10612,7 +9662,7 @@
           <a:bodyPr wrap="square" lIns="0" tIns="0" rIns="0" bIns="0" rtlCol="0" anchor="ctr"/>
           <a:lstStyle/>
           <a:p>
-            <a:pPr indent="0" marL="0">
+            <a:pPr marL="0" indent="0">
               <a:buNone/>
             </a:pPr>
             <a:r>
@@ -10651,14 +9701,14 @@
           <a:bodyPr wrap="square" lIns="0" tIns="0" rIns="0" bIns="0" rtlCol="0" anchor="ctr"/>
           <a:lstStyle/>
           <a:p>
-            <a:pPr indent="0" marL="0">
+            <a:pPr marL="0" indent="0">
               <a:lnSpc>
                 <a:spcPct val="120000"/>
               </a:lnSpc>
               <a:buNone/>
             </a:pPr>
             <a:r>
-              <a:rPr lang="en-US" sz="1050" spc="100" kern="0" dirty="0">
+              <a:rPr lang="en-US" sz="1050" kern="0" spc="100" dirty="0">
                 <a:solidFill>
                   <a:srgbClr val="9DB0C9"/>
                 </a:solidFill>
@@ -10691,6 +9741,13 @@
           </a:solidFill>
           <a:ln/>
         </p:spPr>
+        <p:txBody>
+          <a:bodyPr/>
+          <a:lstStyle/>
+          <a:p>
+            <a:endParaRPr lang="en-US"/>
+          </a:p>
+        </p:txBody>
       </p:sp>
       <p:sp>
         <p:nvSpPr>
@@ -10713,7 +9770,7 @@
           <a:bodyPr wrap="square" lIns="0" tIns="0" rIns="0" bIns="0" rtlCol="0" anchor="ctr"/>
           <a:lstStyle/>
           <a:p>
-            <a:pPr indent="0" marL="0">
+            <a:pPr marL="0" indent="0">
               <a:buNone/>
             </a:pPr>
             <a:r>
@@ -10752,14 +9809,14 @@
           <a:bodyPr wrap="square" lIns="0" tIns="0" rIns="0" bIns="0" rtlCol="0" anchor="ctr"/>
           <a:lstStyle/>
           <a:p>
-            <a:pPr indent="0" marL="0">
+            <a:pPr marL="0" indent="0">
               <a:lnSpc>
                 <a:spcPct val="120000"/>
               </a:lnSpc>
               <a:buNone/>
             </a:pPr>
             <a:r>
-              <a:rPr lang="en-US" sz="1050" spc="100" kern="0" dirty="0">
+              <a:rPr lang="en-US" sz="1050" kern="0" spc="100" dirty="0">
                 <a:solidFill>
                   <a:srgbClr val="9DB0C9"/>
                 </a:solidFill>
@@ -10792,6 +9849,13 @@
           </a:solidFill>
           <a:ln/>
         </p:spPr>
+        <p:txBody>
+          <a:bodyPr/>
+          <a:lstStyle/>
+          <a:p>
+            <a:endParaRPr lang="en-US"/>
+          </a:p>
+        </p:txBody>
       </p:sp>
       <p:sp>
         <p:nvSpPr>
@@ -10814,7 +9878,7 @@
           <a:bodyPr wrap="square" lIns="0" tIns="0" rIns="0" bIns="0" rtlCol="0" anchor="ctr"/>
           <a:lstStyle/>
           <a:p>
-            <a:pPr indent="0" marL="0">
+            <a:pPr marL="0" indent="0">
               <a:buNone/>
             </a:pPr>
             <a:r>
@@ -10853,14 +9917,14 @@
           <a:bodyPr wrap="square" lIns="0" tIns="0" rIns="0" bIns="0" rtlCol="0" anchor="ctr"/>
           <a:lstStyle/>
           <a:p>
-            <a:pPr indent="0" marL="0">
+            <a:pPr marL="0" indent="0">
               <a:lnSpc>
                 <a:spcPct val="120000"/>
               </a:lnSpc>
               <a:buNone/>
             </a:pPr>
             <a:r>
-              <a:rPr lang="en-US" sz="1050" spc="100" kern="0" dirty="0">
+              <a:rPr lang="en-US" sz="1050" kern="0" spc="100" dirty="0">
                 <a:solidFill>
                   <a:srgbClr val="9DB0C9"/>
                 </a:solidFill>
@@ -10876,14 +9940,14 @@
       </p:sp>
       <p:pic>
         <p:nvPicPr>
-          <p:cNvPr id="31" name="Image 0" descr="assets/pp-logo-light.png">    </p:cNvPr>
+          <p:cNvPr id="31" name="Image 0" descr="assets/pp-logo-light.png"/>
           <p:cNvPicPr>
             <a:picLocks noChangeAspect="1"/>
           </p:cNvPicPr>
           <p:nvPr/>
         </p:nvPicPr>
         <p:blipFill>
-          <a:blip r:embed="rId1"/>
+          <a:blip r:embed="rId3"/>
           <a:stretch>
             <a:fillRect/>
           </a:stretch>
@@ -10919,11 +9983,11 @@
           <a:bodyPr wrap="square" lIns="0" tIns="0" rIns="0" bIns="0" rtlCol="0" anchor="ctr"/>
           <a:lstStyle/>
           <a:p>
-            <a:pPr algn="r" indent="0" marL="0">
-              <a:buNone/>
-            </a:pPr>
-            <a:r>
-              <a:rPr lang="en-US" sz="1000" spc="200" kern="0" dirty="0">
+            <a:pPr marL="0" indent="0" algn="r">
+              <a:buNone/>
+            </a:pPr>
+            <a:r>
+              <a:rPr lang="en-US" sz="1000" kern="0" spc="200" dirty="0">
                 <a:solidFill>
                   <a:srgbClr val="9DB0C9"/>
                 </a:solidFill>
@@ -10953,6 +10017,7 @@
         <a:solidFill>
           <a:srgbClr val="01204E"/>
         </a:solidFill>
+        <a:effectLst/>
       </p:bgPr>
     </p:bg>
     <p:spTree>
@@ -10988,6 +10053,13 @@
           </a:solidFill>
           <a:ln/>
         </p:spPr>
+        <p:txBody>
+          <a:bodyPr/>
+          <a:lstStyle/>
+          <a:p>
+            <a:endParaRPr lang="en-US"/>
+          </a:p>
+        </p:txBody>
       </p:sp>
       <p:sp>
         <p:nvSpPr>
@@ -11010,11 +10082,11 @@
           <a:bodyPr wrap="square" lIns="0" tIns="0" rIns="0" bIns="0" rtlCol="0" anchor="ctr"/>
           <a:lstStyle/>
           <a:p>
-            <a:pPr algn="l" indent="0" marL="0">
-              <a:buNone/>
-            </a:pPr>
-            <a:r>
-              <a:rPr lang="en-US" sz="1250" b="1" spc="300" kern="0" dirty="0">
+            <a:pPr marL="0" indent="0" algn="l">
+              <a:buNone/>
+            </a:pPr>
+            <a:r>
+              <a:rPr lang="en-US" sz="1250" b="1" kern="0" spc="300" dirty="0">
                 <a:solidFill>
                   <a:srgbClr val="12A7B5"/>
                 </a:solidFill>
@@ -11049,7 +10121,7 @@
           <a:bodyPr wrap="square" lIns="0" tIns="0" rIns="0" bIns="0" rtlCol="0" anchor="ctr"/>
           <a:lstStyle/>
           <a:p>
-            <a:pPr indent="0" marL="0">
+            <a:pPr marL="0" indent="0">
               <a:buNone/>
             </a:pPr>
             <a:r>
@@ -11088,7 +10160,7 @@
           <a:bodyPr wrap="square" lIns="0" tIns="0" rIns="0" bIns="0" rtlCol="0" anchor="ctr"/>
           <a:lstStyle/>
           <a:p>
-            <a:pPr indent="0" marL="0">
+            <a:pPr marL="0" indent="0">
               <a:buNone/>
             </a:pPr>
             <a:r>
@@ -11108,139 +10180,7 @@
       </p:sp>
       <p:pic>
         <p:nvPicPr>
-          <p:cNvPr id="6" name="Image 0" descr="preencoded.png">    </p:cNvPr>
-          <p:cNvPicPr>
-            <a:picLocks noChangeAspect="1"/>
-          </p:cNvPicPr>
-          <p:nvPr/>
-        </p:nvPicPr>
-        <p:blipFill>
-          <a:blip r:embed="rId1"/>
-          <a:stretch>
-            <a:fillRect/>
-          </a:stretch>
-        </p:blipFill>
-        <p:spPr>
-          <a:xfrm>
-            <a:off x="777240" y="2578608"/>
-            <a:ext cx="237744" cy="237744"/>
-          </a:xfrm>
-          <a:prstGeom prst="rect">
-            <a:avLst/>
-          </a:prstGeom>
-        </p:spPr>
-      </p:pic>
-      <p:sp>
-        <p:nvSpPr>
-          <p:cNvPr id="7" name="Text 4"/>
-          <p:cNvSpPr/>
-          <p:nvPr/>
-        </p:nvSpPr>
-        <p:spPr>
-          <a:xfrm>
-            <a:off x="1161288" y="2560320"/>
-            <a:ext cx="4663440" cy="502920"/>
-          </a:xfrm>
-          <a:prstGeom prst="rect">
-            <a:avLst/>
-          </a:prstGeom>
-          <a:noFill/>
-          <a:ln/>
-        </p:spPr>
-        <p:txBody>
-          <a:bodyPr wrap="square" lIns="0" tIns="0" rIns="0" bIns="0" rtlCol="0" anchor="ctr"/>
-          <a:lstStyle/>
-          <a:p>
-            <a:pPr indent="0" marL="0">
-              <a:lnSpc>
-                <a:spcPct val="115000"/>
-              </a:lnSpc>
-              <a:buNone/>
-            </a:pPr>
-            <a:r>
-              <a:rPr lang="en-US" sz="1350" dirty="0">
-                <a:solidFill>
-                  <a:srgbClr val="FFFFFF"/>
-                </a:solidFill>
-                <a:latin typeface="Inter" pitchFamily="34" charset="0"/>
-                <a:ea typeface="Inter" pitchFamily="34" charset="-122"/>
-                <a:cs typeface="Inter" pitchFamily="34" charset="-120"/>
-              </a:rPr>
-              <a:t>Every prompt to every model — logged: who, tool, data type, when.</a:t>
-            </a:r>
-            <a:endParaRPr lang="en-US" sz="1350" dirty="0"/>
-          </a:p>
-        </p:txBody>
-      </p:sp>
-      <p:pic>
-        <p:nvPicPr>
-          <p:cNvPr id="8" name="Image 1" descr="preencoded.png">    </p:cNvPr>
-          <p:cNvPicPr>
-            <a:picLocks noChangeAspect="1"/>
-          </p:cNvPicPr>
-          <p:nvPr/>
-        </p:nvPicPr>
-        <p:blipFill>
-          <a:blip r:embed="rId2"/>
-          <a:stretch>
-            <a:fillRect/>
-          </a:stretch>
-        </p:blipFill>
-        <p:spPr>
-          <a:xfrm>
-            <a:off x="777240" y="3127248"/>
-            <a:ext cx="237744" cy="237744"/>
-          </a:xfrm>
-          <a:prstGeom prst="rect">
-            <a:avLst/>
-          </a:prstGeom>
-        </p:spPr>
-      </p:pic>
-      <p:sp>
-        <p:nvSpPr>
-          <p:cNvPr id="9" name="Text 5"/>
-          <p:cNvSpPr/>
-          <p:nvPr/>
-        </p:nvSpPr>
-        <p:spPr>
-          <a:xfrm>
-            <a:off x="1161288" y="3108960"/>
-            <a:ext cx="4663440" cy="502920"/>
-          </a:xfrm>
-          <a:prstGeom prst="rect">
-            <a:avLst/>
-          </a:prstGeom>
-          <a:noFill/>
-          <a:ln/>
-        </p:spPr>
-        <p:txBody>
-          <a:bodyPr wrap="square" lIns="0" tIns="0" rIns="0" bIns="0" rtlCol="0" anchor="ctr"/>
-          <a:lstStyle/>
-          <a:p>
-            <a:pPr indent="0" marL="0">
-              <a:lnSpc>
-                <a:spcPct val="115000"/>
-              </a:lnSpc>
-              <a:buNone/>
-            </a:pPr>
-            <a:r>
-              <a:rPr lang="en-US" sz="1350" dirty="0">
-                <a:solidFill>
-                  <a:srgbClr val="FFFFFF"/>
-                </a:solidFill>
-                <a:latin typeface="Inter" pitchFamily="34" charset="0"/>
-                <a:ea typeface="Inter" pitchFamily="34" charset="-122"/>
-                <a:cs typeface="Inter" pitchFamily="34" charset="-120"/>
-              </a:rPr>
-              <a:t>Findings, classifications &amp; remediation never leave your tenancy.</a:t>
-            </a:r>
-            <a:endParaRPr lang="en-US" sz="1350" dirty="0"/>
-          </a:p>
-        </p:txBody>
-      </p:sp>
-      <p:pic>
-        <p:nvPicPr>
-          <p:cNvPr id="10" name="Image 2" descr="preencoded.png">    </p:cNvPr>
+          <p:cNvPr id="6" name="Image 0" descr="preencoded.png"/>
           <p:cNvPicPr>
             <a:picLocks noChangeAspect="1"/>
           </p:cNvPicPr>
@@ -11254,7 +10194,7 @@
         </p:blipFill>
         <p:spPr>
           <a:xfrm>
-            <a:off x="777240" y="3675888"/>
+            <a:off x="777240" y="2578608"/>
             <a:ext cx="237744" cy="237744"/>
           </a:xfrm>
           <a:prstGeom prst="rect">
@@ -11264,13 +10204,13 @@
       </p:pic>
       <p:sp>
         <p:nvSpPr>
-          <p:cNvPr id="11" name="Text 6"/>
-          <p:cNvSpPr/>
-          <p:nvPr/>
-        </p:nvSpPr>
-        <p:spPr>
-          <a:xfrm>
-            <a:off x="1161288" y="3657600"/>
+          <p:cNvPr id="7" name="Text 4"/>
+          <p:cNvSpPr/>
+          <p:nvPr/>
+        </p:nvSpPr>
+        <p:spPr>
+          <a:xfrm>
+            <a:off x="1161288" y="2560320"/>
             <a:ext cx="4663440" cy="502920"/>
           </a:xfrm>
           <a:prstGeom prst="rect">
@@ -11283,7 +10223,7 @@
           <a:bodyPr wrap="square" lIns="0" tIns="0" rIns="0" bIns="0" rtlCol="0" anchor="ctr"/>
           <a:lstStyle/>
           <a:p>
-            <a:pPr indent="0" marL="0">
+            <a:pPr marL="0" indent="0">
               <a:lnSpc>
                 <a:spcPct val="115000"/>
               </a:lnSpc>
@@ -11298,6 +10238,138 @@
                 <a:ea typeface="Inter" pitchFamily="34" charset="-122"/>
                 <a:cs typeface="Inter" pitchFamily="34" charset="-120"/>
               </a:rPr>
+              <a:t>Every prompt to every model — logged: who, tool, data type, when.</a:t>
+            </a:r>
+            <a:endParaRPr lang="en-US" sz="1350" dirty="0"/>
+          </a:p>
+        </p:txBody>
+      </p:sp>
+      <p:pic>
+        <p:nvPicPr>
+          <p:cNvPr id="8" name="Image 1" descr="preencoded.png"/>
+          <p:cNvPicPr>
+            <a:picLocks noChangeAspect="1"/>
+          </p:cNvPicPr>
+          <p:nvPr/>
+        </p:nvPicPr>
+        <p:blipFill>
+          <a:blip r:embed="rId3"/>
+          <a:stretch>
+            <a:fillRect/>
+          </a:stretch>
+        </p:blipFill>
+        <p:spPr>
+          <a:xfrm>
+            <a:off x="777240" y="3127248"/>
+            <a:ext cx="237744" cy="237744"/>
+          </a:xfrm>
+          <a:prstGeom prst="rect">
+            <a:avLst/>
+          </a:prstGeom>
+        </p:spPr>
+      </p:pic>
+      <p:sp>
+        <p:nvSpPr>
+          <p:cNvPr id="9" name="Text 5"/>
+          <p:cNvSpPr/>
+          <p:nvPr/>
+        </p:nvSpPr>
+        <p:spPr>
+          <a:xfrm>
+            <a:off x="1161288" y="3108960"/>
+            <a:ext cx="4663440" cy="502920"/>
+          </a:xfrm>
+          <a:prstGeom prst="rect">
+            <a:avLst/>
+          </a:prstGeom>
+          <a:noFill/>
+          <a:ln/>
+        </p:spPr>
+        <p:txBody>
+          <a:bodyPr wrap="square" lIns="0" tIns="0" rIns="0" bIns="0" rtlCol="0" anchor="ctr"/>
+          <a:lstStyle/>
+          <a:p>
+            <a:pPr marL="0" indent="0">
+              <a:lnSpc>
+                <a:spcPct val="115000"/>
+              </a:lnSpc>
+              <a:buNone/>
+            </a:pPr>
+            <a:r>
+              <a:rPr lang="en-US" sz="1350" dirty="0">
+                <a:solidFill>
+                  <a:srgbClr val="FFFFFF"/>
+                </a:solidFill>
+                <a:latin typeface="Inter" pitchFamily="34" charset="0"/>
+                <a:ea typeface="Inter" pitchFamily="34" charset="-122"/>
+                <a:cs typeface="Inter" pitchFamily="34" charset="-120"/>
+              </a:rPr>
+              <a:t>Findings, classifications &amp; remediation never leave your tenancy.</a:t>
+            </a:r>
+            <a:endParaRPr lang="en-US" sz="1350" dirty="0"/>
+          </a:p>
+        </p:txBody>
+      </p:sp>
+      <p:pic>
+        <p:nvPicPr>
+          <p:cNvPr id="10" name="Image 2" descr="preencoded.png"/>
+          <p:cNvPicPr>
+            <a:picLocks noChangeAspect="1"/>
+          </p:cNvPicPr>
+          <p:nvPr/>
+        </p:nvPicPr>
+        <p:blipFill>
+          <a:blip r:embed="rId3"/>
+          <a:stretch>
+            <a:fillRect/>
+          </a:stretch>
+        </p:blipFill>
+        <p:spPr>
+          <a:xfrm>
+            <a:off x="777240" y="3675888"/>
+            <a:ext cx="237744" cy="237744"/>
+          </a:xfrm>
+          <a:prstGeom prst="rect">
+            <a:avLst/>
+          </a:prstGeom>
+        </p:spPr>
+      </p:pic>
+      <p:sp>
+        <p:nvSpPr>
+          <p:cNvPr id="11" name="Text 6"/>
+          <p:cNvSpPr/>
+          <p:nvPr/>
+        </p:nvSpPr>
+        <p:spPr>
+          <a:xfrm>
+            <a:off x="1161288" y="3657600"/>
+            <a:ext cx="4663440" cy="502920"/>
+          </a:xfrm>
+          <a:prstGeom prst="rect">
+            <a:avLst/>
+          </a:prstGeom>
+          <a:noFill/>
+          <a:ln/>
+        </p:spPr>
+        <p:txBody>
+          <a:bodyPr wrap="square" lIns="0" tIns="0" rIns="0" bIns="0" rtlCol="0" anchor="ctr"/>
+          <a:lstStyle/>
+          <a:p>
+            <a:pPr marL="0" indent="0">
+              <a:lnSpc>
+                <a:spcPct val="115000"/>
+              </a:lnSpc>
+              <a:buNone/>
+            </a:pPr>
+            <a:r>
+              <a:rPr lang="en-US" sz="1350" dirty="0">
+                <a:solidFill>
+                  <a:srgbClr val="FFFFFF"/>
+                </a:solidFill>
+                <a:latin typeface="Inter" pitchFamily="34" charset="0"/>
+                <a:ea typeface="Inter" pitchFamily="34" charset="-122"/>
+                <a:cs typeface="Inter" pitchFamily="34" charset="-120"/>
+              </a:rPr>
               <a:t>Immutable on-chain audit trail for high-assurance evidence.</a:t>
             </a:r>
             <a:endParaRPr lang="en-US" sz="1350" dirty="0"/>
@@ -11325,7 +10397,7 @@
           <a:bodyPr wrap="square" lIns="0" tIns="0" rIns="0" bIns="0" rtlCol="0" anchor="ctr"/>
           <a:lstStyle/>
           <a:p>
-            <a:pPr indent="0" marL="0">
+            <a:pPr marL="0" indent="0">
               <a:buNone/>
             </a:pPr>
             <a:r>
@@ -11373,6 +10445,13 @@
             <a:prstDash val="solid"/>
           </a:ln>
         </p:spPr>
+        <p:txBody>
+          <a:bodyPr/>
+          <a:lstStyle/>
+          <a:p>
+            <a:endParaRPr lang="en-US"/>
+          </a:p>
+        </p:txBody>
       </p:sp>
       <p:sp>
         <p:nvSpPr>
@@ -11395,7 +10474,7 @@
           <a:bodyPr wrap="square" lIns="0" tIns="0" rIns="0" bIns="0" rtlCol="0" anchor="ctr"/>
           <a:lstStyle/>
           <a:p>
-            <a:pPr algn="ctr" indent="0" marL="0">
+            <a:pPr marL="0" indent="0" algn="ctr">
               <a:buNone/>
             </a:pPr>
             <a:r>
@@ -11443,6 +10522,13 @@
             <a:prstDash val="solid"/>
           </a:ln>
         </p:spPr>
+        <p:txBody>
+          <a:bodyPr/>
+          <a:lstStyle/>
+          <a:p>
+            <a:endParaRPr lang="en-US"/>
+          </a:p>
+        </p:txBody>
       </p:sp>
       <p:sp>
         <p:nvSpPr>
@@ -11465,7 +10551,7 @@
           <a:bodyPr wrap="square" lIns="0" tIns="0" rIns="0" bIns="0" rtlCol="0" anchor="ctr"/>
           <a:lstStyle/>
           <a:p>
-            <a:pPr algn="ctr" indent="0" marL="0">
+            <a:pPr marL="0" indent="0" algn="ctr">
               <a:buNone/>
             </a:pPr>
             <a:r>
@@ -11513,6 +10599,13 @@
             <a:prstDash val="solid"/>
           </a:ln>
         </p:spPr>
+        <p:txBody>
+          <a:bodyPr/>
+          <a:lstStyle/>
+          <a:p>
+            <a:endParaRPr lang="en-US"/>
+          </a:p>
+        </p:txBody>
       </p:sp>
       <p:sp>
         <p:nvSpPr>
@@ -11535,7 +10628,7 @@
           <a:bodyPr wrap="square" lIns="0" tIns="0" rIns="0" bIns="0" rtlCol="0" anchor="ctr"/>
           <a:lstStyle/>
           <a:p>
-            <a:pPr algn="ctr" indent="0" marL="0">
+            <a:pPr marL="0" indent="0" algn="ctr">
               <a:buNone/>
             </a:pPr>
             <a:r>
@@ -11583,6 +10676,13 @@
             <a:prstDash val="solid"/>
           </a:ln>
         </p:spPr>
+        <p:txBody>
+          <a:bodyPr/>
+          <a:lstStyle/>
+          <a:p>
+            <a:endParaRPr lang="en-US"/>
+          </a:p>
+        </p:txBody>
       </p:sp>
       <p:sp>
         <p:nvSpPr>
@@ -11605,7 +10705,7 @@
           <a:bodyPr wrap="square" lIns="0" tIns="0" rIns="0" bIns="0" rtlCol="0" anchor="ctr"/>
           <a:lstStyle/>
           <a:p>
-            <a:pPr algn="ctr" indent="0" marL="0">
+            <a:pPr marL="0" indent="0" algn="ctr">
               <a:buNone/>
             </a:pPr>
             <a:r>
@@ -11653,6 +10753,13 @@
             <a:prstDash val="solid"/>
           </a:ln>
         </p:spPr>
+        <p:txBody>
+          <a:bodyPr/>
+          <a:lstStyle/>
+          <a:p>
+            <a:endParaRPr lang="en-US"/>
+          </a:p>
+        </p:txBody>
       </p:sp>
       <p:sp>
         <p:nvSpPr>
@@ -11675,7 +10782,7 @@
           <a:bodyPr wrap="square" lIns="0" tIns="0" rIns="0" bIns="0" rtlCol="0" anchor="ctr"/>
           <a:lstStyle/>
           <a:p>
-            <a:pPr algn="ctr" indent="0" marL="0">
+            <a:pPr marL="0" indent="0" algn="ctr">
               <a:buNone/>
             </a:pPr>
             <a:r>
@@ -11693,1685 +10800,9 @@
           </a:p>
         </p:txBody>
       </p:sp>
-      <p:graphicFrame>
-        <p:nvGraphicFramePr>
-          <p:cNvPr id="10" name="Table 0"/>
-          <p:cNvGraphicFramePr>
-            <a:graphicFrameLocks noGrp="1"/>
-          </p:cNvGraphicFramePr>
-          <p:nvPr>
-            <p:extLst>
-              <p:ext uri="{D42A27DB-BD31-4B8C-83A1-F6EECF244321}">
-                <p14:modId xmlns:p14="http://schemas.microsoft.com/office/powerpoint/2010/main" val="1579011935"/>
-              </p:ext>
-            </p:extLst>
-          </p:nvPr>
-        </p:nvGraphicFramePr>
-        <p:xfrm>
-          <a:off x="6126480" y="2103120"/>
-          <a:ext cx="5285232" cy="914400"/>
-        </p:xfrm>
-        <a:graphic>
-          <a:graphicData uri="http://schemas.openxmlformats.org/drawingml/2006/table">
-            <a:tbl>
-              <a:tblPr/>
-              <a:tblGrid>
-                <a:gridCol w="1097280"/>
-                <a:gridCol w="1371600"/>
-                <a:gridCol w="1444752"/>
-                <a:gridCol w="1371600"/>
-              </a:tblGrid>
-              <a:tr h="475488">
-                <a:tc>
-                  <a:txBody>
-                    <a:bodyPr/>
-                    <a:lstStyle/>
-                    <a:p>
-                      <a:pPr algn="l" indent="0" marL="0">
-                        <a:buNone/>
-                      </a:pPr>
-                      <a:r>
-                        <a:rPr lang="en-US" sz="1000" b="1" dirty="0">
-                          <a:solidFill>
-                            <a:srgbClr val="FFFFFF"/>
-                          </a:solidFill>
-                          <a:latin typeface="JetBrains Mono" pitchFamily="34" charset="0"/>
-                          <a:ea typeface="JetBrains Mono" pitchFamily="34" charset="-122"/>
-                          <a:cs typeface="JetBrains Mono" pitchFamily="34" charset="-120"/>
-                        </a:rPr>
-                        <a:t>User</a:t>
-                      </a:r>
-                      <a:endParaRPr lang="en-US" sz="1000" dirty="0">
-                        <a:latin typeface="JetBrains Mono" charset="0"/>
-                        <a:ea typeface="JetBrains Mono" charset="0"/>
-                        <a:cs typeface="JetBrains Mono" charset="0"/>
-                      </a:endParaRPr>
-                    </a:p>
-                  </a:txBody>
-                  <a:tcPr marL="5486400" marR="5486400" marT="0" marB="0" anchor="ctr">
-                    <a:lnL w="12700" cap="flat" cmpd="sng" algn="ctr">
-                      <a:solidFill>
-                        <a:srgbClr val="01204E"/>
-                      </a:solidFill>
-                      <a:prstDash val="solid"/>
-                      <a:round/>
-                      <a:headEnd type="none" w="med" len="med"/>
-                      <a:tailEnd type="none" w="med" len="med"/>
-                    </a:lnL>
-                    <a:lnR w="12700" cap="flat" cmpd="sng" algn="ctr">
-                      <a:solidFill>
-                        <a:srgbClr val="01204E"/>
-                      </a:solidFill>
-                      <a:prstDash val="solid"/>
-                      <a:round/>
-                      <a:headEnd type="none" w="med" len="med"/>
-                      <a:tailEnd type="none" w="med" len="med"/>
-                    </a:lnR>
-                    <a:lnT w="12700" cap="flat" cmpd="sng" algn="ctr">
-                      <a:solidFill>
-                        <a:srgbClr val="01204E"/>
-                      </a:solidFill>
-                      <a:prstDash val="solid"/>
-                      <a:round/>
-                      <a:headEnd type="none" w="med" len="med"/>
-                      <a:tailEnd type="none" w="med" len="med"/>
-                    </a:lnT>
-                    <a:lnB w="12700" cap="flat" cmpd="sng" algn="ctr">
-                      <a:solidFill>
-                        <a:srgbClr val="01204E"/>
-                      </a:solidFill>
-                      <a:prstDash val="solid"/>
-                      <a:round/>
-                      <a:headEnd type="none" w="med" len="med"/>
-                      <a:tailEnd type="none" w="med" len="med"/>
-                    </a:lnB>
-                    <a:solidFill>
-                      <a:srgbClr val="028391"/>
-                    </a:solidFill>
-                  </a:tcPr>
-                </a:tc>
-                <a:tc>
-                  <a:txBody>
-                    <a:bodyPr/>
-                    <a:lstStyle/>
-                    <a:p>
-                      <a:pPr algn="l" indent="0" marL="0">
-                        <a:buNone/>
-                      </a:pPr>
-                      <a:r>
-                        <a:rPr lang="en-US" sz="1000" b="1" dirty="0">
-                          <a:solidFill>
-                            <a:srgbClr val="FFFFFF"/>
-                          </a:solidFill>
-                          <a:latin typeface="JetBrains Mono" pitchFamily="34" charset="0"/>
-                          <a:ea typeface="JetBrains Mono" pitchFamily="34" charset="-122"/>
-                          <a:cs typeface="JetBrains Mono" pitchFamily="34" charset="-120"/>
-                        </a:rPr>
-                        <a:t>Model</a:t>
-                      </a:r>
-                      <a:endParaRPr lang="en-US" sz="1000" dirty="0">
-                        <a:latin typeface="JetBrains Mono" charset="0"/>
-                        <a:ea typeface="JetBrains Mono" charset="0"/>
-                        <a:cs typeface="JetBrains Mono" charset="0"/>
-                      </a:endParaRPr>
-                    </a:p>
-                  </a:txBody>
-                  <a:tcPr marL="5486400" marR="5486400" marT="0" marB="0" anchor="ctr">
-                    <a:lnL w="12700" cap="flat" cmpd="sng" algn="ctr">
-                      <a:solidFill>
-                        <a:srgbClr val="01204E"/>
-                      </a:solidFill>
-                      <a:prstDash val="solid"/>
-                      <a:round/>
-                      <a:headEnd type="none" w="med" len="med"/>
-                      <a:tailEnd type="none" w="med" len="med"/>
-                    </a:lnL>
-                    <a:lnR w="12700" cap="flat" cmpd="sng" algn="ctr">
-                      <a:solidFill>
-                        <a:srgbClr val="01204E"/>
-                      </a:solidFill>
-                      <a:prstDash val="solid"/>
-                      <a:round/>
-                      <a:headEnd type="none" w="med" len="med"/>
-                      <a:tailEnd type="none" w="med" len="med"/>
-                    </a:lnR>
-                    <a:lnT w="12700" cap="flat" cmpd="sng" algn="ctr">
-                      <a:solidFill>
-                        <a:srgbClr val="01204E"/>
-                      </a:solidFill>
-                      <a:prstDash val="solid"/>
-                      <a:round/>
-                      <a:headEnd type="none" w="med" len="med"/>
-                      <a:tailEnd type="none" w="med" len="med"/>
-                    </a:lnT>
-                    <a:lnB w="12700" cap="flat" cmpd="sng" algn="ctr">
-                      <a:solidFill>
-                        <a:srgbClr val="01204E"/>
-                      </a:solidFill>
-                      <a:prstDash val="solid"/>
-                      <a:round/>
-                      <a:headEnd type="none" w="med" len="med"/>
-                      <a:tailEnd type="none" w="med" len="med"/>
-                    </a:lnB>
-                    <a:solidFill>
-                      <a:srgbClr val="028391"/>
-                    </a:solidFill>
-                  </a:tcPr>
-                </a:tc>
-                <a:tc>
-                  <a:txBody>
-                    <a:bodyPr/>
-                    <a:lstStyle/>
-                    <a:p>
-                      <a:pPr algn="l" indent="0" marL="0">
-                        <a:buNone/>
-                      </a:pPr>
-                      <a:r>
-                        <a:rPr lang="en-US" sz="1000" b="1" dirty="0">
-                          <a:solidFill>
-                            <a:srgbClr val="FFFFFF"/>
-                          </a:solidFill>
-                          <a:latin typeface="JetBrains Mono" pitchFamily="34" charset="0"/>
-                          <a:ea typeface="JetBrains Mono" pitchFamily="34" charset="-122"/>
-                          <a:cs typeface="JetBrains Mono" pitchFamily="34" charset="-120"/>
-                        </a:rPr>
-                        <a:t>Data Type</a:t>
-                      </a:r>
-                      <a:endParaRPr lang="en-US" sz="1000" dirty="0">
-                        <a:latin typeface="JetBrains Mono" charset="0"/>
-                        <a:ea typeface="JetBrains Mono" charset="0"/>
-                        <a:cs typeface="JetBrains Mono" charset="0"/>
-                      </a:endParaRPr>
-                    </a:p>
-                  </a:txBody>
-                  <a:tcPr marL="5486400" marR="5486400" marT="0" marB="0" anchor="ctr">
-                    <a:lnL w="12700" cap="flat" cmpd="sng" algn="ctr">
-                      <a:solidFill>
-                        <a:srgbClr val="01204E"/>
-                      </a:solidFill>
-                      <a:prstDash val="solid"/>
-                      <a:round/>
-                      <a:headEnd type="none" w="med" len="med"/>
-                      <a:tailEnd type="none" w="med" len="med"/>
-                    </a:lnL>
-                    <a:lnR w="12700" cap="flat" cmpd="sng" algn="ctr">
-                      <a:solidFill>
-                        <a:srgbClr val="01204E"/>
-                      </a:solidFill>
-                      <a:prstDash val="solid"/>
-                      <a:round/>
-                      <a:headEnd type="none" w="med" len="med"/>
-                      <a:tailEnd type="none" w="med" len="med"/>
-                    </a:lnR>
-                    <a:lnT w="12700" cap="flat" cmpd="sng" algn="ctr">
-                      <a:solidFill>
-                        <a:srgbClr val="01204E"/>
-                      </a:solidFill>
-                      <a:prstDash val="solid"/>
-                      <a:round/>
-                      <a:headEnd type="none" w="med" len="med"/>
-                      <a:tailEnd type="none" w="med" len="med"/>
-                    </a:lnT>
-                    <a:lnB w="12700" cap="flat" cmpd="sng" algn="ctr">
-                      <a:solidFill>
-                        <a:srgbClr val="01204E"/>
-                      </a:solidFill>
-                      <a:prstDash val="solid"/>
-                      <a:round/>
-                      <a:headEnd type="none" w="med" len="med"/>
-                      <a:tailEnd type="none" w="med" len="med"/>
-                    </a:lnB>
-                    <a:solidFill>
-                      <a:srgbClr val="028391"/>
-                    </a:solidFill>
-                  </a:tcPr>
-                </a:tc>
-                <a:tc>
-                  <a:txBody>
-                    <a:bodyPr/>
-                    <a:lstStyle/>
-                    <a:p>
-                      <a:pPr algn="l" indent="0" marL="0">
-                        <a:buNone/>
-                      </a:pPr>
-                      <a:r>
-                        <a:rPr lang="en-US" sz="1000" b="1" dirty="0">
-                          <a:solidFill>
-                            <a:srgbClr val="FFFFFF"/>
-                          </a:solidFill>
-                          <a:latin typeface="JetBrains Mono" pitchFamily="34" charset="0"/>
-                          <a:ea typeface="JetBrains Mono" pitchFamily="34" charset="-122"/>
-                          <a:cs typeface="JetBrains Mono" pitchFamily="34" charset="-120"/>
-                        </a:rPr>
-                        <a:t>Status</a:t>
-                      </a:r>
-                      <a:endParaRPr lang="en-US" sz="1000" dirty="0">
-                        <a:latin typeface="JetBrains Mono" charset="0"/>
-                        <a:ea typeface="JetBrains Mono" charset="0"/>
-                        <a:cs typeface="JetBrains Mono" charset="0"/>
-                      </a:endParaRPr>
-                    </a:p>
-                  </a:txBody>
-                  <a:tcPr marL="5486400" marR="5486400" marT="0" marB="0" anchor="ctr">
-                    <a:lnL w="12700" cap="flat" cmpd="sng" algn="ctr">
-                      <a:solidFill>
-                        <a:srgbClr val="01204E"/>
-                      </a:solidFill>
-                      <a:prstDash val="solid"/>
-                      <a:round/>
-                      <a:headEnd type="none" w="med" len="med"/>
-                      <a:tailEnd type="none" w="med" len="med"/>
-                    </a:lnL>
-                    <a:lnR w="12700" cap="flat" cmpd="sng" algn="ctr">
-                      <a:solidFill>
-                        <a:srgbClr val="01204E"/>
-                      </a:solidFill>
-                      <a:prstDash val="solid"/>
-                      <a:round/>
-                      <a:headEnd type="none" w="med" len="med"/>
-                      <a:tailEnd type="none" w="med" len="med"/>
-                    </a:lnR>
-                    <a:lnT w="12700" cap="flat" cmpd="sng" algn="ctr">
-                      <a:solidFill>
-                        <a:srgbClr val="01204E"/>
-                      </a:solidFill>
-                      <a:prstDash val="solid"/>
-                      <a:round/>
-                      <a:headEnd type="none" w="med" len="med"/>
-                      <a:tailEnd type="none" w="med" len="med"/>
-                    </a:lnT>
-                    <a:lnB w="12700" cap="flat" cmpd="sng" algn="ctr">
-                      <a:solidFill>
-                        <a:srgbClr val="01204E"/>
-                      </a:solidFill>
-                      <a:prstDash val="solid"/>
-                      <a:round/>
-                      <a:headEnd type="none" w="med" len="med"/>
-                      <a:tailEnd type="none" w="med" len="med"/>
-                    </a:lnB>
-                    <a:solidFill>
-                      <a:srgbClr val="028391"/>
-                    </a:solidFill>
-                  </a:tcPr>
-                </a:tc>
-              </a:tr>
-              <a:tr h="475488">
-                <a:tc>
-                  <a:txBody>
-                    <a:bodyPr/>
-                    <a:lstStyle/>
-                    <a:p>
-                      <a:pPr algn="l" indent="0" marL="0">
-                        <a:buNone/>
-                      </a:pPr>
-                      <a:r>
-                        <a:rPr lang="en-US" sz="1200" b="1" dirty="0">
-                          <a:solidFill>
-                            <a:srgbClr val="FFFFFF"/>
-                          </a:solidFill>
-                          <a:latin typeface="Inter" pitchFamily="34" charset="0"/>
-                          <a:ea typeface="Inter" pitchFamily="34" charset="-122"/>
-                          <a:cs typeface="Inter" pitchFamily="34" charset="-120"/>
-                        </a:rPr>
-                        <a:t>a.chen</a:t>
-                      </a:r>
-                      <a:endParaRPr lang="en-US" sz="1200" dirty="0">
-                        <a:latin typeface="Inter" charset="0"/>
-                        <a:ea typeface="Inter" charset="0"/>
-                        <a:cs typeface="Inter" charset="0"/>
-                      </a:endParaRPr>
-                    </a:p>
-                  </a:txBody>
-                  <a:tcPr marL="5486400" marR="5486400" marT="0" marB="0" anchor="ctr">
-                    <a:lnL w="12700" cap="flat" cmpd="sng" algn="ctr">
-                      <a:solidFill>
-                        <a:srgbClr val="01204E"/>
-                      </a:solidFill>
-                      <a:prstDash val="solid"/>
-                      <a:round/>
-                      <a:headEnd type="none" w="med" len="med"/>
-                      <a:tailEnd type="none" w="med" len="med"/>
-                    </a:lnL>
-                    <a:lnR w="12700" cap="flat" cmpd="sng" algn="ctr">
-                      <a:solidFill>
-                        <a:srgbClr val="01204E"/>
-                      </a:solidFill>
-                      <a:prstDash val="solid"/>
-                      <a:round/>
-                      <a:headEnd type="none" w="med" len="med"/>
-                      <a:tailEnd type="none" w="med" len="med"/>
-                    </a:lnR>
-                    <a:lnT w="12700" cap="flat" cmpd="sng" algn="ctr">
-                      <a:solidFill>
-                        <a:srgbClr val="01204E"/>
-                      </a:solidFill>
-                      <a:prstDash val="solid"/>
-                      <a:round/>
-                      <a:headEnd type="none" w="med" len="med"/>
-                      <a:tailEnd type="none" w="med" len="med"/>
-                    </a:lnT>
-                    <a:lnB w="12700" cap="flat" cmpd="sng" algn="ctr">
-                      <a:solidFill>
-                        <a:srgbClr val="01204E"/>
-                      </a:solidFill>
-                      <a:prstDash val="solid"/>
-                      <a:round/>
-                      <a:headEnd type="none" w="med" len="med"/>
-                      <a:tailEnd type="none" w="med" len="med"/>
-                    </a:lnB>
-                    <a:solidFill>
-                      <a:srgbClr val="0A2C5E"/>
-                    </a:solidFill>
-                  </a:tcPr>
-                </a:tc>
-                <a:tc>
-                  <a:txBody>
-                    <a:bodyPr/>
-                    <a:lstStyle/>
-                    <a:p>
-                      <a:pPr algn="l" indent="0" marL="0">
-                        <a:buNone/>
-                      </a:pPr>
-                      <a:r>
-                        <a:rPr lang="en-US" sz="1200" dirty="0">
-                          <a:solidFill>
-                            <a:srgbClr val="FFFFFF"/>
-                          </a:solidFill>
-                          <a:latin typeface="Inter" pitchFamily="34" charset="0"/>
-                          <a:ea typeface="Inter" pitchFamily="34" charset="-122"/>
-                          <a:cs typeface="Inter" pitchFamily="34" charset="-120"/>
-                        </a:rPr>
-                        <a:t>GPT-4o</a:t>
-                      </a:r>
-                      <a:endParaRPr lang="en-US" sz="1200" dirty="0">
-                        <a:latin typeface="Inter" charset="0"/>
-                        <a:ea typeface="Inter" charset="0"/>
-                        <a:cs typeface="Inter" charset="0"/>
-                      </a:endParaRPr>
-                    </a:p>
-                  </a:txBody>
-                  <a:tcPr marL="5486400" marR="5486400" marT="0" marB="0" anchor="ctr">
-                    <a:lnL w="12700" cap="flat" cmpd="sng" algn="ctr">
-                      <a:solidFill>
-                        <a:srgbClr val="01204E"/>
-                      </a:solidFill>
-                      <a:prstDash val="solid"/>
-                      <a:round/>
-                      <a:headEnd type="none" w="med" len="med"/>
-                      <a:tailEnd type="none" w="med" len="med"/>
-                    </a:lnL>
-                    <a:lnR w="12700" cap="flat" cmpd="sng" algn="ctr">
-                      <a:solidFill>
-                        <a:srgbClr val="01204E"/>
-                      </a:solidFill>
-                      <a:prstDash val="solid"/>
-                      <a:round/>
-                      <a:headEnd type="none" w="med" len="med"/>
-                      <a:tailEnd type="none" w="med" len="med"/>
-                    </a:lnR>
-                    <a:lnT w="12700" cap="flat" cmpd="sng" algn="ctr">
-                      <a:solidFill>
-                        <a:srgbClr val="01204E"/>
-                      </a:solidFill>
-                      <a:prstDash val="solid"/>
-                      <a:round/>
-                      <a:headEnd type="none" w="med" len="med"/>
-                      <a:tailEnd type="none" w="med" len="med"/>
-                    </a:lnT>
-                    <a:lnB w="12700" cap="flat" cmpd="sng" algn="ctr">
-                      <a:solidFill>
-                        <a:srgbClr val="01204E"/>
-                      </a:solidFill>
-                      <a:prstDash val="solid"/>
-                      <a:round/>
-                      <a:headEnd type="none" w="med" len="med"/>
-                      <a:tailEnd type="none" w="med" len="med"/>
-                    </a:lnB>
-                    <a:solidFill>
-                      <a:srgbClr val="0A2C5E"/>
-                    </a:solidFill>
-                  </a:tcPr>
-                </a:tc>
-                <a:tc>
-                  <a:txBody>
-                    <a:bodyPr/>
-                    <a:lstStyle/>
-                    <a:p>
-                      <a:pPr algn="l" indent="0" marL="0">
-                        <a:buNone/>
-                      </a:pPr>
-                      <a:r>
-                        <a:rPr lang="en-US" sz="1200" dirty="0">
-                          <a:solidFill>
-                            <a:srgbClr val="FFFFFF"/>
-                          </a:solidFill>
-                          <a:latin typeface="Inter" pitchFamily="34" charset="0"/>
-                          <a:ea typeface="Inter" pitchFamily="34" charset="-122"/>
-                          <a:cs typeface="Inter" pitchFamily="34" charset="-120"/>
-                        </a:rPr>
-                        <a:t>Customer PII</a:t>
-                      </a:r>
-                      <a:endParaRPr lang="en-US" sz="1200" dirty="0">
-                        <a:latin typeface="Inter" charset="0"/>
-                        <a:ea typeface="Inter" charset="0"/>
-                        <a:cs typeface="Inter" charset="0"/>
-                      </a:endParaRPr>
-                    </a:p>
-                  </a:txBody>
-                  <a:tcPr marL="5486400" marR="5486400" marT="0" marB="0" anchor="ctr">
-                    <a:lnL w="12700" cap="flat" cmpd="sng" algn="ctr">
-                      <a:solidFill>
-                        <a:srgbClr val="01204E"/>
-                      </a:solidFill>
-                      <a:prstDash val="solid"/>
-                      <a:round/>
-                      <a:headEnd type="none" w="med" len="med"/>
-                      <a:tailEnd type="none" w="med" len="med"/>
-                    </a:lnL>
-                    <a:lnR w="12700" cap="flat" cmpd="sng" algn="ctr">
-                      <a:solidFill>
-                        <a:srgbClr val="01204E"/>
-                      </a:solidFill>
-                      <a:prstDash val="solid"/>
-                      <a:round/>
-                      <a:headEnd type="none" w="med" len="med"/>
-                      <a:tailEnd type="none" w="med" len="med"/>
-                    </a:lnR>
-                    <a:lnT w="12700" cap="flat" cmpd="sng" algn="ctr">
-                      <a:solidFill>
-                        <a:srgbClr val="01204E"/>
-                      </a:solidFill>
-                      <a:prstDash val="solid"/>
-                      <a:round/>
-                      <a:headEnd type="none" w="med" len="med"/>
-                      <a:tailEnd type="none" w="med" len="med"/>
-                    </a:lnT>
-                    <a:lnB w="12700" cap="flat" cmpd="sng" algn="ctr">
-                      <a:solidFill>
-                        <a:srgbClr val="01204E"/>
-                      </a:solidFill>
-                      <a:prstDash val="solid"/>
-                      <a:round/>
-                      <a:headEnd type="none" w="med" len="med"/>
-                      <a:tailEnd type="none" w="med" len="med"/>
-                    </a:lnB>
-                    <a:solidFill>
-                      <a:srgbClr val="0A2C5E"/>
-                    </a:solidFill>
-                  </a:tcPr>
-                </a:tc>
-                <a:tc>
-                  <a:txBody>
-                    <a:bodyPr/>
-                    <a:lstStyle/>
-                    <a:p>
-                      <a:pPr algn="l" indent="0" marL="0">
-                        <a:buNone/>
-                      </a:pPr>
-                      <a:r>
-                        <a:rPr lang="en-US" sz="1200" dirty="0">
-                          <a:solidFill>
-                            <a:srgbClr val="4DA394"/>
-                          </a:solidFill>
-                          <a:latin typeface="Inter" pitchFamily="34" charset="0"/>
-                          <a:ea typeface="Inter" pitchFamily="34" charset="-122"/>
-                          <a:cs typeface="Inter" pitchFamily="34" charset="-120"/>
-                        </a:rPr>
-                        <a:t>● Protected</a:t>
-                      </a:r>
-                      <a:endParaRPr lang="en-US" sz="1200" dirty="0">
-                        <a:latin typeface="Inter" charset="0"/>
-                        <a:ea typeface="Inter" charset="0"/>
-                        <a:cs typeface="Inter" charset="0"/>
-                      </a:endParaRPr>
-                    </a:p>
-                  </a:txBody>
-                  <a:tcPr marL="5486400" marR="5486400" marT="0" marB="0" anchor="ctr">
-                    <a:lnL w="12700" cap="flat" cmpd="sng" algn="ctr">
-                      <a:solidFill>
-                        <a:srgbClr val="01204E"/>
-                      </a:solidFill>
-                      <a:prstDash val="solid"/>
-                      <a:round/>
-                      <a:headEnd type="none" w="med" len="med"/>
-                      <a:tailEnd type="none" w="med" len="med"/>
-                    </a:lnL>
-                    <a:lnR w="12700" cap="flat" cmpd="sng" algn="ctr">
-                      <a:solidFill>
-                        <a:srgbClr val="01204E"/>
-                      </a:solidFill>
-                      <a:prstDash val="solid"/>
-                      <a:round/>
-                      <a:headEnd type="none" w="med" len="med"/>
-                      <a:tailEnd type="none" w="med" len="med"/>
-                    </a:lnR>
-                    <a:lnT w="12700" cap="flat" cmpd="sng" algn="ctr">
-                      <a:solidFill>
-                        <a:srgbClr val="01204E"/>
-                      </a:solidFill>
-                      <a:prstDash val="solid"/>
-                      <a:round/>
-                      <a:headEnd type="none" w="med" len="med"/>
-                      <a:tailEnd type="none" w="med" len="med"/>
-                    </a:lnT>
-                    <a:lnB w="12700" cap="flat" cmpd="sng" algn="ctr">
-                      <a:solidFill>
-                        <a:srgbClr val="01204E"/>
-                      </a:solidFill>
-                      <a:prstDash val="solid"/>
-                      <a:round/>
-                      <a:headEnd type="none" w="med" len="med"/>
-                      <a:tailEnd type="none" w="med" len="med"/>
-                    </a:lnB>
-                    <a:solidFill>
-                      <a:srgbClr val="0A2C5E"/>
-                    </a:solidFill>
-                  </a:tcPr>
-                </a:tc>
-              </a:tr>
-              <a:tr h="475488">
-                <a:tc>
-                  <a:txBody>
-                    <a:bodyPr/>
-                    <a:lstStyle/>
-                    <a:p>
-                      <a:pPr algn="l" indent="0" marL="0">
-                        <a:buNone/>
-                      </a:pPr>
-                      <a:r>
-                        <a:rPr lang="en-US" sz="1200" b="1" dirty="0">
-                          <a:solidFill>
-                            <a:srgbClr val="FFFFFF"/>
-                          </a:solidFill>
-                          <a:latin typeface="Inter" pitchFamily="34" charset="0"/>
-                          <a:ea typeface="Inter" pitchFamily="34" charset="-122"/>
-                          <a:cs typeface="Inter" pitchFamily="34" charset="-120"/>
-                        </a:rPr>
-                        <a:t>m.ruiz</a:t>
-                      </a:r>
-                      <a:endParaRPr lang="en-US" sz="1200" dirty="0">
-                        <a:latin typeface="Inter" charset="0"/>
-                        <a:ea typeface="Inter" charset="0"/>
-                        <a:cs typeface="Inter" charset="0"/>
-                      </a:endParaRPr>
-                    </a:p>
-                  </a:txBody>
-                  <a:tcPr marL="5486400" marR="5486400" marT="0" marB="0" anchor="ctr">
-                    <a:lnL w="12700" cap="flat" cmpd="sng" algn="ctr">
-                      <a:solidFill>
-                        <a:srgbClr val="01204E"/>
-                      </a:solidFill>
-                      <a:prstDash val="solid"/>
-                      <a:round/>
-                      <a:headEnd type="none" w="med" len="med"/>
-                      <a:tailEnd type="none" w="med" len="med"/>
-                    </a:lnL>
-                    <a:lnR w="12700" cap="flat" cmpd="sng" algn="ctr">
-                      <a:solidFill>
-                        <a:srgbClr val="01204E"/>
-                      </a:solidFill>
-                      <a:prstDash val="solid"/>
-                      <a:round/>
-                      <a:headEnd type="none" w="med" len="med"/>
-                      <a:tailEnd type="none" w="med" len="med"/>
-                    </a:lnR>
-                    <a:lnT w="12700" cap="flat" cmpd="sng" algn="ctr">
-                      <a:solidFill>
-                        <a:srgbClr val="01204E"/>
-                      </a:solidFill>
-                      <a:prstDash val="solid"/>
-                      <a:round/>
-                      <a:headEnd type="none" w="med" len="med"/>
-                      <a:tailEnd type="none" w="med" len="med"/>
-                    </a:lnT>
-                    <a:lnB w="12700" cap="flat" cmpd="sng" algn="ctr">
-                      <a:solidFill>
-                        <a:srgbClr val="01204E"/>
-                      </a:solidFill>
-                      <a:prstDash val="solid"/>
-                      <a:round/>
-                      <a:headEnd type="none" w="med" len="med"/>
-                      <a:tailEnd type="none" w="med" len="med"/>
-                    </a:lnB>
-                    <a:solidFill>
-                      <a:srgbClr val="01142F"/>
-                    </a:solidFill>
-                  </a:tcPr>
-                </a:tc>
-                <a:tc>
-                  <a:txBody>
-                    <a:bodyPr/>
-                    <a:lstStyle/>
-                    <a:p>
-                      <a:pPr algn="l" indent="0" marL="0">
-                        <a:buNone/>
-                      </a:pPr>
-                      <a:r>
-                        <a:rPr lang="en-US" sz="1200" dirty="0">
-                          <a:solidFill>
-                            <a:srgbClr val="FFFFFF"/>
-                          </a:solidFill>
-                          <a:latin typeface="Inter" pitchFamily="34" charset="0"/>
-                          <a:ea typeface="Inter" pitchFamily="34" charset="-122"/>
-                          <a:cs typeface="Inter" pitchFamily="34" charset="-120"/>
-                        </a:rPr>
-                        <a:t>Claude</a:t>
-                      </a:r>
-                      <a:endParaRPr lang="en-US" sz="1200" dirty="0">
-                        <a:latin typeface="Inter" charset="0"/>
-                        <a:ea typeface="Inter" charset="0"/>
-                        <a:cs typeface="Inter" charset="0"/>
-                      </a:endParaRPr>
-                    </a:p>
-                  </a:txBody>
-                  <a:tcPr marL="5486400" marR="5486400" marT="0" marB="0" anchor="ctr">
-                    <a:lnL w="12700" cap="flat" cmpd="sng" algn="ctr">
-                      <a:solidFill>
-                        <a:srgbClr val="01204E"/>
-                      </a:solidFill>
-                      <a:prstDash val="solid"/>
-                      <a:round/>
-                      <a:headEnd type="none" w="med" len="med"/>
-                      <a:tailEnd type="none" w="med" len="med"/>
-                    </a:lnL>
-                    <a:lnR w="12700" cap="flat" cmpd="sng" algn="ctr">
-                      <a:solidFill>
-                        <a:srgbClr val="01204E"/>
-                      </a:solidFill>
-                      <a:prstDash val="solid"/>
-                      <a:round/>
-                      <a:headEnd type="none" w="med" len="med"/>
-                      <a:tailEnd type="none" w="med" len="med"/>
-                    </a:lnR>
-                    <a:lnT w="12700" cap="flat" cmpd="sng" algn="ctr">
-                      <a:solidFill>
-                        <a:srgbClr val="01204E"/>
-                      </a:solidFill>
-                      <a:prstDash val="solid"/>
-                      <a:round/>
-                      <a:headEnd type="none" w="med" len="med"/>
-                      <a:tailEnd type="none" w="med" len="med"/>
-                    </a:lnT>
-                    <a:lnB w="12700" cap="flat" cmpd="sng" algn="ctr">
-                      <a:solidFill>
-                        <a:srgbClr val="01204E"/>
-                      </a:solidFill>
-                      <a:prstDash val="solid"/>
-                      <a:round/>
-                      <a:headEnd type="none" w="med" len="med"/>
-                      <a:tailEnd type="none" w="med" len="med"/>
-                    </a:lnB>
-                    <a:solidFill>
-                      <a:srgbClr val="01142F"/>
-                    </a:solidFill>
-                  </a:tcPr>
-                </a:tc>
-                <a:tc>
-                  <a:txBody>
-                    <a:bodyPr/>
-                    <a:lstStyle/>
-                    <a:p>
-                      <a:pPr algn="l" indent="0" marL="0">
-                        <a:buNone/>
-                      </a:pPr>
-                      <a:r>
-                        <a:rPr lang="en-US" sz="1200" dirty="0">
-                          <a:solidFill>
-                            <a:srgbClr val="FFFFFF"/>
-                          </a:solidFill>
-                          <a:latin typeface="Inter" pitchFamily="34" charset="0"/>
-                          <a:ea typeface="Inter" pitchFamily="34" charset="-122"/>
-                          <a:cs typeface="Inter" pitchFamily="34" charset="-120"/>
-                        </a:rPr>
-                        <a:t>Financial</a:t>
-                      </a:r>
-                      <a:endParaRPr lang="en-US" sz="1200" dirty="0">
-                        <a:latin typeface="Inter" charset="0"/>
-                        <a:ea typeface="Inter" charset="0"/>
-                        <a:cs typeface="Inter" charset="0"/>
-                      </a:endParaRPr>
-                    </a:p>
-                  </a:txBody>
-                  <a:tcPr marL="5486400" marR="5486400" marT="0" marB="0" anchor="ctr">
-                    <a:lnL w="12700" cap="flat" cmpd="sng" algn="ctr">
-                      <a:solidFill>
-                        <a:srgbClr val="01204E"/>
-                      </a:solidFill>
-                      <a:prstDash val="solid"/>
-                      <a:round/>
-                      <a:headEnd type="none" w="med" len="med"/>
-                      <a:tailEnd type="none" w="med" len="med"/>
-                    </a:lnL>
-                    <a:lnR w="12700" cap="flat" cmpd="sng" algn="ctr">
-                      <a:solidFill>
-                        <a:srgbClr val="01204E"/>
-                      </a:solidFill>
-                      <a:prstDash val="solid"/>
-                      <a:round/>
-                      <a:headEnd type="none" w="med" len="med"/>
-                      <a:tailEnd type="none" w="med" len="med"/>
-                    </a:lnR>
-                    <a:lnT w="12700" cap="flat" cmpd="sng" algn="ctr">
-                      <a:solidFill>
-                        <a:srgbClr val="01204E"/>
-                      </a:solidFill>
-                      <a:prstDash val="solid"/>
-                      <a:round/>
-                      <a:headEnd type="none" w="med" len="med"/>
-                      <a:tailEnd type="none" w="med" len="med"/>
-                    </a:lnT>
-                    <a:lnB w="12700" cap="flat" cmpd="sng" algn="ctr">
-                      <a:solidFill>
-                        <a:srgbClr val="01204E"/>
-                      </a:solidFill>
-                      <a:prstDash val="solid"/>
-                      <a:round/>
-                      <a:headEnd type="none" w="med" len="med"/>
-                      <a:tailEnd type="none" w="med" len="med"/>
-                    </a:lnB>
-                    <a:solidFill>
-                      <a:srgbClr val="01142F"/>
-                    </a:solidFill>
-                  </a:tcPr>
-                </a:tc>
-                <a:tc>
-                  <a:txBody>
-                    <a:bodyPr/>
-                    <a:lstStyle/>
-                    <a:p>
-                      <a:pPr algn="l" indent="0" marL="0">
-                        <a:buNone/>
-                      </a:pPr>
-                      <a:r>
-                        <a:rPr lang="en-US" sz="1200" dirty="0">
-                          <a:solidFill>
-                            <a:srgbClr val="4DA394"/>
-                          </a:solidFill>
-                          <a:latin typeface="Inter" pitchFamily="34" charset="0"/>
-                          <a:ea typeface="Inter" pitchFamily="34" charset="-122"/>
-                          <a:cs typeface="Inter" pitchFamily="34" charset="-120"/>
-                        </a:rPr>
-                        <a:t>● Protected</a:t>
-                      </a:r>
-                      <a:endParaRPr lang="en-US" sz="1200" dirty="0">
-                        <a:latin typeface="Inter" charset="0"/>
-                        <a:ea typeface="Inter" charset="0"/>
-                        <a:cs typeface="Inter" charset="0"/>
-                      </a:endParaRPr>
-                    </a:p>
-                  </a:txBody>
-                  <a:tcPr marL="5486400" marR="5486400" marT="0" marB="0" anchor="ctr">
-                    <a:lnL w="12700" cap="flat" cmpd="sng" algn="ctr">
-                      <a:solidFill>
-                        <a:srgbClr val="01204E"/>
-                      </a:solidFill>
-                      <a:prstDash val="solid"/>
-                      <a:round/>
-                      <a:headEnd type="none" w="med" len="med"/>
-                      <a:tailEnd type="none" w="med" len="med"/>
-                    </a:lnL>
-                    <a:lnR w="12700" cap="flat" cmpd="sng" algn="ctr">
-                      <a:solidFill>
-                        <a:srgbClr val="01204E"/>
-                      </a:solidFill>
-                      <a:prstDash val="solid"/>
-                      <a:round/>
-                      <a:headEnd type="none" w="med" len="med"/>
-                      <a:tailEnd type="none" w="med" len="med"/>
-                    </a:lnR>
-                    <a:lnT w="12700" cap="flat" cmpd="sng" algn="ctr">
-                      <a:solidFill>
-                        <a:srgbClr val="01204E"/>
-                      </a:solidFill>
-                      <a:prstDash val="solid"/>
-                      <a:round/>
-                      <a:headEnd type="none" w="med" len="med"/>
-                      <a:tailEnd type="none" w="med" len="med"/>
-                    </a:lnT>
-                    <a:lnB w="12700" cap="flat" cmpd="sng" algn="ctr">
-                      <a:solidFill>
-                        <a:srgbClr val="01204E"/>
-                      </a:solidFill>
-                      <a:prstDash val="solid"/>
-                      <a:round/>
-                      <a:headEnd type="none" w="med" len="med"/>
-                      <a:tailEnd type="none" w="med" len="med"/>
-                    </a:lnB>
-                    <a:solidFill>
-                      <a:srgbClr val="01142F"/>
-                    </a:solidFill>
-                  </a:tcPr>
-                </a:tc>
-              </a:tr>
-              <a:tr h="475488">
-                <a:tc>
-                  <a:txBody>
-                    <a:bodyPr/>
-                    <a:lstStyle/>
-                    <a:p>
-                      <a:pPr algn="l" indent="0" marL="0">
-                        <a:buNone/>
-                      </a:pPr>
-                      <a:r>
-                        <a:rPr lang="en-US" sz="1200" b="1" dirty="0">
-                          <a:solidFill>
-                            <a:srgbClr val="FFFFFF"/>
-                          </a:solidFill>
-                          <a:latin typeface="Inter" pitchFamily="34" charset="0"/>
-                          <a:ea typeface="Inter" pitchFamily="34" charset="-122"/>
-                          <a:cs typeface="Inter" pitchFamily="34" charset="-120"/>
-                        </a:rPr>
-                        <a:t>j.park</a:t>
-                      </a:r>
-                      <a:endParaRPr lang="en-US" sz="1200" dirty="0">
-                        <a:latin typeface="Inter" charset="0"/>
-                        <a:ea typeface="Inter" charset="0"/>
-                        <a:cs typeface="Inter" charset="0"/>
-                      </a:endParaRPr>
-                    </a:p>
-                  </a:txBody>
-                  <a:tcPr marL="5486400" marR="5486400" marT="0" marB="0" anchor="ctr">
-                    <a:lnL w="12700" cap="flat" cmpd="sng" algn="ctr">
-                      <a:solidFill>
-                        <a:srgbClr val="01204E"/>
-                      </a:solidFill>
-                      <a:prstDash val="solid"/>
-                      <a:round/>
-                      <a:headEnd type="none" w="med" len="med"/>
-                      <a:tailEnd type="none" w="med" len="med"/>
-                    </a:lnL>
-                    <a:lnR w="12700" cap="flat" cmpd="sng" algn="ctr">
-                      <a:solidFill>
-                        <a:srgbClr val="01204E"/>
-                      </a:solidFill>
-                      <a:prstDash val="solid"/>
-                      <a:round/>
-                      <a:headEnd type="none" w="med" len="med"/>
-                      <a:tailEnd type="none" w="med" len="med"/>
-                    </a:lnR>
-                    <a:lnT w="12700" cap="flat" cmpd="sng" algn="ctr">
-                      <a:solidFill>
-                        <a:srgbClr val="01204E"/>
-                      </a:solidFill>
-                      <a:prstDash val="solid"/>
-                      <a:round/>
-                      <a:headEnd type="none" w="med" len="med"/>
-                      <a:tailEnd type="none" w="med" len="med"/>
-                    </a:lnT>
-                    <a:lnB w="12700" cap="flat" cmpd="sng" algn="ctr">
-                      <a:solidFill>
-                        <a:srgbClr val="01204E"/>
-                      </a:solidFill>
-                      <a:prstDash val="solid"/>
-                      <a:round/>
-                      <a:headEnd type="none" w="med" len="med"/>
-                      <a:tailEnd type="none" w="med" len="med"/>
-                    </a:lnB>
-                    <a:solidFill>
-                      <a:srgbClr val="0A2C5E"/>
-                    </a:solidFill>
-                  </a:tcPr>
-                </a:tc>
-                <a:tc>
-                  <a:txBody>
-                    <a:bodyPr/>
-                    <a:lstStyle/>
-                    <a:p>
-                      <a:pPr algn="l" indent="0" marL="0">
-                        <a:buNone/>
-                      </a:pPr>
-                      <a:r>
-                        <a:rPr lang="en-US" sz="1200" dirty="0">
-                          <a:solidFill>
-                            <a:srgbClr val="FFFFFF"/>
-                          </a:solidFill>
-                          <a:latin typeface="Inter" pitchFamily="34" charset="0"/>
-                          <a:ea typeface="Inter" pitchFamily="34" charset="-122"/>
-                          <a:cs typeface="Inter" pitchFamily="34" charset="-120"/>
-                        </a:rPr>
-                        <a:t>Gemini</a:t>
-                      </a:r>
-                      <a:endParaRPr lang="en-US" sz="1200" dirty="0">
-                        <a:latin typeface="Inter" charset="0"/>
-                        <a:ea typeface="Inter" charset="0"/>
-                        <a:cs typeface="Inter" charset="0"/>
-                      </a:endParaRPr>
-                    </a:p>
-                  </a:txBody>
-                  <a:tcPr marL="5486400" marR="5486400" marT="0" marB="0" anchor="ctr">
-                    <a:lnL w="12700" cap="flat" cmpd="sng" algn="ctr">
-                      <a:solidFill>
-                        <a:srgbClr val="01204E"/>
-                      </a:solidFill>
-                      <a:prstDash val="solid"/>
-                      <a:round/>
-                      <a:headEnd type="none" w="med" len="med"/>
-                      <a:tailEnd type="none" w="med" len="med"/>
-                    </a:lnL>
-                    <a:lnR w="12700" cap="flat" cmpd="sng" algn="ctr">
-                      <a:solidFill>
-                        <a:srgbClr val="01204E"/>
-                      </a:solidFill>
-                      <a:prstDash val="solid"/>
-                      <a:round/>
-                      <a:headEnd type="none" w="med" len="med"/>
-                      <a:tailEnd type="none" w="med" len="med"/>
-                    </a:lnR>
-                    <a:lnT w="12700" cap="flat" cmpd="sng" algn="ctr">
-                      <a:solidFill>
-                        <a:srgbClr val="01204E"/>
-                      </a:solidFill>
-                      <a:prstDash val="solid"/>
-                      <a:round/>
-                      <a:headEnd type="none" w="med" len="med"/>
-                      <a:tailEnd type="none" w="med" len="med"/>
-                    </a:lnT>
-                    <a:lnB w="12700" cap="flat" cmpd="sng" algn="ctr">
-                      <a:solidFill>
-                        <a:srgbClr val="01204E"/>
-                      </a:solidFill>
-                      <a:prstDash val="solid"/>
-                      <a:round/>
-                      <a:headEnd type="none" w="med" len="med"/>
-                      <a:tailEnd type="none" w="med" len="med"/>
-                    </a:lnB>
-                    <a:solidFill>
-                      <a:srgbClr val="0A2C5E"/>
-                    </a:solidFill>
-                  </a:tcPr>
-                </a:tc>
-                <a:tc>
-                  <a:txBody>
-                    <a:bodyPr/>
-                    <a:lstStyle/>
-                    <a:p>
-                      <a:pPr algn="l" indent="0" marL="0">
-                        <a:buNone/>
-                      </a:pPr>
-                      <a:r>
-                        <a:rPr lang="en-US" sz="1200" dirty="0">
-                          <a:solidFill>
-                            <a:srgbClr val="FFFFFF"/>
-                          </a:solidFill>
-                          <a:latin typeface="Inter" pitchFamily="34" charset="0"/>
-                          <a:ea typeface="Inter" pitchFamily="34" charset="-122"/>
-                          <a:cs typeface="Inter" pitchFamily="34" charset="-120"/>
-                        </a:rPr>
-                        <a:t>Source code</a:t>
-                      </a:r>
-                      <a:endParaRPr lang="en-US" sz="1200" dirty="0">
-                        <a:latin typeface="Inter" charset="0"/>
-                        <a:ea typeface="Inter" charset="0"/>
-                        <a:cs typeface="Inter" charset="0"/>
-                      </a:endParaRPr>
-                    </a:p>
-                  </a:txBody>
-                  <a:tcPr marL="5486400" marR="5486400" marT="0" marB="0" anchor="ctr">
-                    <a:lnL w="12700" cap="flat" cmpd="sng" algn="ctr">
-                      <a:solidFill>
-                        <a:srgbClr val="01204E"/>
-                      </a:solidFill>
-                      <a:prstDash val="solid"/>
-                      <a:round/>
-                      <a:headEnd type="none" w="med" len="med"/>
-                      <a:tailEnd type="none" w="med" len="med"/>
-                    </a:lnL>
-                    <a:lnR w="12700" cap="flat" cmpd="sng" algn="ctr">
-                      <a:solidFill>
-                        <a:srgbClr val="01204E"/>
-                      </a:solidFill>
-                      <a:prstDash val="solid"/>
-                      <a:round/>
-                      <a:headEnd type="none" w="med" len="med"/>
-                      <a:tailEnd type="none" w="med" len="med"/>
-                    </a:lnR>
-                    <a:lnT w="12700" cap="flat" cmpd="sng" algn="ctr">
-                      <a:solidFill>
-                        <a:srgbClr val="01204E"/>
-                      </a:solidFill>
-                      <a:prstDash val="solid"/>
-                      <a:round/>
-                      <a:headEnd type="none" w="med" len="med"/>
-                      <a:tailEnd type="none" w="med" len="med"/>
-                    </a:lnT>
-                    <a:lnB w="12700" cap="flat" cmpd="sng" algn="ctr">
-                      <a:solidFill>
-                        <a:srgbClr val="01204E"/>
-                      </a:solidFill>
-                      <a:prstDash val="solid"/>
-                      <a:round/>
-                      <a:headEnd type="none" w="med" len="med"/>
-                      <a:tailEnd type="none" w="med" len="med"/>
-                    </a:lnB>
-                    <a:solidFill>
-                      <a:srgbClr val="0A2C5E"/>
-                    </a:solidFill>
-                  </a:tcPr>
-                </a:tc>
-                <a:tc>
-                  <a:txBody>
-                    <a:bodyPr/>
-                    <a:lstStyle/>
-                    <a:p>
-                      <a:pPr algn="l" indent="0" marL="0">
-                        <a:buNone/>
-                      </a:pPr>
-                      <a:r>
-                        <a:rPr lang="en-US" sz="1200" dirty="0">
-                          <a:solidFill>
-                            <a:srgbClr val="4DA394"/>
-                          </a:solidFill>
-                          <a:latin typeface="Inter" pitchFamily="34" charset="0"/>
-                          <a:ea typeface="Inter" pitchFamily="34" charset="-122"/>
-                          <a:cs typeface="Inter" pitchFamily="34" charset="-120"/>
-                        </a:rPr>
-                        <a:t>● Protected</a:t>
-                      </a:r>
-                      <a:endParaRPr lang="en-US" sz="1200" dirty="0">
-                        <a:latin typeface="Inter" charset="0"/>
-                        <a:ea typeface="Inter" charset="0"/>
-                        <a:cs typeface="Inter" charset="0"/>
-                      </a:endParaRPr>
-                    </a:p>
-                  </a:txBody>
-                  <a:tcPr marL="5486400" marR="5486400" marT="0" marB="0" anchor="ctr">
-                    <a:lnL w="12700" cap="flat" cmpd="sng" algn="ctr">
-                      <a:solidFill>
-                        <a:srgbClr val="01204E"/>
-                      </a:solidFill>
-                      <a:prstDash val="solid"/>
-                      <a:round/>
-                      <a:headEnd type="none" w="med" len="med"/>
-                      <a:tailEnd type="none" w="med" len="med"/>
-                    </a:lnL>
-                    <a:lnR w="12700" cap="flat" cmpd="sng" algn="ctr">
-                      <a:solidFill>
-                        <a:srgbClr val="01204E"/>
-                      </a:solidFill>
-                      <a:prstDash val="solid"/>
-                      <a:round/>
-                      <a:headEnd type="none" w="med" len="med"/>
-                      <a:tailEnd type="none" w="med" len="med"/>
-                    </a:lnR>
-                    <a:lnT w="12700" cap="flat" cmpd="sng" algn="ctr">
-                      <a:solidFill>
-                        <a:srgbClr val="01204E"/>
-                      </a:solidFill>
-                      <a:prstDash val="solid"/>
-                      <a:round/>
-                      <a:headEnd type="none" w="med" len="med"/>
-                      <a:tailEnd type="none" w="med" len="med"/>
-                    </a:lnT>
-                    <a:lnB w="12700" cap="flat" cmpd="sng" algn="ctr">
-                      <a:solidFill>
-                        <a:srgbClr val="01204E"/>
-                      </a:solidFill>
-                      <a:prstDash val="solid"/>
-                      <a:round/>
-                      <a:headEnd type="none" w="med" len="med"/>
-                      <a:tailEnd type="none" w="med" len="med"/>
-                    </a:lnB>
-                    <a:solidFill>
-                      <a:srgbClr val="0A2C5E"/>
-                    </a:solidFill>
-                  </a:tcPr>
-                </a:tc>
-              </a:tr>
-              <a:tr h="475488">
-                <a:tc>
-                  <a:txBody>
-                    <a:bodyPr/>
-                    <a:lstStyle/>
-                    <a:p>
-                      <a:pPr algn="l" indent="0" marL="0">
-                        <a:buNone/>
-                      </a:pPr>
-                      <a:r>
-                        <a:rPr lang="en-US" sz="1200" b="1" dirty="0">
-                          <a:solidFill>
-                            <a:srgbClr val="FFFFFF"/>
-                          </a:solidFill>
-                          <a:latin typeface="Inter" pitchFamily="34" charset="0"/>
-                          <a:ea typeface="Inter" pitchFamily="34" charset="-122"/>
-                          <a:cs typeface="Inter" pitchFamily="34" charset="-120"/>
-                        </a:rPr>
-                        <a:t>s.okoro</a:t>
-                      </a:r>
-                      <a:endParaRPr lang="en-US" sz="1200" dirty="0">
-                        <a:latin typeface="Inter" charset="0"/>
-                        <a:ea typeface="Inter" charset="0"/>
-                        <a:cs typeface="Inter" charset="0"/>
-                      </a:endParaRPr>
-                    </a:p>
-                  </a:txBody>
-                  <a:tcPr marL="5486400" marR="5486400" marT="0" marB="0" anchor="ctr">
-                    <a:lnL w="12700" cap="flat" cmpd="sng" algn="ctr">
-                      <a:solidFill>
-                        <a:srgbClr val="01204E"/>
-                      </a:solidFill>
-                      <a:prstDash val="solid"/>
-                      <a:round/>
-                      <a:headEnd type="none" w="med" len="med"/>
-                      <a:tailEnd type="none" w="med" len="med"/>
-                    </a:lnL>
-                    <a:lnR w="12700" cap="flat" cmpd="sng" algn="ctr">
-                      <a:solidFill>
-                        <a:srgbClr val="01204E"/>
-                      </a:solidFill>
-                      <a:prstDash val="solid"/>
-                      <a:round/>
-                      <a:headEnd type="none" w="med" len="med"/>
-                      <a:tailEnd type="none" w="med" len="med"/>
-                    </a:lnR>
-                    <a:lnT w="12700" cap="flat" cmpd="sng" algn="ctr">
-                      <a:solidFill>
-                        <a:srgbClr val="01204E"/>
-                      </a:solidFill>
-                      <a:prstDash val="solid"/>
-                      <a:round/>
-                      <a:headEnd type="none" w="med" len="med"/>
-                      <a:tailEnd type="none" w="med" len="med"/>
-                    </a:lnT>
-                    <a:lnB w="12700" cap="flat" cmpd="sng" algn="ctr">
-                      <a:solidFill>
-                        <a:srgbClr val="01204E"/>
-                      </a:solidFill>
-                      <a:prstDash val="solid"/>
-                      <a:round/>
-                      <a:headEnd type="none" w="med" len="med"/>
-                      <a:tailEnd type="none" w="med" len="med"/>
-                    </a:lnB>
-                    <a:solidFill>
-                      <a:srgbClr val="01142F"/>
-                    </a:solidFill>
-                  </a:tcPr>
-                </a:tc>
-                <a:tc>
-                  <a:txBody>
-                    <a:bodyPr/>
-                    <a:lstStyle/>
-                    <a:p>
-                      <a:pPr algn="l" indent="0" marL="0">
-                        <a:buNone/>
-                      </a:pPr>
-                      <a:r>
-                        <a:rPr lang="en-US" sz="1200" dirty="0">
-                          <a:solidFill>
-                            <a:srgbClr val="FFFFFF"/>
-                          </a:solidFill>
-                          <a:latin typeface="Inter" pitchFamily="34" charset="0"/>
-                          <a:ea typeface="Inter" pitchFamily="34" charset="-122"/>
-                          <a:cs typeface="Inter" pitchFamily="34" charset="-120"/>
-                        </a:rPr>
-                        <a:t>Llama (on-prem)</a:t>
-                      </a:r>
-                      <a:endParaRPr lang="en-US" sz="1200" dirty="0">
-                        <a:latin typeface="Inter" charset="0"/>
-                        <a:ea typeface="Inter" charset="0"/>
-                        <a:cs typeface="Inter" charset="0"/>
-                      </a:endParaRPr>
-                    </a:p>
-                  </a:txBody>
-                  <a:tcPr marL="5486400" marR="5486400" marT="0" marB="0" anchor="ctr">
-                    <a:lnL w="12700" cap="flat" cmpd="sng" algn="ctr">
-                      <a:solidFill>
-                        <a:srgbClr val="01204E"/>
-                      </a:solidFill>
-                      <a:prstDash val="solid"/>
-                      <a:round/>
-                      <a:headEnd type="none" w="med" len="med"/>
-                      <a:tailEnd type="none" w="med" len="med"/>
-                    </a:lnL>
-                    <a:lnR w="12700" cap="flat" cmpd="sng" algn="ctr">
-                      <a:solidFill>
-                        <a:srgbClr val="01204E"/>
-                      </a:solidFill>
-                      <a:prstDash val="solid"/>
-                      <a:round/>
-                      <a:headEnd type="none" w="med" len="med"/>
-                      <a:tailEnd type="none" w="med" len="med"/>
-                    </a:lnR>
-                    <a:lnT w="12700" cap="flat" cmpd="sng" algn="ctr">
-                      <a:solidFill>
-                        <a:srgbClr val="01204E"/>
-                      </a:solidFill>
-                      <a:prstDash val="solid"/>
-                      <a:round/>
-                      <a:headEnd type="none" w="med" len="med"/>
-                      <a:tailEnd type="none" w="med" len="med"/>
-                    </a:lnT>
-                    <a:lnB w="12700" cap="flat" cmpd="sng" algn="ctr">
-                      <a:solidFill>
-                        <a:srgbClr val="01204E"/>
-                      </a:solidFill>
-                      <a:prstDash val="solid"/>
-                      <a:round/>
-                      <a:headEnd type="none" w="med" len="med"/>
-                      <a:tailEnd type="none" w="med" len="med"/>
-                    </a:lnB>
-                    <a:solidFill>
-                      <a:srgbClr val="01142F"/>
-                    </a:solidFill>
-                  </a:tcPr>
-                </a:tc>
-                <a:tc>
-                  <a:txBody>
-                    <a:bodyPr/>
-                    <a:lstStyle/>
-                    <a:p>
-                      <a:pPr algn="l" indent="0" marL="0">
-                        <a:buNone/>
-                      </a:pPr>
-                      <a:r>
-                        <a:rPr lang="en-US" sz="1200" dirty="0">
-                          <a:solidFill>
-                            <a:srgbClr val="FFFFFF"/>
-                          </a:solidFill>
-                          <a:latin typeface="Inter" pitchFamily="34" charset="0"/>
-                          <a:ea typeface="Inter" pitchFamily="34" charset="-122"/>
-                          <a:cs typeface="Inter" pitchFamily="34" charset="-120"/>
-                        </a:rPr>
-                        <a:t>PHI</a:t>
-                      </a:r>
-                      <a:endParaRPr lang="en-US" sz="1200" dirty="0">
-                        <a:latin typeface="Inter" charset="0"/>
-                        <a:ea typeface="Inter" charset="0"/>
-                        <a:cs typeface="Inter" charset="0"/>
-                      </a:endParaRPr>
-                    </a:p>
-                  </a:txBody>
-                  <a:tcPr marL="5486400" marR="5486400" marT="0" marB="0" anchor="ctr">
-                    <a:lnL w="12700" cap="flat" cmpd="sng" algn="ctr">
-                      <a:solidFill>
-                        <a:srgbClr val="01204E"/>
-                      </a:solidFill>
-                      <a:prstDash val="solid"/>
-                      <a:round/>
-                      <a:headEnd type="none" w="med" len="med"/>
-                      <a:tailEnd type="none" w="med" len="med"/>
-                    </a:lnL>
-                    <a:lnR w="12700" cap="flat" cmpd="sng" algn="ctr">
-                      <a:solidFill>
-                        <a:srgbClr val="01204E"/>
-                      </a:solidFill>
-                      <a:prstDash val="solid"/>
-                      <a:round/>
-                      <a:headEnd type="none" w="med" len="med"/>
-                      <a:tailEnd type="none" w="med" len="med"/>
-                    </a:lnR>
-                    <a:lnT w="12700" cap="flat" cmpd="sng" algn="ctr">
-                      <a:solidFill>
-                        <a:srgbClr val="01204E"/>
-                      </a:solidFill>
-                      <a:prstDash val="solid"/>
-                      <a:round/>
-                      <a:headEnd type="none" w="med" len="med"/>
-                      <a:tailEnd type="none" w="med" len="med"/>
-                    </a:lnT>
-                    <a:lnB w="12700" cap="flat" cmpd="sng" algn="ctr">
-                      <a:solidFill>
-                        <a:srgbClr val="01204E"/>
-                      </a:solidFill>
-                      <a:prstDash val="solid"/>
-                      <a:round/>
-                      <a:headEnd type="none" w="med" len="med"/>
-                      <a:tailEnd type="none" w="med" len="med"/>
-                    </a:lnB>
-                    <a:solidFill>
-                      <a:srgbClr val="01142F"/>
-                    </a:solidFill>
-                  </a:tcPr>
-                </a:tc>
-                <a:tc>
-                  <a:txBody>
-                    <a:bodyPr/>
-                    <a:lstStyle/>
-                    <a:p>
-                      <a:pPr algn="l" indent="0" marL="0">
-                        <a:buNone/>
-                      </a:pPr>
-                      <a:r>
-                        <a:rPr lang="en-US" sz="1200" dirty="0">
-                          <a:solidFill>
-                            <a:srgbClr val="FAA968"/>
-                          </a:solidFill>
-                          <a:latin typeface="Inter" pitchFamily="34" charset="0"/>
-                          <a:ea typeface="Inter" pitchFamily="34" charset="-122"/>
-                          <a:cs typeface="Inter" pitchFamily="34" charset="-120"/>
-                        </a:rPr>
-                        <a:t>● Masked + flagged</a:t>
-                      </a:r>
-                      <a:endParaRPr lang="en-US" sz="1200" dirty="0">
-                        <a:latin typeface="Inter" charset="0"/>
-                        <a:ea typeface="Inter" charset="0"/>
-                        <a:cs typeface="Inter" charset="0"/>
-                      </a:endParaRPr>
-                    </a:p>
-                  </a:txBody>
-                  <a:tcPr marL="5486400" marR="5486400" marT="0" marB="0" anchor="ctr">
-                    <a:lnL w="12700" cap="flat" cmpd="sng" algn="ctr">
-                      <a:solidFill>
-                        <a:srgbClr val="01204E"/>
-                      </a:solidFill>
-                      <a:prstDash val="solid"/>
-                      <a:round/>
-                      <a:headEnd type="none" w="med" len="med"/>
-                      <a:tailEnd type="none" w="med" len="med"/>
-                    </a:lnL>
-                    <a:lnR w="12700" cap="flat" cmpd="sng" algn="ctr">
-                      <a:solidFill>
-                        <a:srgbClr val="01204E"/>
-                      </a:solidFill>
-                      <a:prstDash val="solid"/>
-                      <a:round/>
-                      <a:headEnd type="none" w="med" len="med"/>
-                      <a:tailEnd type="none" w="med" len="med"/>
-                    </a:lnR>
-                    <a:lnT w="12700" cap="flat" cmpd="sng" algn="ctr">
-                      <a:solidFill>
-                        <a:srgbClr val="01204E"/>
-                      </a:solidFill>
-                      <a:prstDash val="solid"/>
-                      <a:round/>
-                      <a:headEnd type="none" w="med" len="med"/>
-                      <a:tailEnd type="none" w="med" len="med"/>
-                    </a:lnT>
-                    <a:lnB w="12700" cap="flat" cmpd="sng" algn="ctr">
-                      <a:solidFill>
-                        <a:srgbClr val="01204E"/>
-                      </a:solidFill>
-                      <a:prstDash val="solid"/>
-                      <a:round/>
-                      <a:headEnd type="none" w="med" len="med"/>
-                      <a:tailEnd type="none" w="med" len="med"/>
-                    </a:lnB>
-                    <a:solidFill>
-                      <a:srgbClr val="01142F"/>
-                    </a:solidFill>
-                  </a:tcPr>
-                </a:tc>
-              </a:tr>
-              <a:tr h="475488">
-                <a:tc>
-                  <a:txBody>
-                    <a:bodyPr/>
-                    <a:lstStyle/>
-                    <a:p>
-                      <a:pPr algn="l" indent="0" marL="0">
-                        <a:buNone/>
-                      </a:pPr>
-                      <a:r>
-                        <a:rPr lang="en-US" sz="1200" b="1" dirty="0">
-                          <a:solidFill>
-                            <a:srgbClr val="FFFFFF"/>
-                          </a:solidFill>
-                          <a:latin typeface="Inter" pitchFamily="34" charset="0"/>
-                          <a:ea typeface="Inter" pitchFamily="34" charset="-122"/>
-                          <a:cs typeface="Inter" pitchFamily="34" charset="-120"/>
-                        </a:rPr>
-                        <a:t>d.lang</a:t>
-                      </a:r>
-                      <a:endParaRPr lang="en-US" sz="1200" dirty="0">
-                        <a:latin typeface="Inter" charset="0"/>
-                        <a:ea typeface="Inter" charset="0"/>
-                        <a:cs typeface="Inter" charset="0"/>
-                      </a:endParaRPr>
-                    </a:p>
-                  </a:txBody>
-                  <a:tcPr marL="5486400" marR="5486400" marT="0" marB="0" anchor="ctr">
-                    <a:lnL w="12700" cap="flat" cmpd="sng" algn="ctr">
-                      <a:solidFill>
-                        <a:srgbClr val="01204E"/>
-                      </a:solidFill>
-                      <a:prstDash val="solid"/>
-                      <a:round/>
-                      <a:headEnd type="none" w="med" len="med"/>
-                      <a:tailEnd type="none" w="med" len="med"/>
-                    </a:lnL>
-                    <a:lnR w="12700" cap="flat" cmpd="sng" algn="ctr">
-                      <a:solidFill>
-                        <a:srgbClr val="01204E"/>
-                      </a:solidFill>
-                      <a:prstDash val="solid"/>
-                      <a:round/>
-                      <a:headEnd type="none" w="med" len="med"/>
-                      <a:tailEnd type="none" w="med" len="med"/>
-                    </a:lnR>
-                    <a:lnT w="12700" cap="flat" cmpd="sng" algn="ctr">
-                      <a:solidFill>
-                        <a:srgbClr val="01204E"/>
-                      </a:solidFill>
-                      <a:prstDash val="solid"/>
-                      <a:round/>
-                      <a:headEnd type="none" w="med" len="med"/>
-                      <a:tailEnd type="none" w="med" len="med"/>
-                    </a:lnT>
-                    <a:lnB w="12700" cap="flat" cmpd="sng" algn="ctr">
-                      <a:solidFill>
-                        <a:srgbClr val="01204E"/>
-                      </a:solidFill>
-                      <a:prstDash val="solid"/>
-                      <a:round/>
-                      <a:headEnd type="none" w="med" len="med"/>
-                      <a:tailEnd type="none" w="med" len="med"/>
-                    </a:lnB>
-                    <a:solidFill>
-                      <a:srgbClr val="0A2C5E"/>
-                    </a:solidFill>
-                  </a:tcPr>
-                </a:tc>
-                <a:tc>
-                  <a:txBody>
-                    <a:bodyPr/>
-                    <a:lstStyle/>
-                    <a:p>
-                      <a:pPr algn="l" indent="0" marL="0">
-                        <a:buNone/>
-                      </a:pPr>
-                      <a:r>
-                        <a:rPr lang="en-US" sz="1200" dirty="0">
-                          <a:solidFill>
-                            <a:srgbClr val="FFFFFF"/>
-                          </a:solidFill>
-                          <a:latin typeface="Inter" pitchFamily="34" charset="0"/>
-                          <a:ea typeface="Inter" pitchFamily="34" charset="-122"/>
-                          <a:cs typeface="Inter" pitchFamily="34" charset="-120"/>
-                        </a:rPr>
-                        <a:t>GPT-4o</a:t>
-                      </a:r>
-                      <a:endParaRPr lang="en-US" sz="1200" dirty="0">
-                        <a:latin typeface="Inter" charset="0"/>
-                        <a:ea typeface="Inter" charset="0"/>
-                        <a:cs typeface="Inter" charset="0"/>
-                      </a:endParaRPr>
-                    </a:p>
-                  </a:txBody>
-                  <a:tcPr marL="5486400" marR="5486400" marT="0" marB="0" anchor="ctr">
-                    <a:lnL w="12700" cap="flat" cmpd="sng" algn="ctr">
-                      <a:solidFill>
-                        <a:srgbClr val="01204E"/>
-                      </a:solidFill>
-                      <a:prstDash val="solid"/>
-                      <a:round/>
-                      <a:headEnd type="none" w="med" len="med"/>
-                      <a:tailEnd type="none" w="med" len="med"/>
-                    </a:lnL>
-                    <a:lnR w="12700" cap="flat" cmpd="sng" algn="ctr">
-                      <a:solidFill>
-                        <a:srgbClr val="01204E"/>
-                      </a:solidFill>
-                      <a:prstDash val="solid"/>
-                      <a:round/>
-                      <a:headEnd type="none" w="med" len="med"/>
-                      <a:tailEnd type="none" w="med" len="med"/>
-                    </a:lnR>
-                    <a:lnT w="12700" cap="flat" cmpd="sng" algn="ctr">
-                      <a:solidFill>
-                        <a:srgbClr val="01204E"/>
-                      </a:solidFill>
-                      <a:prstDash val="solid"/>
-                      <a:round/>
-                      <a:headEnd type="none" w="med" len="med"/>
-                      <a:tailEnd type="none" w="med" len="med"/>
-                    </a:lnT>
-                    <a:lnB w="12700" cap="flat" cmpd="sng" algn="ctr">
-                      <a:solidFill>
-                        <a:srgbClr val="01204E"/>
-                      </a:solidFill>
-                      <a:prstDash val="solid"/>
-                      <a:round/>
-                      <a:headEnd type="none" w="med" len="med"/>
-                      <a:tailEnd type="none" w="med" len="med"/>
-                    </a:lnB>
-                    <a:solidFill>
-                      <a:srgbClr val="0A2C5E"/>
-                    </a:solidFill>
-                  </a:tcPr>
-                </a:tc>
-                <a:tc>
-                  <a:txBody>
-                    <a:bodyPr/>
-                    <a:lstStyle/>
-                    <a:p>
-                      <a:pPr algn="l" indent="0" marL="0">
-                        <a:buNone/>
-                      </a:pPr>
-                      <a:r>
-                        <a:rPr lang="en-US" sz="1200" dirty="0">
-                          <a:solidFill>
-                            <a:srgbClr val="FFFFFF"/>
-                          </a:solidFill>
-                          <a:latin typeface="Inter" pitchFamily="34" charset="0"/>
-                          <a:ea typeface="Inter" pitchFamily="34" charset="-122"/>
-                          <a:cs typeface="Inter" pitchFamily="34" charset="-120"/>
-                        </a:rPr>
-                        <a:t>API keys</a:t>
-                      </a:r>
-                      <a:endParaRPr lang="en-US" sz="1200" dirty="0">
-                        <a:latin typeface="Inter" charset="0"/>
-                        <a:ea typeface="Inter" charset="0"/>
-                        <a:cs typeface="Inter" charset="0"/>
-                      </a:endParaRPr>
-                    </a:p>
-                  </a:txBody>
-                  <a:tcPr marL="5486400" marR="5486400" marT="0" marB="0" anchor="ctr">
-                    <a:lnL w="12700" cap="flat" cmpd="sng" algn="ctr">
-                      <a:solidFill>
-                        <a:srgbClr val="01204E"/>
-                      </a:solidFill>
-                      <a:prstDash val="solid"/>
-                      <a:round/>
-                      <a:headEnd type="none" w="med" len="med"/>
-                      <a:tailEnd type="none" w="med" len="med"/>
-                    </a:lnL>
-                    <a:lnR w="12700" cap="flat" cmpd="sng" algn="ctr">
-                      <a:solidFill>
-                        <a:srgbClr val="01204E"/>
-                      </a:solidFill>
-                      <a:prstDash val="solid"/>
-                      <a:round/>
-                      <a:headEnd type="none" w="med" len="med"/>
-                      <a:tailEnd type="none" w="med" len="med"/>
-                    </a:lnR>
-                    <a:lnT w="12700" cap="flat" cmpd="sng" algn="ctr">
-                      <a:solidFill>
-                        <a:srgbClr val="01204E"/>
-                      </a:solidFill>
-                      <a:prstDash val="solid"/>
-                      <a:round/>
-                      <a:headEnd type="none" w="med" len="med"/>
-                      <a:tailEnd type="none" w="med" len="med"/>
-                    </a:lnT>
-                    <a:lnB w="12700" cap="flat" cmpd="sng" algn="ctr">
-                      <a:solidFill>
-                        <a:srgbClr val="01204E"/>
-                      </a:solidFill>
-                      <a:prstDash val="solid"/>
-                      <a:round/>
-                      <a:headEnd type="none" w="med" len="med"/>
-                      <a:tailEnd type="none" w="med" len="med"/>
-                    </a:lnB>
-                    <a:solidFill>
-                      <a:srgbClr val="0A2C5E"/>
-                    </a:solidFill>
-                  </a:tcPr>
-                </a:tc>
-                <a:tc>
-                  <a:txBody>
-                    <a:bodyPr/>
-                    <a:lstStyle/>
-                    <a:p>
-                      <a:pPr algn="l" indent="0" marL="0">
-                        <a:buNone/>
-                      </a:pPr>
-                      <a:r>
-                        <a:rPr lang="en-US" sz="1200" dirty="0">
-                          <a:solidFill>
-                            <a:srgbClr val="4DA394"/>
-                          </a:solidFill>
-                          <a:latin typeface="Inter" pitchFamily="34" charset="0"/>
-                          <a:ea typeface="Inter" pitchFamily="34" charset="-122"/>
-                          <a:cs typeface="Inter" pitchFamily="34" charset="-120"/>
-                        </a:rPr>
-                        <a:t>● Protected</a:t>
-                      </a:r>
-                      <a:endParaRPr lang="en-US" sz="1200" dirty="0">
-                        <a:latin typeface="Inter" charset="0"/>
-                        <a:ea typeface="Inter" charset="0"/>
-                        <a:cs typeface="Inter" charset="0"/>
-                      </a:endParaRPr>
-                    </a:p>
-                  </a:txBody>
-                  <a:tcPr marL="5486400" marR="5486400" marT="0" marB="0" anchor="ctr">
-                    <a:lnL w="12700" cap="flat" cmpd="sng" algn="ctr">
-                      <a:solidFill>
-                        <a:srgbClr val="01204E"/>
-                      </a:solidFill>
-                      <a:prstDash val="solid"/>
-                      <a:round/>
-                      <a:headEnd type="none" w="med" len="med"/>
-                      <a:tailEnd type="none" w="med" len="med"/>
-                    </a:lnL>
-                    <a:lnR w="12700" cap="flat" cmpd="sng" algn="ctr">
-                      <a:solidFill>
-                        <a:srgbClr val="01204E"/>
-                      </a:solidFill>
-                      <a:prstDash val="solid"/>
-                      <a:round/>
-                      <a:headEnd type="none" w="med" len="med"/>
-                      <a:tailEnd type="none" w="med" len="med"/>
-                    </a:lnR>
-                    <a:lnT w="12700" cap="flat" cmpd="sng" algn="ctr">
-                      <a:solidFill>
-                        <a:srgbClr val="01204E"/>
-                      </a:solidFill>
-                      <a:prstDash val="solid"/>
-                      <a:round/>
-                      <a:headEnd type="none" w="med" len="med"/>
-                      <a:tailEnd type="none" w="med" len="med"/>
-                    </a:lnT>
-                    <a:lnB w="12700" cap="flat" cmpd="sng" algn="ctr">
-                      <a:solidFill>
-                        <a:srgbClr val="01204E"/>
-                      </a:solidFill>
-                      <a:prstDash val="solid"/>
-                      <a:round/>
-                      <a:headEnd type="none" w="med" len="med"/>
-                      <a:tailEnd type="none" w="med" len="med"/>
-                    </a:lnB>
-                    <a:solidFill>
-                      <a:srgbClr val="0A2C5E"/>
-                    </a:solidFill>
-                  </a:tcPr>
-                </a:tc>
-              </a:tr>
-            </a:tbl>
-          </a:graphicData>
-        </a:graphic>
-      </p:graphicFrame>
       <p:pic>
         <p:nvPicPr>
-          <p:cNvPr id="24" name="Image 3" descr="assets/pp-logo-light.png">    </p:cNvPr>
+          <p:cNvPr id="24" name="Image 3" descr="assets/pp-logo-light.png"/>
           <p:cNvPicPr>
             <a:picLocks noChangeAspect="1"/>
           </p:cNvPicPr>
@@ -13414,11 +10845,11 @@
           <a:bodyPr wrap="square" lIns="0" tIns="0" rIns="0" bIns="0" rtlCol="0" anchor="ctr"/>
           <a:lstStyle/>
           <a:p>
-            <a:pPr algn="r" indent="0" marL="0">
-              <a:buNone/>
-            </a:pPr>
-            <a:r>
-              <a:rPr lang="en-US" sz="1000" spc="200" kern="0" dirty="0">
+            <a:pPr marL="0" indent="0" algn="r">
+              <a:buNone/>
+            </a:pPr>
+            <a:r>
+              <a:rPr lang="en-US" sz="1000" kern="0" spc="200" dirty="0">
                 <a:solidFill>
                   <a:srgbClr val="9DB0C9"/>
                 </a:solidFill>
@@ -13733,4 +11164,319 @@
     </a:ext>
   </a:extLst>
 </a:theme>
+</file>
+
+<file path=ppt/theme/theme2.xml><?xml version="1.0" encoding="utf-8"?>
+<a:theme xmlns:a="http://schemas.openxmlformats.org/drawingml/2006/main" name="Office Theme">
+  <a:themeElements>
+    <a:clrScheme name="Office">
+      <a:dk1>
+        <a:sysClr val="windowText" lastClr="000000"/>
+      </a:dk1>
+      <a:lt1>
+        <a:sysClr val="window" lastClr="FFFFFF"/>
+      </a:lt1>
+      <a:dk2>
+        <a:srgbClr val="0E2841"/>
+      </a:dk2>
+      <a:lt2>
+        <a:srgbClr val="E8E8E8"/>
+      </a:lt2>
+      <a:accent1>
+        <a:srgbClr val="156082"/>
+      </a:accent1>
+      <a:accent2>
+        <a:srgbClr val="E97132"/>
+      </a:accent2>
+      <a:accent3>
+        <a:srgbClr val="196B24"/>
+      </a:accent3>
+      <a:accent4>
+        <a:srgbClr val="0F9ED5"/>
+      </a:accent4>
+      <a:accent5>
+        <a:srgbClr val="A02B93"/>
+      </a:accent5>
+      <a:accent6>
+        <a:srgbClr val="4EA72E"/>
+      </a:accent6>
+      <a:hlink>
+        <a:srgbClr val="467886"/>
+      </a:hlink>
+      <a:folHlink>
+        <a:srgbClr val="96607D"/>
+      </a:folHlink>
+    </a:clrScheme>
+    <a:fontScheme name="Office">
+      <a:majorFont>
+        <a:latin typeface="Aptos Display" panose="02110004020202020204"/>
+        <a:ea typeface=""/>
+        <a:cs typeface=""/>
+        <a:font script="Jpan" typeface="游ゴシック Light"/>
+        <a:font script="Hang" typeface="맑은 고딕"/>
+        <a:font script="Hans" typeface="等线 Light"/>
+        <a:font script="Hant" typeface="新細明體"/>
+        <a:font script="Arab" typeface="Times New Roman"/>
+        <a:font script="Hebr" typeface="Times New Roman"/>
+        <a:font script="Thai" typeface="Angsana New"/>
+        <a:font script="Ethi" typeface="Nyala"/>
+        <a:font script="Beng" typeface="Vrinda"/>
+        <a:font script="Gujr" typeface="Shruti"/>
+        <a:font script="Khmr" typeface="MoolBoran"/>
+        <a:font script="Knda" typeface="Tunga"/>
+        <a:font script="Guru" typeface="Raavi"/>
+        <a:font script="Cans" typeface="Euphemia"/>
+        <a:font script="Cher" typeface="Plantagenet Cherokee"/>
+        <a:font script="Yiii" typeface="Microsoft Yi Baiti"/>
+        <a:font script="Tibt" typeface="Microsoft Himalaya"/>
+        <a:font script="Thaa" typeface="MV Boli"/>
+        <a:font script="Deva" typeface="Mangal"/>
+        <a:font script="Telu" typeface="Gautami"/>
+        <a:font script="Taml" typeface="Latha"/>
+        <a:font script="Syrc" typeface="Estrangelo Edessa"/>
+        <a:font script="Orya" typeface="Kalinga"/>
+        <a:font script="Mlym" typeface="Kartika"/>
+        <a:font script="Laoo" typeface="DokChampa"/>
+        <a:font script="Sinh" typeface="Iskoola Pota"/>
+        <a:font script="Mong" typeface="Mongolian Baiti"/>
+        <a:font script="Viet" typeface="Times New Roman"/>
+        <a:font script="Uigh" typeface="Microsoft Uighur"/>
+        <a:font script="Geor" typeface="Sylfaen"/>
+        <a:font script="Armn" typeface="Arial"/>
+        <a:font script="Bugi" typeface="Leelawadee UI"/>
+        <a:font script="Bopo" typeface="Microsoft JhengHei"/>
+        <a:font script="Java" typeface="Javanese Text"/>
+        <a:font script="Lisu" typeface="Segoe UI"/>
+        <a:font script="Mymr" typeface="Myanmar Text"/>
+        <a:font script="Nkoo" typeface="Ebrima"/>
+        <a:font script="Olck" typeface="Nirmala UI"/>
+        <a:font script="Osma" typeface="Ebrima"/>
+        <a:font script="Phag" typeface="Phagspa"/>
+        <a:font script="Syrn" typeface="Estrangelo Edessa"/>
+        <a:font script="Syrj" typeface="Estrangelo Edessa"/>
+        <a:font script="Syre" typeface="Estrangelo Edessa"/>
+        <a:font script="Sora" typeface="Nirmala UI"/>
+        <a:font script="Tale" typeface="Microsoft Tai Le"/>
+        <a:font script="Talu" typeface="Microsoft New Tai Lue"/>
+        <a:font script="Tfng" typeface="Ebrima"/>
+      </a:majorFont>
+      <a:minorFont>
+        <a:latin typeface="Aptos" panose="02110004020202020204"/>
+        <a:ea typeface=""/>
+        <a:cs typeface=""/>
+        <a:font script="Jpan" typeface="游ゴシック"/>
+        <a:font script="Hang" typeface="맑은 고딕"/>
+        <a:font script="Hans" typeface="等线"/>
+        <a:font script="Hant" typeface="新細明體"/>
+        <a:font script="Arab" typeface="Arial"/>
+        <a:font script="Hebr" typeface="Arial"/>
+        <a:font script="Thai" typeface="Cordia New"/>
+        <a:font script="Ethi" typeface="Nyala"/>
+        <a:font script="Beng" typeface="Vrinda"/>
+        <a:font script="Gujr" typeface="Shruti"/>
+        <a:font script="Khmr" typeface="DaunPenh"/>
+        <a:font script="Knda" typeface="Tunga"/>
+        <a:font script="Guru" typeface="Raavi"/>
+        <a:font script="Cans" typeface="Euphemia"/>
+        <a:font script="Cher" typeface="Plantagenet Cherokee"/>
+        <a:font script="Yiii" typeface="Microsoft Yi Baiti"/>
+        <a:font script="Tibt" typeface="Microsoft Himalaya"/>
+        <a:font script="Thaa" typeface="MV Boli"/>
+        <a:font script="Deva" typeface="Mangal"/>
+        <a:font script="Telu" typeface="Gautami"/>
+        <a:font script="Taml" typeface="Latha"/>
+        <a:font script="Syrc" typeface="Estrangelo Edessa"/>
+        <a:font script="Orya" typeface="Kalinga"/>
+        <a:font script="Mlym" typeface="Kartika"/>
+        <a:font script="Laoo" typeface="DokChampa"/>
+        <a:font script="Sinh" typeface="Iskoola Pota"/>
+        <a:font script="Mong" typeface="Mongolian Baiti"/>
+        <a:font script="Viet" typeface="Arial"/>
+        <a:font script="Uigh" typeface="Microsoft Uighur"/>
+        <a:font script="Geor" typeface="Sylfaen"/>
+        <a:font script="Armn" typeface="Arial"/>
+        <a:font script="Bugi" typeface="Leelawadee UI"/>
+        <a:font script="Bopo" typeface="Microsoft JhengHei"/>
+        <a:font script="Java" typeface="Javanese Text"/>
+        <a:font script="Lisu" typeface="Segoe UI"/>
+        <a:font script="Mymr" typeface="Myanmar Text"/>
+        <a:font script="Nkoo" typeface="Ebrima"/>
+        <a:font script="Olck" typeface="Nirmala UI"/>
+        <a:font script="Osma" typeface="Ebrima"/>
+        <a:font script="Phag" typeface="Phagspa"/>
+        <a:font script="Syrn" typeface="Estrangelo Edessa"/>
+        <a:font script="Syrj" typeface="Estrangelo Edessa"/>
+        <a:font script="Syre" typeface="Estrangelo Edessa"/>
+        <a:font script="Sora" typeface="Nirmala UI"/>
+        <a:font script="Tale" typeface="Microsoft Tai Le"/>
+        <a:font script="Talu" typeface="Microsoft New Tai Lue"/>
+        <a:font script="Tfng" typeface="Ebrima"/>
+      </a:minorFont>
+    </a:fontScheme>
+    <a:fmtScheme name="Office">
+      <a:fillStyleLst>
+        <a:solidFill>
+          <a:schemeClr val="phClr"/>
+        </a:solidFill>
+        <a:gradFill rotWithShape="1">
+          <a:gsLst>
+            <a:gs pos="0">
+              <a:schemeClr val="phClr">
+                <a:lumMod val="110000"/>
+                <a:satMod val="105000"/>
+                <a:tint val="67000"/>
+              </a:schemeClr>
+            </a:gs>
+            <a:gs pos="50000">
+              <a:schemeClr val="phClr">
+                <a:lumMod val="105000"/>
+                <a:satMod val="103000"/>
+                <a:tint val="73000"/>
+              </a:schemeClr>
+            </a:gs>
+            <a:gs pos="100000">
+              <a:schemeClr val="phClr">
+                <a:lumMod val="105000"/>
+                <a:satMod val="109000"/>
+                <a:tint val="81000"/>
+              </a:schemeClr>
+            </a:gs>
+          </a:gsLst>
+          <a:lin ang="5400000" scaled="0"/>
+        </a:gradFill>
+        <a:gradFill rotWithShape="1">
+          <a:gsLst>
+            <a:gs pos="0">
+              <a:schemeClr val="phClr">
+                <a:satMod val="103000"/>
+                <a:lumMod val="102000"/>
+                <a:tint val="94000"/>
+              </a:schemeClr>
+            </a:gs>
+            <a:gs pos="50000">
+              <a:schemeClr val="phClr">
+                <a:satMod val="110000"/>
+                <a:lumMod val="100000"/>
+                <a:shade val="100000"/>
+              </a:schemeClr>
+            </a:gs>
+            <a:gs pos="100000">
+              <a:schemeClr val="phClr">
+                <a:lumMod val="99000"/>
+                <a:satMod val="120000"/>
+                <a:shade val="78000"/>
+              </a:schemeClr>
+            </a:gs>
+          </a:gsLst>
+          <a:lin ang="5400000" scaled="0"/>
+        </a:gradFill>
+      </a:fillStyleLst>
+      <a:lnStyleLst>
+        <a:ln w="12700" cap="flat" cmpd="sng" algn="ctr">
+          <a:solidFill>
+            <a:schemeClr val="phClr"/>
+          </a:solidFill>
+          <a:prstDash val="solid"/>
+          <a:miter lim="800000"/>
+        </a:ln>
+        <a:ln w="19050" cap="flat" cmpd="sng" algn="ctr">
+          <a:solidFill>
+            <a:schemeClr val="phClr"/>
+          </a:solidFill>
+          <a:prstDash val="solid"/>
+          <a:miter lim="800000"/>
+        </a:ln>
+        <a:ln w="25400" cap="flat" cmpd="sng" algn="ctr">
+          <a:solidFill>
+            <a:schemeClr val="phClr"/>
+          </a:solidFill>
+          <a:prstDash val="solid"/>
+          <a:miter lim="800000"/>
+        </a:ln>
+      </a:lnStyleLst>
+      <a:effectStyleLst>
+        <a:effectStyle>
+          <a:effectLst/>
+        </a:effectStyle>
+        <a:effectStyle>
+          <a:effectLst/>
+        </a:effectStyle>
+        <a:effectStyle>
+          <a:effectLst>
+            <a:outerShdw blurRad="57150" dist="19050" dir="5400000" algn="ctr" rotWithShape="0">
+              <a:srgbClr val="000000">
+                <a:alpha val="63000"/>
+              </a:srgbClr>
+            </a:outerShdw>
+          </a:effectLst>
+        </a:effectStyle>
+      </a:effectStyleLst>
+      <a:bgFillStyleLst>
+        <a:solidFill>
+          <a:schemeClr val="phClr"/>
+        </a:solidFill>
+        <a:solidFill>
+          <a:schemeClr val="phClr">
+            <a:tint val="95000"/>
+            <a:satMod val="170000"/>
+          </a:schemeClr>
+        </a:solidFill>
+        <a:gradFill rotWithShape="1">
+          <a:gsLst>
+            <a:gs pos="0">
+              <a:schemeClr val="phClr">
+                <a:tint val="93000"/>
+                <a:satMod val="150000"/>
+                <a:shade val="98000"/>
+                <a:lumMod val="102000"/>
+              </a:schemeClr>
+            </a:gs>
+            <a:gs pos="50000">
+              <a:schemeClr val="phClr">
+                <a:tint val="98000"/>
+                <a:satMod val="130000"/>
+                <a:shade val="90000"/>
+                <a:lumMod val="103000"/>
+              </a:schemeClr>
+            </a:gs>
+            <a:gs pos="100000">
+              <a:schemeClr val="phClr">
+                <a:shade val="63000"/>
+                <a:satMod val="120000"/>
+              </a:schemeClr>
+            </a:gs>
+          </a:gsLst>
+          <a:lin ang="5400000" scaled="0"/>
+        </a:gradFill>
+      </a:bgFillStyleLst>
+    </a:fmtScheme>
+  </a:themeElements>
+  <a:objectDefaults>
+    <a:lnDef>
+      <a:spPr/>
+      <a:bodyPr/>
+      <a:lstStyle/>
+      <a:style>
+        <a:lnRef idx="2">
+          <a:schemeClr val="accent1"/>
+        </a:lnRef>
+        <a:fillRef idx="0">
+          <a:schemeClr val="accent1"/>
+        </a:fillRef>
+        <a:effectRef idx="1">
+          <a:schemeClr val="accent1"/>
+        </a:effectRef>
+        <a:fontRef idx="minor">
+          <a:schemeClr val="tx1"/>
+        </a:fontRef>
+      </a:style>
+    </a:lnDef>
+  </a:objectDefaults>
+  <a:extraClrSchemeLst/>
+  <a:extLst>
+    <a:ext uri="{05A4C25C-085E-4340-85A3-A5531E510DB2}">
+      <thm15:themeFamily xmlns:thm15="http://schemas.microsoft.com/office/thememl/2012/main" name="Office Theme" id="{2E142A2C-CD16-42D6-873A-C26D2A0506FA}" vid="{1BDDFF52-6CD6-40A5-AB3C-68EB2F1E4D0A}"/>
+    </a:ext>
+  </a:extLst>
+</a:theme>
 </file>